--- a/en_primeur_lab_meeting.pptx
+++ b/en_primeur_lab_meeting.pptx
@@ -3112,7 +3112,7 @@
         </p:nvSpPr>
         <p:spPr>
           <a:xfrm>
-            <a:off x="640080" y="640080"/>
+            <a:off x="640080" y="594360"/>
             <a:ext cx="10972800" cy="822960"/>
           </a:xfrm>
           <a:prstGeom prst="rect">
@@ -3129,7 +3129,7 @@
               <a:buNone/>
             </a:pPr>
             <a:r>
-              <a:rPr lang="en-US" sz="3200" b="1" dirty="0">
+              <a:rPr lang="en-US" sz="3400" b="1" dirty="0">
                 <a:solidFill>
                   <a:srgbClr val="F3ECD8"/>
                 </a:solidFill>
@@ -3137,9 +3137,9 @@
                 <a:ea typeface="Cambria" pitchFamily="34" charset="-122"/>
                 <a:cs typeface="Cambria" pitchFamily="34" charset="-120"/>
               </a:rPr>
-              <a:t>What the speed really means</a:t>
+              <a:t>Why it matters</a:t>
             </a:r>
-            <a:endParaRPr lang="en-US" sz="3200" dirty="0"/>
+            <a:endParaRPr lang="en-US" sz="3400" dirty="0"/>
           </a:p>
         </p:txBody>
       </p:sp>
@@ -3151,8 +3151,8 @@
         </p:nvSpPr>
         <p:spPr>
           <a:xfrm>
-            <a:off x="640080" y="1828800"/>
-            <a:ext cx="5029200" cy="1463040"/>
+            <a:off x="640080" y="1737360"/>
+            <a:ext cx="5120640" cy="731520"/>
           </a:xfrm>
           <a:prstGeom prst="rect">
             <a:avLst/>
@@ -3168,7 +3168,7 @@
               <a:buNone/>
             </a:pPr>
             <a:r>
-              <a:rPr lang="en-US" sz="9600" b="1" dirty="0">
+              <a:rPr lang="en-US" sz="3000" b="1" dirty="0">
                 <a:solidFill>
                   <a:srgbClr val="A2823E"/>
                 </a:solidFill>
@@ -3176,9 +3176,9 @@
                 <a:ea typeface="Cambria" pitchFamily="34" charset="-122"/>
                 <a:cs typeface="Cambria" pitchFamily="34" charset="-120"/>
               </a:rPr>
-              <a:t>~50×</a:t>
+              <a:t>Media design</a:t>
             </a:r>
-            <a:endParaRPr lang="en-US" sz="9600" dirty="0"/>
+            <a:endParaRPr lang="en-US" sz="3000" dirty="0"/>
           </a:p>
         </p:txBody>
       </p:sp>
@@ -3190,8 +3190,8 @@
         </p:nvSpPr>
         <p:spPr>
           <a:xfrm>
-            <a:off x="640080" y="3383280"/>
-            <a:ext cx="5120640" cy="1463040"/>
+            <a:off x="640080" y="2514600"/>
+            <a:ext cx="5120640" cy="3017520"/>
           </a:xfrm>
           <a:prstGeom prst="rect">
             <a:avLst/>
@@ -3205,7 +3205,7 @@
           <a:p>
             <a:pPr algn="l" indent="0" marL="0">
               <a:lnSpc>
-                <a:spcPct val="120000"/>
+                <a:spcPct val="125000"/>
               </a:lnSpc>
               <a:buNone/>
             </a:pPr>
@@ -3218,33 +3218,8 @@
                 <a:ea typeface="Calibri" pitchFamily="34" charset="-122"/>
                 <a:cs typeface="Calibri" pitchFamily="34" charset="-120"/>
               </a:rPr>
-              <a:t>faster than a fair GPU solver on this simplified ODE, where the exact solution is already cheap.</a:t>
+              <a:t>A model that predicts state change better than random has </a:t>
             </a:r>
-            <a:endParaRPr lang="en-US" sz="1800" dirty="0"/>
-          </a:p>
-        </p:txBody>
-      </p:sp>
-      <p:sp>
-        <p:nvSpPr>
-          <p:cNvPr id="5" name="Text 3"/>
-          <p:cNvSpPr/>
-          <p:nvPr/>
-        </p:nvSpPr>
-        <p:spPr>
-          <a:xfrm>
-            <a:off x="6400800" y="1920240"/>
-            <a:ext cx="5212080" cy="3200400"/>
-          </a:xfrm>
-          <a:prstGeom prst="rect">
-            <a:avLst/>
-          </a:prstGeom>
-          <a:noFill/>
-          <a:ln/>
-        </p:spPr>
-        <p:txBody>
-          <a:bodyPr wrap="square" lIns="0" tIns="0" rIns="0" bIns="0" rtlCol="0" anchor="t"/>
-          <a:lstStyle/>
-          <a:p>
             <a:pPr algn="l" indent="0" marL="0">
               <a:lnSpc>
                 <a:spcPct val="125000"/>
@@ -3252,16 +3227,15 @@
               <a:buNone/>
             </a:pPr>
             <a:r>
-              <a:rPr lang="en-US" sz="2000" b="1" dirty="0">
+              <a:rPr lang="en-US" sz="1800" b="1" dirty="0">
                 <a:solidFill>
-                  <a:srgbClr val="A2823E"/>
+                  <a:srgbClr val="F3ECD8"/>
                 </a:solidFill>
                 <a:latin typeface="Calibri" pitchFamily="34" charset="0"/>
                 <a:ea typeface="Calibri" pitchFamily="34" charset="-122"/>
                 <a:cs typeface="Calibri" pitchFamily="34" charset="-120"/>
               </a:rPr>
-              <a:t>The durable reason for a surrogate
-</a:t>
+              <a:t>learned what drives it.</a:t>
             </a:r>
             <a:pPr algn="l" indent="0" marL="0">
               <a:lnSpc>
@@ -3278,7 +3252,88 @@
                 <a:ea typeface="Calibri" pitchFamily="34" charset="-122"/>
                 <a:cs typeface="Calibri" pitchFamily="34" charset="-120"/>
               </a:rPr>
-              <a:t>is mechanistic models with </a:t>
+              <a:t> Read those importances out (sensitivity, attention, SHAP) and you get which conditions and media components matter. This does not depend on speed.</a:t>
+            </a:r>
+            <a:endParaRPr lang="en-US" sz="1800" dirty="0"/>
+          </a:p>
+        </p:txBody>
+      </p:sp>
+      <p:sp>
+        <p:nvSpPr>
+          <p:cNvPr id="5" name="Text 3"/>
+          <p:cNvSpPr/>
+          <p:nvPr/>
+        </p:nvSpPr>
+        <p:spPr>
+          <a:xfrm>
+            <a:off x="6400800" y="1737360"/>
+            <a:ext cx="5120640" cy="731520"/>
+          </a:xfrm>
+          <a:prstGeom prst="rect">
+            <a:avLst/>
+          </a:prstGeom>
+          <a:noFill/>
+          <a:ln/>
+        </p:spPr>
+        <p:txBody>
+          <a:bodyPr wrap="square" lIns="0" tIns="0" rIns="0" bIns="0" rtlCol="0" anchor="ctr"/>
+          <a:lstStyle/>
+          <a:p>
+            <a:pPr algn="l" indent="0" marL="0">
+              <a:buNone/>
+            </a:pPr>
+            <a:r>
+              <a:rPr lang="en-US" sz="3000" b="1" dirty="0">
+                <a:solidFill>
+                  <a:srgbClr val="A2823E"/>
+                </a:solidFill>
+                <a:latin typeface="Cambria" pitchFamily="34" charset="0"/>
+                <a:ea typeface="Cambria" pitchFamily="34" charset="-122"/>
+                <a:cs typeface="Cambria" pitchFamily="34" charset="-120"/>
+              </a:rPr>
+              <a:t>Speed, conditional</a:t>
+            </a:r>
+            <a:endParaRPr lang="en-US" sz="3000" dirty="0"/>
+          </a:p>
+        </p:txBody>
+      </p:sp>
+      <p:sp>
+        <p:nvSpPr>
+          <p:cNvPr id="6" name="Text 4"/>
+          <p:cNvSpPr/>
+          <p:nvPr/>
+        </p:nvSpPr>
+        <p:spPr>
+          <a:xfrm>
+            <a:off x="6400800" y="2514600"/>
+            <a:ext cx="5120640" cy="3017520"/>
+          </a:xfrm>
+          <a:prstGeom prst="rect">
+            <a:avLst/>
+          </a:prstGeom>
+          <a:noFill/>
+          <a:ln/>
+        </p:spPr>
+        <p:txBody>
+          <a:bodyPr wrap="square" lIns="0" tIns="0" rIns="0" bIns="0" rtlCol="0" anchor="t"/>
+          <a:lstStyle/>
+          <a:p>
+            <a:pPr algn="l" indent="0" marL="0">
+              <a:lnSpc>
+                <a:spcPct val="125000"/>
+              </a:lnSpc>
+              <a:buNone/>
+            </a:pPr>
+            <a:r>
+              <a:rPr lang="en-US" sz="1800" dirty="0">
+                <a:solidFill>
+                  <a:srgbClr val="F3ECD8"/>
+                </a:solidFill>
+                <a:latin typeface="Calibri" pitchFamily="34" charset="0"/>
+                <a:ea typeface="Calibri" pitchFamily="34" charset="-122"/>
+                <a:cs typeface="Calibri" pitchFamily="34" charset="-120"/>
+              </a:rPr>
+              <a:t>Faster than solving the ODE, but the margin depends on the solver. The </a:t>
             </a:r>
             <a:pPr algn="l" indent="0" marL="0">
               <a:lnSpc>
@@ -3295,7 +3350,7 @@
                 <a:ea typeface="Calibri" pitchFamily="34" charset="-122"/>
                 <a:cs typeface="Calibri" pitchFamily="34" charset="-120"/>
               </a:rPr>
-              <a:t>no closed form</a:t>
+              <a:t>durable</a:t>
             </a:r>
             <a:pPr algn="l" indent="0" marL="0">
               <a:lnSpc>
@@ -3312,7 +3367,7 @@
                 <a:ea typeface="Calibri" pitchFamily="34" charset="-122"/>
                 <a:cs typeface="Calibri" pitchFamily="34" charset="-120"/>
               </a:rPr>
-              <a:t> (the full flux-balance COSMIC-dFBA), where a general solver like torchdiffeq pays a ~2,000× penalty the NN avoids.</a:t>
+              <a:t> win is mechanistic models with no closed form (the full flux-balance COSMIC-dFBA), where a general solver pays a ~2,000× penalty the NN avoids.</a:t>
             </a:r>
             <a:endParaRPr lang="en-US" sz="1800" dirty="0"/>
           </a:p>
@@ -4483,7 +4538,7 @@
                 <a:ea typeface="Calibri" pitchFamily="34" charset="-122"/>
                 <a:cs typeface="Calibri" pitchFamily="34" charset="-120"/>
               </a:rPr>
-              <a:t>Hybrid: ODE in the forward pass, keep the MSE loss, report generate-vs-predict timing (started).</a:t>
+              <a:t>Lazy training: add data for each new condition as it is encountered and retrain (~4 min). The hard part is detecting out-of-distribution inputs, knowing when to add.</a:t>
             </a:r>
             <a:endParaRPr lang="en-US" sz="1450" dirty="0"/>
           </a:p>
@@ -4545,7 +4600,7 @@
                 <a:ea typeface="Calibri" pitchFamily="34" charset="-122"/>
                 <a:cs typeface="Calibri" pitchFamily="34" charset="-120"/>
               </a:rPr>
-              <a:t>Continuous-time PINN (differential form of the physics penalty).</a:t>
+              <a:t>Hybrid ODE-in-forward inference timing; continuous-time PINN.</a:t>
             </a:r>
             <a:endParaRPr lang="en-US" sz="1450" dirty="0"/>
           </a:p>
@@ -9566,7 +9621,7 @@
                 <a:ea typeface="Cambria" pitchFamily="34" charset="-122"/>
                 <a:cs typeface="Cambria" pitchFamily="34" charset="-120"/>
               </a:rPr>
-              <a:t>You were right #2: was the speed test fair?</a:t>
+              <a:t>Inference: NN vs generating the run</a:t>
             </a:r>
             <a:endParaRPr lang="en-US" sz="3200" dirty="0"/>
           </a:p>
@@ -9581,7 +9636,7 @@
         <p:spPr>
           <a:xfrm>
             <a:off x="548640" y="1508760"/>
-            <a:ext cx="5394960" cy="1828800"/>
+            <a:ext cx="5394960" cy="1920240"/>
           </a:xfrm>
           <a:prstGeom prst="rect">
             <a:avLst/>
@@ -9608,7 +9663,7 @@
                 <a:ea typeface="Calibri" pitchFamily="34" charset="-122"/>
                 <a:cs typeface="Calibri" pitchFamily="34" charset="-120"/>
               </a:rPr>
-              <a:t>The old “3,000×” compared a CPU solver against a batched GPU network, mostly a hardware difference. We re-timed every method the same way and on the same device, and added </a:t>
+              <a:t>Generating a run = solving the ODE, and that IS the mechanistic model (predictive, just not neural). We time NN inference against it, same device where we can. </a:t>
             </a:r>
             <a:pPr algn="l" indent="0" marL="0">
               <a:lnSpc>
@@ -9625,7 +9680,7 @@
                 <a:ea typeface="Calibri" pitchFamily="34" charset="-122"/>
                 <a:cs typeface="Calibri" pitchFamily="34" charset="-120"/>
               </a:rPr>
-              <a:t>torchdiffeq</a:t>
+              <a:t>scipy is CPU-only</a:t>
             </a:r>
             <a:pPr algn="l" indent="0" marL="0">
               <a:lnSpc>
@@ -9642,7 +9697,7 @@
                 <a:ea typeface="Calibri" pitchFamily="34" charset="-122"/>
                 <a:cs typeface="Calibri" pitchFamily="34" charset="-120"/>
               </a:rPr>
-              <a:t> as a fair GPU-solver baseline.</a:t>
+              <a:t>; the fair on-GPU baselines are torchdiffeq and the exact closed-form step.</a:t>
             </a:r>
             <a:endParaRPr lang="en-US" sz="1600" dirty="0"/>
           </a:p>
@@ -9657,7 +9712,7 @@
         <p:spPr>
           <a:xfrm>
             <a:off x="548640" y="3657600"/>
-            <a:ext cx="5394960" cy="1463040"/>
+            <a:ext cx="5394960" cy="1554480"/>
           </a:xfrm>
           <a:prstGeom prst="rect">
             <a:avLst/>
@@ -9701,7 +9756,7 @@
                 <a:ea typeface="Calibri" pitchFamily="34" charset="-122"/>
                 <a:cs typeface="Calibri" pitchFamily="34" charset="-120"/>
               </a:rPr>
-              <a:t>Against a fair GPU solver the NN is ~50× faster, not 100,000×. The rest was scipy being CPU-bound.</a:t>
+              <a:t>Thousands of times faster than a general solver, but only ~2–3× faster than the exact closed-form step on the same GPU. Our ODE is simple enough to have a closed form; the big win is for models that do not.</a:t>
             </a:r>
             <a:endParaRPr lang="en-US" sz="1600" dirty="0"/>
           </a:p>

--- a/en_primeur_lab_meeting.pptx
+++ b/en_primeur_lab_meeting.pptx
@@ -9756,7 +9756,7 @@
                 <a:ea typeface="Calibri" pitchFamily="34" charset="-122"/>
                 <a:cs typeface="Calibri" pitchFamily="34" charset="-120"/>
               </a:rPr>
-              <a:t>Thousands of times faster than a general solver, but only ~2–3× faster than the exact closed-form step on the same GPU. Our ODE is simple enough to have a closed form; the big win is for models that do not.</a:t>
+              <a:t>On this ODE the exact closed-form solve on the GPU is actually faster than the NN. The NN only beats a general solver (~9.5×); the huge scipy number is hardware. Speed is not the win here.</a:t>
             </a:r>
             <a:endParaRPr lang="en-US" sz="1600" dirty="0"/>
           </a:p>
@@ -9785,10 +9785,10 @@
             <a:tbl>
               <a:tblPr/>
               <a:tblGrid>
-                <a:gridCol w="2560320"/>
+                <a:gridCol w="2651760"/>
                 <a:gridCol w="1005840"/>
-                <a:gridCol w="868680"/>
-                <a:gridCol w="868680"/>
+                <a:gridCol w="822960"/>
+                <a:gridCol w="822960"/>
               </a:tblGrid>
               <a:tr h="566928">
                 <a:tc>
@@ -10150,7 +10150,7 @@
                           <a:ea typeface="Calibri" pitchFamily="34" charset="-122"/>
                           <a:cs typeface="Calibri" pitchFamily="34" charset="-120"/>
                         </a:rPr>
-                        <a:t>25.06</a:t>
+                        <a:t>25.25</a:t>
                       </a:r>
                       <a:endParaRPr lang="en-US" sz="1250" dirty="0">
                         <a:latin typeface="Calibri" charset="0"/>
@@ -10424,7 +10424,7 @@
                           <a:ea typeface="Calibri" pitchFamily="34" charset="-122"/>
                           <a:cs typeface="Calibri" pitchFamily="34" charset="-120"/>
                         </a:rPr>
-                        <a:t>0.012</a:t>
+                        <a:t>0.013</a:t>
                       </a:r>
                       <a:endParaRPr lang="en-US" sz="1250" dirty="0">
                         <a:latin typeface="Calibri" charset="0"/>
@@ -10622,9 +10622,9 @@
                         <a:buNone/>
                       </a:pPr>
                       <a:r>
-                        <a:rPr lang="en-US" sz="1250" dirty="0">
+                        <a:rPr lang="en-US" sz="1250" b="1" dirty="0">
                           <a:solidFill>
-                            <a:srgbClr val="2B211A"/>
+                            <a:srgbClr val="3A4A2E"/>
                           </a:solidFill>
                           <a:latin typeface="Calibri" pitchFamily="34" charset="0"/>
                           <a:ea typeface="Calibri" pitchFamily="34" charset="-122"/>
@@ -10690,9 +10690,9 @@
                         <a:buNone/>
                       </a:pPr>
                       <a:r>
-                        <a:rPr lang="en-US" sz="1250" dirty="0">
+                        <a:rPr lang="en-US" sz="1250" b="1" dirty="0">
                           <a:solidFill>
-                            <a:srgbClr val="2B211A"/>
+                            <a:srgbClr val="3A4A2E"/>
                           </a:solidFill>
                           <a:latin typeface="Calibri" pitchFamily="34" charset="0"/>
                           <a:ea typeface="Calibri" pitchFamily="34" charset="-122"/>
@@ -10758,9 +10758,9 @@
                         <a:buNone/>
                       </a:pPr>
                       <a:r>
-                        <a:rPr lang="en-US" sz="1250" dirty="0">
+                        <a:rPr lang="en-US" sz="1250" b="1" dirty="0">
                           <a:solidFill>
-                            <a:srgbClr val="2B211A"/>
+                            <a:srgbClr val="3A4A2E"/>
                           </a:solidFill>
                           <a:latin typeface="Calibri" pitchFamily="34" charset="0"/>
                           <a:ea typeface="Calibri" pitchFamily="34" charset="-122"/>
@@ -10826,15 +10826,15 @@
                         <a:buNone/>
                       </a:pPr>
                       <a:r>
-                        <a:rPr lang="en-US" sz="1250" dirty="0">
+                        <a:rPr lang="en-US" sz="1250" b="1" dirty="0">
                           <a:solidFill>
-                            <a:srgbClr val="2B211A"/>
+                            <a:srgbClr val="3A4A2E"/>
                           </a:solidFill>
                           <a:latin typeface="Calibri" pitchFamily="34" charset="0"/>
                           <a:ea typeface="Calibri" pitchFamily="34" charset="-122"/>
                           <a:cs typeface="Calibri" pitchFamily="34" charset="-120"/>
                         </a:rPr>
-                        <a:t>23×</a:t>
+                        <a:t>24×</a:t>
                       </a:r>
                       <a:endParaRPr lang="en-US" sz="1250" dirty="0">
                         <a:latin typeface="Calibri" charset="0"/>
@@ -10904,7 +10904,7 @@
                           <a:ea typeface="Calibri" pitchFamily="34" charset="-122"/>
                           <a:cs typeface="Calibri" pitchFamily="34" charset="-120"/>
                         </a:rPr>
-                        <a:t>pure NN (GPU)</a:t>
+                        <a:t>pure NN (GPU, real net)</a:t>
                       </a:r>
                       <a:endParaRPr lang="en-US" sz="1250" dirty="0">
                         <a:latin typeface="Calibri" charset="0"/>
@@ -10972,7 +10972,7 @@
                           <a:ea typeface="Calibri" pitchFamily="34" charset="-122"/>
                           <a:cs typeface="Calibri" pitchFamily="34" charset="-120"/>
                         </a:rPr>
-                        <a:t>0.0002</a:t>
+                        <a:t>0.0013</a:t>
                       </a:r>
                       <a:endParaRPr lang="en-US" sz="1250" dirty="0">
                         <a:latin typeface="Calibri" charset="0"/>
@@ -11040,7 +11040,7 @@
                           <a:ea typeface="Calibri" pitchFamily="34" charset="-122"/>
                           <a:cs typeface="Calibri" pitchFamily="34" charset="-120"/>
                         </a:rPr>
-                        <a:t>103,000×</a:t>
+                        <a:t>18,900×</a:t>
                       </a:r>
                       <a:endParaRPr lang="en-US" sz="1250" dirty="0">
                         <a:latin typeface="Calibri" charset="0"/>
@@ -11108,7 +11108,7 @@
                           <a:ea typeface="Calibri" pitchFamily="34" charset="-122"/>
                           <a:cs typeface="Calibri" pitchFamily="34" charset="-120"/>
                         </a:rPr>
-                        <a:t>50×</a:t>
+                        <a:t>9.5×</a:t>
                       </a:r>
                       <a:endParaRPr lang="en-US" sz="1250" dirty="0">
                         <a:latin typeface="Calibri" charset="0"/>
@@ -11172,8 +11172,8 @@
         </p:nvSpPr>
         <p:spPr>
           <a:xfrm>
-            <a:off x="6400800" y="5212080"/>
-            <a:ext cx="5303520" cy="365760"/>
+            <a:off x="6400800" y="5166360"/>
+            <a:ext cx="5303520" cy="640080"/>
           </a:xfrm>
           <a:prstGeom prst="rect">
             <a:avLst/>
@@ -11182,14 +11182,14 @@
           <a:ln/>
         </p:spPr>
         <p:txBody>
-          <a:bodyPr wrap="square" lIns="0" tIns="0" rIns="0" bIns="0" rtlCol="0" anchor="ctr"/>
+          <a:bodyPr wrap="square" lIns="0" tIns="0" rIns="0" bIns="0" rtlCol="0" anchor="t"/>
           <a:lstStyle/>
           <a:p>
             <a:pPr algn="l" indent="0" marL="0">
               <a:buNone/>
             </a:pPr>
             <a:r>
-              <a:rPr lang="en-US" sz="1200" i="1" dirty="0">
+              <a:rPr lang="en-US" sz="1100" i="1" dirty="0">
                 <a:solidFill>
                   <a:srgbClr val="7A6E5A"/>
                 </a:solidFill>
@@ -11197,9 +11197,9 @@
                 <a:ea typeface="Calibri" pitchFamily="34" charset="-122"/>
                 <a:cs typeface="Calibri" pitchFamily="34" charset="-120"/>
               </a:rPr>
-              <a:t>A100, n = 20,000, timed in a sustained loop.</a:t>
+              <a:t>A100, n = 20,000, sustained loop. NN = real model (hidden 64, 3 conv). Green: the closed-form ODE beats the NN.</a:t>
             </a:r>
-            <a:endParaRPr lang="en-US" sz="1200" dirty="0"/>
+            <a:endParaRPr lang="en-US" sz="1100" dirty="0"/>
           </a:p>
         </p:txBody>
       </p:sp>

--- a/en_primeur_lab_meeting.pptx
+++ b/en_primeur_lab_meeting.pptx
@@ -3291,7 +3291,7 @@
                 <a:ea typeface="Cambria" pitchFamily="34" charset="-122"/>
                 <a:cs typeface="Cambria" pitchFamily="34" charset="-120"/>
               </a:rPr>
-              <a:t>Speed, conditional</a:t>
+              <a:t>Real-time monitoring</a:t>
             </a:r>
             <a:endParaRPr lang="en-US" sz="3000" dirty="0"/>
           </a:p>
@@ -3306,7 +3306,7 @@
         <p:spPr>
           <a:xfrm>
             <a:off x="6400800" y="2514600"/>
-            <a:ext cx="5120640" cy="3017520"/>
+            <a:ext cx="5120640" cy="3108960"/>
           </a:xfrm>
           <a:prstGeom prst="rect">
             <a:avLst/>
@@ -3320,12 +3320,12 @@
           <a:p>
             <a:pPr algn="l" indent="0" marL="0">
               <a:lnSpc>
-                <a:spcPct val="125000"/>
+                <a:spcPct val="120000"/>
               </a:lnSpc>
               <a:buNone/>
             </a:pPr>
             <a:r>
-              <a:rPr lang="en-US" sz="1800" dirty="0">
+              <a:rPr lang="en-US" sz="1700" dirty="0">
                 <a:solidFill>
                   <a:srgbClr val="F3ECD8"/>
                 </a:solidFill>
@@ -3333,16 +3333,16 @@
                 <a:ea typeface="Calibri" pitchFamily="34" charset="-122"/>
                 <a:cs typeface="Calibri" pitchFamily="34" charset="-120"/>
               </a:rPr>
-              <a:t>Faster than solving the ODE, but the margin depends on the solver. The </a:t>
+              <a:t>A fast, interpretable surrogate enables Process Analytical Technology and Real-Time Release Testing, prediction and explanation </a:t>
             </a:r>
             <a:pPr algn="l" indent="0" marL="0">
               <a:lnSpc>
-                <a:spcPct val="125000"/>
+                <a:spcPct val="120000"/>
               </a:lnSpc>
               <a:buNone/>
             </a:pPr>
             <a:r>
-              <a:rPr lang="en-US" sz="1800" b="1" dirty="0">
+              <a:rPr lang="en-US" sz="1700" b="1" dirty="0">
                 <a:solidFill>
                   <a:srgbClr val="F3ECD8"/>
                 </a:solidFill>
@@ -3350,16 +3350,16 @@
                 <a:ea typeface="Calibri" pitchFamily="34" charset="-122"/>
                 <a:cs typeface="Calibri" pitchFamily="34" charset="-120"/>
               </a:rPr>
-              <a:t>durable</a:t>
+              <a:t>during</a:t>
             </a:r>
             <a:pPr algn="l" indent="0" marL="0">
               <a:lnSpc>
-                <a:spcPct val="125000"/>
+                <a:spcPct val="120000"/>
               </a:lnSpc>
               <a:buNone/>
             </a:pPr>
             <a:r>
-              <a:rPr lang="en-US" sz="1800" dirty="0">
+              <a:rPr lang="en-US" sz="1700" dirty="0">
                 <a:solidFill>
                   <a:srgbClr val="F3ECD8"/>
                 </a:solidFill>
@@ -3367,9 +3367,38 @@
                 <a:ea typeface="Calibri" pitchFamily="34" charset="-122"/>
                 <a:cs typeface="Calibri" pitchFamily="34" charset="-120"/>
               </a:rPr>
-              <a:t> win is mechanistic models with no closed form (the full flux-balance COSMIC-dFBA), where a general solver pays a ~2,000× penalty the NN avoids.</a:t>
-            </a:r>
-            <a:endParaRPr lang="en-US" sz="1800" dirty="0"/>
+              <a:t> a run, not offline.</a:t>
+            </a:r>
+            <a:endParaRPr lang="en-US" sz="1700" dirty="0"/>
+          </a:p>
+          <a:p>
+            <a:pPr algn="l" indent="0" marL="0">
+              <a:lnSpc>
+                <a:spcPct val="120000"/>
+              </a:lnSpc>
+              <a:buNone/>
+            </a:pPr>
+            <a:endParaRPr lang="en-US" sz="1700" dirty="0"/>
+          </a:p>
+          <a:p>
+            <a:pPr algn="l" indent="0" marL="0">
+              <a:lnSpc>
+                <a:spcPct val="120000"/>
+              </a:lnSpc>
+              <a:buNone/>
+            </a:pPr>
+            <a:r>
+              <a:rPr lang="en-US" sz="1700" dirty="0">
+                <a:solidFill>
+                  <a:srgbClr val="F3ECD8"/>
+                </a:solidFill>
+                <a:latin typeface="Calibri" pitchFamily="34" charset="0"/>
+                <a:ea typeface="Calibri" pitchFamily="34" charset="-122"/>
+                <a:cs typeface="Calibri" pitchFamily="34" charset="-120"/>
+              </a:rPr>
+              <a:t>Precedent: Patel &amp; Patel (2026) use SHAP on Raman spectra to find the drivers of glucose and acetate, toward PAT/RTRT.</a:t>
+            </a:r>
+            <a:endParaRPr lang="en-US" sz="1700" dirty="0"/>
           </a:p>
         </p:txBody>
       </p:sp>
@@ -6890,7 +6919,7 @@
                           <a:ea typeface="Calibri" pitchFamily="34" charset="-122"/>
                           <a:cs typeface="Calibri" pitchFamily="34" charset="-120"/>
                         </a:rPr>
-                        <a:t>0.99</a:t>
+                        <a:t>0.98</a:t>
                       </a:r>
                       <a:endParaRPr lang="en-US" sz="1300" dirty="0">
                         <a:latin typeface="Calibri" charset="0"/>
@@ -6958,7 +6987,7 @@
                           <a:ea typeface="Calibri" pitchFamily="34" charset="-122"/>
                           <a:cs typeface="Calibri" pitchFamily="34" charset="-120"/>
                         </a:rPr>
-                        <a:t>0.77</a:t>
+                        <a:t>0.91</a:t>
                       </a:r>
                       <a:endParaRPr lang="en-US" sz="1300" dirty="0">
                         <a:latin typeface="Calibri" charset="0"/>
@@ -7416,7 +7445,7 @@
                           <a:ea typeface="Calibri" pitchFamily="34" charset="-122"/>
                           <a:cs typeface="Calibri" pitchFamily="34" charset="-120"/>
                         </a:rPr>
-                        <a:t>0.97</a:t>
+                        <a:t>0.95</a:t>
                       </a:r>
                       <a:endParaRPr lang="en-US" sz="1300" dirty="0">
                         <a:latin typeface="Calibri" charset="0"/>
@@ -7484,7 +7513,7 @@
                           <a:ea typeface="Calibri" pitchFamily="34" charset="-122"/>
                           <a:cs typeface="Calibri" pitchFamily="34" charset="-120"/>
                         </a:rPr>
-                        <a:t>0.98</a:t>
+                        <a:t>0.97</a:t>
                       </a:r>
                       <a:endParaRPr lang="en-US" sz="1300" dirty="0">
                         <a:latin typeface="Calibri" charset="0"/>
@@ -7690,7 +7719,7 @@
                           <a:ea typeface="Calibri" pitchFamily="34" charset="-122"/>
                           <a:cs typeface="Calibri" pitchFamily="34" charset="-120"/>
                         </a:rPr>
-                        <a:t>1.00</a:t>
+                        <a:t>0.99</a:t>
                       </a:r>
                       <a:endParaRPr lang="en-US" sz="1300" dirty="0">
                         <a:latin typeface="Calibri" charset="0"/>
@@ -7758,7 +7787,7 @@
                           <a:ea typeface="Calibri" pitchFamily="34" charset="-122"/>
                           <a:cs typeface="Calibri" pitchFamily="34" charset="-120"/>
                         </a:rPr>
-                        <a:t>0.95</a:t>
+                        <a:t>0.97</a:t>
                       </a:r>
                       <a:endParaRPr lang="en-US" sz="1300" dirty="0">
                         <a:latin typeface="Calibri" charset="0"/>
@@ -7953,7 +7982,7 @@
                           <a:ea typeface="Calibri" pitchFamily="34" charset="-122"/>
                           <a:cs typeface="Calibri" pitchFamily="34" charset="-120"/>
                         </a:rPr>
-                        <a:t>0.97</a:t>
+                        <a:t>0.95</a:t>
                       </a:r>
                       <a:endParaRPr lang="en-US" sz="1300" dirty="0">
                         <a:latin typeface="Calibri" charset="0"/>
@@ -8021,7 +8050,7 @@
                           <a:ea typeface="Calibri" pitchFamily="34" charset="-122"/>
                           <a:cs typeface="Calibri" pitchFamily="34" charset="-120"/>
                         </a:rPr>
-                        <a:t>0.69</a:t>
+                        <a:t>0.53</a:t>
                       </a:r>
                       <a:endParaRPr lang="en-US" sz="1300" dirty="0">
                         <a:latin typeface="Calibri" charset="0"/>
@@ -8284,7 +8313,7 @@
                           <a:ea typeface="Calibri" pitchFamily="34" charset="-122"/>
                           <a:cs typeface="Calibri" pitchFamily="34" charset="-120"/>
                         </a:rPr>
-                        <a:t>0.79</a:t>
+                        <a:t>0.62</a:t>
                       </a:r>
                       <a:endParaRPr lang="en-US" sz="1300" dirty="0">
                         <a:latin typeface="Calibri" charset="0"/>
@@ -8547,7 +8576,7 @@
                           <a:ea typeface="Calibri" pitchFamily="34" charset="-122"/>
                           <a:cs typeface="Calibri" pitchFamily="34" charset="-120"/>
                         </a:rPr>
-                        <a:t>0.86</a:t>
+                        <a:t>0.63</a:t>
                       </a:r>
                       <a:endParaRPr lang="en-US" sz="1300" dirty="0">
                         <a:latin typeface="Calibri" charset="0"/>
@@ -8821,7 +8850,7 @@
                           <a:ea typeface="Calibri" pitchFamily="34" charset="-122"/>
                           <a:cs typeface="Calibri" pitchFamily="34" charset="-120"/>
                         </a:rPr>
-                        <a:t>0.51</a:t>
+                        <a:t>0.49</a:t>
                       </a:r>
                       <a:endParaRPr lang="en-US" sz="1300" dirty="0">
                         <a:latin typeface="Calibri" charset="0"/>
@@ -8953,8 +8982,8 @@
         </p:nvSpPr>
         <p:spPr>
           <a:xfrm>
-            <a:off x="6400800" y="5989320"/>
-            <a:ext cx="5212080" cy="365760"/>
+            <a:off x="6400800" y="5943600"/>
+            <a:ext cx="5212080" cy="548640"/>
           </a:xfrm>
           <a:prstGeom prst="rect">
             <a:avLst/>
@@ -8963,14 +8992,14 @@
           <a:ln/>
         </p:spPr>
         <p:txBody>
-          <a:bodyPr wrap="square" lIns="0" tIns="0" rIns="0" bIns="0" rtlCol="0" anchor="ctr"/>
+          <a:bodyPr wrap="square" lIns="0" tIns="0" rIns="0" bIns="0" rtlCol="0" anchor="t"/>
           <a:lstStyle/>
           <a:p>
             <a:pPr algn="l" indent="0" marL="0">
               <a:buNone/>
             </a:pPr>
             <a:r>
-              <a:rPr lang="en-US" sz="1200" i="1" dirty="0">
+              <a:rPr lang="en-US" sz="1100" i="1" dirty="0">
                 <a:solidFill>
                   <a:srgbClr val="7A6E5A"/>
                 </a:solidFill>
@@ -8978,9 +9007,9 @@
                 <a:ea typeface="Calibri" pitchFamily="34" charset="-122"/>
                 <a:cs typeface="Calibri" pitchFamily="34" charset="-120"/>
               </a:rPr>
-              <a:t>5 of 8 score R² 0.97–1.00; the amino acids read n/a only on the flat-window rule.</a:t>
-            </a:r>
-            <a:endParaRPr lang="en-US" sz="1200" dirty="0"/>
+              <a:t>5 of 8 score R² 0.95–0.99 (small model: 1 conv layer, hidden 32, chosen for xAI). Amino acids read n/a on the flat-window rule.</a:t>
+            </a:r>
+            <a:endParaRPr lang="en-US" sz="1100" dirty="0"/>
           </a:p>
         </p:txBody>
       </p:sp>
@@ -9057,7 +9086,7 @@
       </p:sp>
       <p:pic>
         <p:nvPicPr>
-          <p:cNvPr id="3" name="Image 0" descr="/Users/nevecallaway/code/COSMIC-dFBA-nn/figures/nn_baseline_parity_6.png">    </p:cNvPr>
+          <p:cNvPr id="3" name="Image 0" descr="/Users/nevecallaway/code/COSMIC-dFBA-nn/figures/nn_baseline_parity_final.png">    </p:cNvPr>
           <p:cNvPicPr>
             <a:picLocks noChangeAspect="1"/>
           </p:cNvPicPr>
@@ -9211,7 +9240,7 @@
       </p:sp>
       <p:pic>
         <p:nvPicPr>
-          <p:cNvPr id="3" name="Image 0" descr="/Users/nevecallaway/code/COSMIC-dFBA-nn/figures/nn_baseline_r2_Titer_6.png">    </p:cNvPr>
+          <p:cNvPr id="3" name="Image 0" descr="/Users/nevecallaway/code/COSMIC-dFBA-nn/figures/nn_baseline_r2_Titer_final.png">    </p:cNvPr>
           <p:cNvPicPr>
             <a:picLocks noChangeAspect="1"/>
           </p:cNvPicPr>
@@ -9621,7 +9650,7 @@
                 <a:ea typeface="Cambria" pitchFamily="34" charset="-122"/>
                 <a:cs typeface="Cambria" pitchFamily="34" charset="-120"/>
               </a:rPr>
-              <a:t>Inference: NN vs generating the run</a:t>
+              <a:t>Inference: NN vs the mechanistic model</a:t>
             </a:r>
             <a:endParaRPr lang="en-US" sz="3200" dirty="0"/>
           </a:p>
@@ -9635,8 +9664,47 @@
         </p:nvSpPr>
         <p:spPr>
           <a:xfrm>
-            <a:off x="548640" y="1508760"/>
-            <a:ext cx="5394960" cy="1920240"/>
+            <a:off x="548640" y="1463040"/>
+            <a:ext cx="5486400" cy="731520"/>
+          </a:xfrm>
+          <a:prstGeom prst="rect">
+            <a:avLst/>
+          </a:prstGeom>
+          <a:noFill/>
+          <a:ln/>
+        </p:spPr>
+        <p:txBody>
+          <a:bodyPr wrap="square" lIns="0" tIns="0" rIns="0" bIns="0" rtlCol="0" anchor="ctr"/>
+          <a:lstStyle/>
+          <a:p>
+            <a:pPr algn="l" indent="0" marL="0">
+              <a:buNone/>
+            </a:pPr>
+            <a:r>
+              <a:rPr lang="en-US" sz="3000" b="1" dirty="0">
+                <a:solidFill>
+                  <a:srgbClr val="6B2333"/>
+                </a:solidFill>
+                <a:latin typeface="Cambria" pitchFamily="34" charset="0"/>
+                <a:ea typeface="Cambria" pitchFamily="34" charset="-122"/>
+                <a:cs typeface="Cambria" pitchFamily="34" charset="-120"/>
+              </a:rPr>
+              <a:t>~15 min  →  0.0013 ms</a:t>
+            </a:r>
+            <a:endParaRPr lang="en-US" sz="3000" dirty="0"/>
+          </a:p>
+        </p:txBody>
+      </p:sp>
+      <p:sp>
+        <p:nvSpPr>
+          <p:cNvPr id="4" name="Text 2"/>
+          <p:cNvSpPr/>
+          <p:nvPr/>
+        </p:nvSpPr>
+        <p:spPr>
+          <a:xfrm>
+            <a:off x="548640" y="2286000"/>
+            <a:ext cx="5486400" cy="1463040"/>
           </a:xfrm>
           <a:prstGeom prst="rect">
             <a:avLst/>
@@ -9663,7 +9731,7 @@
                 <a:ea typeface="Calibri" pitchFamily="34" charset="-122"/>
                 <a:cs typeface="Calibri" pitchFamily="34" charset="-120"/>
               </a:rPr>
-              <a:t>Generating a run = solving the ODE, and that IS the mechanistic model (predictive, just not neural). We time NN inference against it, same device where we can. </a:t>
+              <a:t>COSMIC-dFBA takes </a:t>
             </a:r>
             <a:pPr algn="l" indent="0" marL="0">
               <a:lnSpc>
@@ -9680,7 +9748,7 @@
                 <a:ea typeface="Calibri" pitchFamily="34" charset="-122"/>
                 <a:cs typeface="Calibri" pitchFamily="34" charset="-120"/>
               </a:rPr>
-              <a:t>scipy is CPU-only</a:t>
+              <a:t>~15 minutes per reactor</a:t>
             </a:r>
             <a:pPr algn="l" indent="0" marL="0">
               <a:lnSpc>
@@ -9697,7 +9765,7 @@
                 <a:ea typeface="Calibri" pitchFamily="34" charset="-122"/>
                 <a:cs typeface="Calibri" pitchFamily="34" charset="-120"/>
               </a:rPr>
-              <a:t>; the fair on-GPU baselines are torchdiffeq and the exact closed-form step.</a:t>
+              <a:t> (Sarat: 3.7 GHz CPU, no parallelization, 1-day resolution). The NN predicts the same run in 0.0013 ms, hundreds of millions of times faster.</a:t>
             </a:r>
             <a:endParaRPr lang="en-US" sz="1600" dirty="0"/>
           </a:p>
@@ -9705,14 +9773,14 @@
       </p:sp>
       <p:sp>
         <p:nvSpPr>
-          <p:cNvPr id="4" name="Text 2"/>
+          <p:cNvPr id="5" name="Text 3"/>
           <p:cNvSpPr/>
           <p:nvPr/>
         </p:nvSpPr>
         <p:spPr>
           <a:xfrm>
-            <a:off x="548640" y="3657600"/>
-            <a:ext cx="5394960" cy="1554480"/>
+            <a:off x="548640" y="3794760"/>
+            <a:ext cx="5486400" cy="1554480"/>
           </a:xfrm>
           <a:prstGeom prst="rect">
             <a:avLst/>
@@ -9726,12 +9794,12 @@
           <a:p>
             <a:pPr algn="l" indent="0" marL="0">
               <a:lnSpc>
-                <a:spcPct val="120000"/>
+                <a:spcPct val="115000"/>
               </a:lnSpc>
               <a:buNone/>
             </a:pPr>
             <a:r>
-              <a:rPr lang="en-US" sz="1600" b="1" dirty="0">
+              <a:rPr lang="en-US" sz="1500" b="1" dirty="0">
                 <a:solidFill>
                   <a:srgbClr val="3A4A2E"/>
                 </a:solidFill>
@@ -9739,16 +9807,16 @@
                 <a:ea typeface="Calibri" pitchFamily="34" charset="-122"/>
                 <a:cs typeface="Calibri" pitchFamily="34" charset="-120"/>
               </a:rPr>
-              <a:t>Honest finding.  </a:t>
+              <a:t>Honest caveat (Sarat).  </a:t>
             </a:r>
             <a:pPr algn="l" indent="0" marL="0">
               <a:lnSpc>
-                <a:spcPct val="120000"/>
+                <a:spcPct val="115000"/>
               </a:lnSpc>
               <a:buNone/>
             </a:pPr>
             <a:r>
-              <a:rPr lang="en-US" sz="1600" dirty="0">
+              <a:rPr lang="en-US" sz="1500" dirty="0">
                 <a:solidFill>
                   <a:srgbClr val="2B211A"/>
                 </a:solidFill>
@@ -9756,9 +9824,48 @@
                 <a:ea typeface="Calibri" pitchFamily="34" charset="-122"/>
                 <a:cs typeface="Calibri" pitchFamily="34" charset="-120"/>
               </a:rPr>
-              <a:t>On this ODE the exact closed-form solve on the GPU is actually faster than the NN. The NN only beats a general solver (~9.5×); the huge scipy number is hardware. Speed is not the win here.</a:t>
-            </a:r>
-            <a:endParaRPr lang="en-US" sz="1600" dirty="0"/>
+              <a:t>Any empirical model beats a mechanistic flux-balance simulation, so this is expected. COSMIC-dFBA's niche is mechanistic insight; the speed enables real-time use, it is not the contribution.</a:t>
+            </a:r>
+            <a:endParaRPr lang="en-US" sz="1500" dirty="0"/>
+          </a:p>
+        </p:txBody>
+      </p:sp>
+      <p:sp>
+        <p:nvSpPr>
+          <p:cNvPr id="6" name="Text 4"/>
+          <p:cNvSpPr/>
+          <p:nvPr/>
+        </p:nvSpPr>
+        <p:spPr>
+          <a:xfrm>
+            <a:off x="6400800" y="1645920"/>
+            <a:ext cx="5212080" cy="640080"/>
+          </a:xfrm>
+          <a:prstGeom prst="rect">
+            <a:avLst/>
+          </a:prstGeom>
+          <a:noFill/>
+          <a:ln/>
+        </p:spPr>
+        <p:txBody>
+          <a:bodyPr wrap="square" lIns="0" tIns="0" rIns="0" bIns="0" rtlCol="0" anchor="t"/>
+          <a:lstStyle/>
+          <a:p>
+            <a:pPr algn="l" indent="0" marL="0">
+              <a:buNone/>
+            </a:pPr>
+            <a:r>
+              <a:rPr lang="en-US" sz="1200" i="1" dirty="0">
+                <a:solidFill>
+                  <a:srgbClr val="7A6E5A"/>
+                </a:solidFill>
+                <a:latin typeface="Calibri" pitchFamily="34" charset="0"/>
+                <a:ea typeface="Calibri" pitchFamily="34" charset="-122"/>
+                <a:cs typeface="Calibri" pitchFamily="34" charset="-120"/>
+              </a:rPr>
+              <a:t>A separate comparison: our fast synthetic generator (a simplified ODE, what we train on), not COSMIC-dFBA:</a:t>
+            </a:r>
+            <a:endParaRPr lang="en-US" sz="1200" dirty="0"/>
           </a:p>
         </p:txBody>
       </p:sp>
@@ -9777,20 +9884,19 @@
           </p:nvPr>
         </p:nvGraphicFramePr>
         <p:xfrm>
-          <a:off x="6400800" y="2286000"/>
-          <a:ext cx="5303520" cy="914400"/>
+          <a:off x="6400800" y="2468880"/>
+          <a:ext cx="5212080" cy="914400"/>
         </p:xfrm>
         <a:graphic>
           <a:graphicData uri="http://schemas.openxmlformats.org/drawingml/2006/table">
             <a:tbl>
               <a:tblPr/>
               <a:tblGrid>
-                <a:gridCol w="2651760"/>
-                <a:gridCol w="1005840"/>
-                <a:gridCol w="822960"/>
-                <a:gridCol w="822960"/>
+                <a:gridCol w="3017520"/>
+                <a:gridCol w="1097280"/>
+                <a:gridCol w="1097280"/>
               </a:tblGrid>
-              <a:tr h="566928">
+              <a:tr h="603504">
                 <a:tc>
                   <a:txBody>
                     <a:bodyPr/>
@@ -9995,76 +10101,8 @@
                     </a:solidFill>
                   </a:tcPr>
                 </a:tc>
-                <a:tc>
-                  <a:txBody>
-                    <a:bodyPr/>
-                    <a:lstStyle/>
-                    <a:p>
-                      <a:pPr algn="ctr" indent="0" marL="0">
-                        <a:buNone/>
-                      </a:pPr>
-                      <a:r>
-                        <a:rPr lang="en-US" sz="1250" b="1" dirty="0">
-                          <a:solidFill>
-                            <a:srgbClr val="F3ECD8"/>
-                          </a:solidFill>
-                          <a:latin typeface="Calibri" pitchFamily="34" charset="0"/>
-                          <a:ea typeface="Calibri" pitchFamily="34" charset="-122"/>
-                          <a:cs typeface="Calibri" pitchFamily="34" charset="-120"/>
-                        </a:rPr>
-                        <a:t>vs torchdiffeq</a:t>
-                      </a:r>
-                      <a:endParaRPr lang="en-US" sz="1250" dirty="0">
-                        <a:latin typeface="Calibri" charset="0"/>
-                        <a:ea typeface="Calibri" charset="0"/>
-                        <a:cs typeface="Calibri" charset="0"/>
-                      </a:endParaRPr>
-                    </a:p>
-                  </a:txBody>
-                  <a:tcPr marL="91440" marR="91440" marT="45720" marB="45720" anchor="ctr">
-                    <a:lnL w="12700" cap="flat" cmpd="sng" algn="ctr">
-                      <a:solidFill>
-                        <a:srgbClr val="E6DEC9"/>
-                      </a:solidFill>
-                      <a:prstDash val="solid"/>
-                      <a:round/>
-                      <a:headEnd type="none" w="med" len="med"/>
-                      <a:tailEnd type="none" w="med" len="med"/>
-                    </a:lnL>
-                    <a:lnR w="12700" cap="flat" cmpd="sng" algn="ctr">
-                      <a:solidFill>
-                        <a:srgbClr val="E6DEC9"/>
-                      </a:solidFill>
-                      <a:prstDash val="solid"/>
-                      <a:round/>
-                      <a:headEnd type="none" w="med" len="med"/>
-                      <a:tailEnd type="none" w="med" len="med"/>
-                    </a:lnR>
-                    <a:lnT w="12700" cap="flat" cmpd="sng" algn="ctr">
-                      <a:solidFill>
-                        <a:srgbClr val="E6DEC9"/>
-                      </a:solidFill>
-                      <a:prstDash val="solid"/>
-                      <a:round/>
-                      <a:headEnd type="none" w="med" len="med"/>
-                      <a:tailEnd type="none" w="med" len="med"/>
-                    </a:lnT>
-                    <a:lnB w="12700" cap="flat" cmpd="sng" algn="ctr">
-                      <a:solidFill>
-                        <a:srgbClr val="E6DEC9"/>
-                      </a:solidFill>
-                      <a:prstDash val="solid"/>
-                      <a:round/>
-                      <a:headEnd type="none" w="med" len="med"/>
-                      <a:tailEnd type="none" w="med" len="med"/>
-                    </a:lnB>
-                    <a:solidFill>
-                      <a:srgbClr val="6B2333"/>
-                    </a:solidFill>
-                  </a:tcPr>
-                </a:tc>
               </a:tr>
-              <a:tr h="566928">
+              <a:tr h="603504">
                 <a:tc>
                   <a:txBody>
                     <a:bodyPr/>
@@ -10269,350 +10307,8 @@
                     </a:solidFill>
                   </a:tcPr>
                 </a:tc>
-                <a:tc>
-                  <a:txBody>
-                    <a:bodyPr/>
-                    <a:lstStyle/>
-                    <a:p>
-                      <a:pPr algn="ctr" indent="0" marL="0">
-                        <a:buNone/>
-                      </a:pPr>
-                      <a:r>
-                        <a:rPr lang="en-US" sz="1250" dirty="0">
-                          <a:solidFill>
-                            <a:srgbClr val="7A6E5A"/>
-                          </a:solidFill>
-                          <a:latin typeface="Calibri" pitchFamily="34" charset="0"/>
-                          <a:ea typeface="Calibri" pitchFamily="34" charset="-122"/>
-                          <a:cs typeface="Calibri" pitchFamily="34" charset="-120"/>
-                        </a:rPr>
-                        <a:t>—</a:t>
-                      </a:r>
-                      <a:endParaRPr lang="en-US" sz="1250" dirty="0">
-                        <a:latin typeface="Calibri" charset="0"/>
-                        <a:ea typeface="Calibri" charset="0"/>
-                        <a:cs typeface="Calibri" charset="0"/>
-                      </a:endParaRPr>
-                    </a:p>
-                  </a:txBody>
-                  <a:tcPr marL="91440" marR="91440" marT="45720" marB="45720" anchor="ctr">
-                    <a:lnL w="12700" cap="flat" cmpd="sng" algn="ctr">
-                      <a:solidFill>
-                        <a:srgbClr val="E6DEC9"/>
-                      </a:solidFill>
-                      <a:prstDash val="solid"/>
-                      <a:round/>
-                      <a:headEnd type="none" w="med" len="med"/>
-                      <a:tailEnd type="none" w="med" len="med"/>
-                    </a:lnL>
-                    <a:lnR w="12700" cap="flat" cmpd="sng" algn="ctr">
-                      <a:solidFill>
-                        <a:srgbClr val="E6DEC9"/>
-                      </a:solidFill>
-                      <a:prstDash val="solid"/>
-                      <a:round/>
-                      <a:headEnd type="none" w="med" len="med"/>
-                      <a:tailEnd type="none" w="med" len="med"/>
-                    </a:lnR>
-                    <a:lnT w="12700" cap="flat" cmpd="sng" algn="ctr">
-                      <a:solidFill>
-                        <a:srgbClr val="E6DEC9"/>
-                      </a:solidFill>
-                      <a:prstDash val="solid"/>
-                      <a:round/>
-                      <a:headEnd type="none" w="med" len="med"/>
-                      <a:tailEnd type="none" w="med" len="med"/>
-                    </a:lnT>
-                    <a:lnB w="12700" cap="flat" cmpd="sng" algn="ctr">
-                      <a:solidFill>
-                        <a:srgbClr val="E6DEC9"/>
-                      </a:solidFill>
-                      <a:prstDash val="solid"/>
-                      <a:round/>
-                      <a:headEnd type="none" w="med" len="med"/>
-                      <a:tailEnd type="none" w="med" len="med"/>
-                    </a:lnB>
-                    <a:solidFill>
-                      <a:srgbClr val="FAF8F2"/>
-                    </a:solidFill>
-                  </a:tcPr>
-                </a:tc>
               </a:tr>
-              <a:tr h="566928">
-                <a:tc>
-                  <a:txBody>
-                    <a:bodyPr/>
-                    <a:lstStyle/>
-                    <a:p>
-                      <a:pPr algn="l" indent="0" marL="0">
-                        <a:buNone/>
-                      </a:pPr>
-                      <a:r>
-                        <a:rPr lang="en-US" sz="1250" dirty="0">
-                          <a:solidFill>
-                            <a:srgbClr val="2B211A"/>
-                          </a:solidFill>
-                          <a:latin typeface="Calibri" pitchFamily="34" charset="0"/>
-                          <a:ea typeface="Calibri" pitchFamily="34" charset="-122"/>
-                          <a:cs typeface="Calibri" pitchFamily="34" charset="-120"/>
-                        </a:rPr>
-                        <a:t>torchdiffeq (GPU)</a:t>
-                      </a:r>
-                      <a:endParaRPr lang="en-US" sz="1250" dirty="0">
-                        <a:latin typeface="Calibri" charset="0"/>
-                        <a:ea typeface="Calibri" charset="0"/>
-                        <a:cs typeface="Calibri" charset="0"/>
-                      </a:endParaRPr>
-                    </a:p>
-                  </a:txBody>
-                  <a:tcPr marL="91440" marR="91440" marT="45720" marB="45720" anchor="ctr">
-                    <a:lnL w="12700" cap="flat" cmpd="sng" algn="ctr">
-                      <a:solidFill>
-                        <a:srgbClr val="E6DEC9"/>
-                      </a:solidFill>
-                      <a:prstDash val="solid"/>
-                      <a:round/>
-                      <a:headEnd type="none" w="med" len="med"/>
-                      <a:tailEnd type="none" w="med" len="med"/>
-                    </a:lnL>
-                    <a:lnR w="12700" cap="flat" cmpd="sng" algn="ctr">
-                      <a:solidFill>
-                        <a:srgbClr val="E6DEC9"/>
-                      </a:solidFill>
-                      <a:prstDash val="solid"/>
-                      <a:round/>
-                      <a:headEnd type="none" w="med" len="med"/>
-                      <a:tailEnd type="none" w="med" len="med"/>
-                    </a:lnR>
-                    <a:lnT w="12700" cap="flat" cmpd="sng" algn="ctr">
-                      <a:solidFill>
-                        <a:srgbClr val="E6DEC9"/>
-                      </a:solidFill>
-                      <a:prstDash val="solid"/>
-                      <a:round/>
-                      <a:headEnd type="none" w="med" len="med"/>
-                      <a:tailEnd type="none" w="med" len="med"/>
-                    </a:lnT>
-                    <a:lnB w="12700" cap="flat" cmpd="sng" algn="ctr">
-                      <a:solidFill>
-                        <a:srgbClr val="E6DEC9"/>
-                      </a:solidFill>
-                      <a:prstDash val="solid"/>
-                      <a:round/>
-                      <a:headEnd type="none" w="med" len="med"/>
-                      <a:tailEnd type="none" w="med" len="med"/>
-                    </a:lnB>
-                    <a:solidFill>
-                      <a:srgbClr val="FAF8F2"/>
-                    </a:solidFill>
-                  </a:tcPr>
-                </a:tc>
-                <a:tc>
-                  <a:txBody>
-                    <a:bodyPr/>
-                    <a:lstStyle/>
-                    <a:p>
-                      <a:pPr algn="ctr" indent="0" marL="0">
-                        <a:buNone/>
-                      </a:pPr>
-                      <a:r>
-                        <a:rPr lang="en-US" sz="1250" dirty="0">
-                          <a:solidFill>
-                            <a:srgbClr val="2B211A"/>
-                          </a:solidFill>
-                          <a:latin typeface="Calibri" pitchFamily="34" charset="0"/>
-                          <a:ea typeface="Calibri" pitchFamily="34" charset="-122"/>
-                          <a:cs typeface="Calibri" pitchFamily="34" charset="-120"/>
-                        </a:rPr>
-                        <a:t>0.013</a:t>
-                      </a:r>
-                      <a:endParaRPr lang="en-US" sz="1250" dirty="0">
-                        <a:latin typeface="Calibri" charset="0"/>
-                        <a:ea typeface="Calibri" charset="0"/>
-                        <a:cs typeface="Calibri" charset="0"/>
-                      </a:endParaRPr>
-                    </a:p>
-                  </a:txBody>
-                  <a:tcPr marL="91440" marR="91440" marT="45720" marB="45720" anchor="ctr">
-                    <a:lnL w="12700" cap="flat" cmpd="sng" algn="ctr">
-                      <a:solidFill>
-                        <a:srgbClr val="E6DEC9"/>
-                      </a:solidFill>
-                      <a:prstDash val="solid"/>
-                      <a:round/>
-                      <a:headEnd type="none" w="med" len="med"/>
-                      <a:tailEnd type="none" w="med" len="med"/>
-                    </a:lnL>
-                    <a:lnR w="12700" cap="flat" cmpd="sng" algn="ctr">
-                      <a:solidFill>
-                        <a:srgbClr val="E6DEC9"/>
-                      </a:solidFill>
-                      <a:prstDash val="solid"/>
-                      <a:round/>
-                      <a:headEnd type="none" w="med" len="med"/>
-                      <a:tailEnd type="none" w="med" len="med"/>
-                    </a:lnR>
-                    <a:lnT w="12700" cap="flat" cmpd="sng" algn="ctr">
-                      <a:solidFill>
-                        <a:srgbClr val="E6DEC9"/>
-                      </a:solidFill>
-                      <a:prstDash val="solid"/>
-                      <a:round/>
-                      <a:headEnd type="none" w="med" len="med"/>
-                      <a:tailEnd type="none" w="med" len="med"/>
-                    </a:lnT>
-                    <a:lnB w="12700" cap="flat" cmpd="sng" algn="ctr">
-                      <a:solidFill>
-                        <a:srgbClr val="E6DEC9"/>
-                      </a:solidFill>
-                      <a:prstDash val="solid"/>
-                      <a:round/>
-                      <a:headEnd type="none" w="med" len="med"/>
-                      <a:tailEnd type="none" w="med" len="med"/>
-                    </a:lnB>
-                    <a:solidFill>
-                      <a:srgbClr val="FAF8F2"/>
-                    </a:solidFill>
-                  </a:tcPr>
-                </a:tc>
-                <a:tc>
-                  <a:txBody>
-                    <a:bodyPr/>
-                    <a:lstStyle/>
-                    <a:p>
-                      <a:pPr algn="ctr" indent="0" marL="0">
-                        <a:buNone/>
-                      </a:pPr>
-                      <a:r>
-                        <a:rPr lang="en-US" sz="1250" dirty="0">
-                          <a:solidFill>
-                            <a:srgbClr val="2B211A"/>
-                          </a:solidFill>
-                          <a:latin typeface="Calibri" pitchFamily="34" charset="0"/>
-                          <a:ea typeface="Calibri" pitchFamily="34" charset="-122"/>
-                          <a:cs typeface="Calibri" pitchFamily="34" charset="-120"/>
-                        </a:rPr>
-                        <a:t>2,000×</a:t>
-                      </a:r>
-                      <a:endParaRPr lang="en-US" sz="1250" dirty="0">
-                        <a:latin typeface="Calibri" charset="0"/>
-                        <a:ea typeface="Calibri" charset="0"/>
-                        <a:cs typeface="Calibri" charset="0"/>
-                      </a:endParaRPr>
-                    </a:p>
-                  </a:txBody>
-                  <a:tcPr marL="91440" marR="91440" marT="45720" marB="45720" anchor="ctr">
-                    <a:lnL w="12700" cap="flat" cmpd="sng" algn="ctr">
-                      <a:solidFill>
-                        <a:srgbClr val="E6DEC9"/>
-                      </a:solidFill>
-                      <a:prstDash val="solid"/>
-                      <a:round/>
-                      <a:headEnd type="none" w="med" len="med"/>
-                      <a:tailEnd type="none" w="med" len="med"/>
-                    </a:lnL>
-                    <a:lnR w="12700" cap="flat" cmpd="sng" algn="ctr">
-                      <a:solidFill>
-                        <a:srgbClr val="E6DEC9"/>
-                      </a:solidFill>
-                      <a:prstDash val="solid"/>
-                      <a:round/>
-                      <a:headEnd type="none" w="med" len="med"/>
-                      <a:tailEnd type="none" w="med" len="med"/>
-                    </a:lnR>
-                    <a:lnT w="12700" cap="flat" cmpd="sng" algn="ctr">
-                      <a:solidFill>
-                        <a:srgbClr val="E6DEC9"/>
-                      </a:solidFill>
-                      <a:prstDash val="solid"/>
-                      <a:round/>
-                      <a:headEnd type="none" w="med" len="med"/>
-                      <a:tailEnd type="none" w="med" len="med"/>
-                    </a:lnT>
-                    <a:lnB w="12700" cap="flat" cmpd="sng" algn="ctr">
-                      <a:solidFill>
-                        <a:srgbClr val="E6DEC9"/>
-                      </a:solidFill>
-                      <a:prstDash val="solid"/>
-                      <a:round/>
-                      <a:headEnd type="none" w="med" len="med"/>
-                      <a:tailEnd type="none" w="med" len="med"/>
-                    </a:lnB>
-                    <a:solidFill>
-                      <a:srgbClr val="FAF8F2"/>
-                    </a:solidFill>
-                  </a:tcPr>
-                </a:tc>
-                <a:tc>
-                  <a:txBody>
-                    <a:bodyPr/>
-                    <a:lstStyle/>
-                    <a:p>
-                      <a:pPr algn="ctr" indent="0" marL="0">
-                        <a:buNone/>
-                      </a:pPr>
-                      <a:r>
-                        <a:rPr lang="en-US" sz="1250" b="1" dirty="0">
-                          <a:solidFill>
-                            <a:srgbClr val="3A4A2E"/>
-                          </a:solidFill>
-                          <a:latin typeface="Calibri" pitchFamily="34" charset="0"/>
-                          <a:ea typeface="Calibri" pitchFamily="34" charset="-122"/>
-                          <a:cs typeface="Calibri" pitchFamily="34" charset="-120"/>
-                        </a:rPr>
-                        <a:t>1×</a:t>
-                      </a:r>
-                      <a:endParaRPr lang="en-US" sz="1250" dirty="0">
-                        <a:latin typeface="Calibri" charset="0"/>
-                        <a:ea typeface="Calibri" charset="0"/>
-                        <a:cs typeface="Calibri" charset="0"/>
-                      </a:endParaRPr>
-                    </a:p>
-                  </a:txBody>
-                  <a:tcPr marL="91440" marR="91440" marT="45720" marB="45720" anchor="ctr">
-                    <a:lnL w="12700" cap="flat" cmpd="sng" algn="ctr">
-                      <a:solidFill>
-                        <a:srgbClr val="E6DEC9"/>
-                      </a:solidFill>
-                      <a:prstDash val="solid"/>
-                      <a:round/>
-                      <a:headEnd type="none" w="med" len="med"/>
-                      <a:tailEnd type="none" w="med" len="med"/>
-                    </a:lnL>
-                    <a:lnR w="12700" cap="flat" cmpd="sng" algn="ctr">
-                      <a:solidFill>
-                        <a:srgbClr val="E6DEC9"/>
-                      </a:solidFill>
-                      <a:prstDash val="solid"/>
-                      <a:round/>
-                      <a:headEnd type="none" w="med" len="med"/>
-                      <a:tailEnd type="none" w="med" len="med"/>
-                    </a:lnR>
-                    <a:lnT w="12700" cap="flat" cmpd="sng" algn="ctr">
-                      <a:solidFill>
-                        <a:srgbClr val="E6DEC9"/>
-                      </a:solidFill>
-                      <a:prstDash val="solid"/>
-                      <a:round/>
-                      <a:headEnd type="none" w="med" len="med"/>
-                      <a:tailEnd type="none" w="med" len="med"/>
-                    </a:lnT>
-                    <a:lnB w="12700" cap="flat" cmpd="sng" algn="ctr">
-                      <a:solidFill>
-                        <a:srgbClr val="E6DEC9"/>
-                      </a:solidFill>
-                      <a:prstDash val="solid"/>
-                      <a:round/>
-                      <a:headEnd type="none" w="med" len="med"/>
-                      <a:tailEnd type="none" w="med" len="med"/>
-                    </a:lnB>
-                    <a:solidFill>
-                      <a:srgbClr val="FAF8F2"/>
-                    </a:solidFill>
-                  </a:tcPr>
-                </a:tc>
-              </a:tr>
-              <a:tr h="566928">
+              <a:tr h="603504">
                 <a:tc>
                   <a:txBody>
                     <a:bodyPr/>
@@ -10817,76 +10513,8 @@
                     </a:solidFill>
                   </a:tcPr>
                 </a:tc>
-                <a:tc>
-                  <a:txBody>
-                    <a:bodyPr/>
-                    <a:lstStyle/>
-                    <a:p>
-                      <a:pPr algn="ctr" indent="0" marL="0">
-                        <a:buNone/>
-                      </a:pPr>
-                      <a:r>
-                        <a:rPr lang="en-US" sz="1250" b="1" dirty="0">
-                          <a:solidFill>
-                            <a:srgbClr val="3A4A2E"/>
-                          </a:solidFill>
-                          <a:latin typeface="Calibri" pitchFamily="34" charset="0"/>
-                          <a:ea typeface="Calibri" pitchFamily="34" charset="-122"/>
-                          <a:cs typeface="Calibri" pitchFamily="34" charset="-120"/>
-                        </a:rPr>
-                        <a:t>24×</a:t>
-                      </a:r>
-                      <a:endParaRPr lang="en-US" sz="1250" dirty="0">
-                        <a:latin typeface="Calibri" charset="0"/>
-                        <a:ea typeface="Calibri" charset="0"/>
-                        <a:cs typeface="Calibri" charset="0"/>
-                      </a:endParaRPr>
-                    </a:p>
-                  </a:txBody>
-                  <a:tcPr marL="91440" marR="91440" marT="45720" marB="45720" anchor="ctr">
-                    <a:lnL w="12700" cap="flat" cmpd="sng" algn="ctr">
-                      <a:solidFill>
-                        <a:srgbClr val="E6DEC9"/>
-                      </a:solidFill>
-                      <a:prstDash val="solid"/>
-                      <a:round/>
-                      <a:headEnd type="none" w="med" len="med"/>
-                      <a:tailEnd type="none" w="med" len="med"/>
-                    </a:lnL>
-                    <a:lnR w="12700" cap="flat" cmpd="sng" algn="ctr">
-                      <a:solidFill>
-                        <a:srgbClr val="E6DEC9"/>
-                      </a:solidFill>
-                      <a:prstDash val="solid"/>
-                      <a:round/>
-                      <a:headEnd type="none" w="med" len="med"/>
-                      <a:tailEnd type="none" w="med" len="med"/>
-                    </a:lnR>
-                    <a:lnT w="12700" cap="flat" cmpd="sng" algn="ctr">
-                      <a:solidFill>
-                        <a:srgbClr val="E6DEC9"/>
-                      </a:solidFill>
-                      <a:prstDash val="solid"/>
-                      <a:round/>
-                      <a:headEnd type="none" w="med" len="med"/>
-                      <a:tailEnd type="none" w="med" len="med"/>
-                    </a:lnT>
-                    <a:lnB w="12700" cap="flat" cmpd="sng" algn="ctr">
-                      <a:solidFill>
-                        <a:srgbClr val="E6DEC9"/>
-                      </a:solidFill>
-                      <a:prstDash val="solid"/>
-                      <a:round/>
-                      <a:headEnd type="none" w="med" len="med"/>
-                      <a:tailEnd type="none" w="med" len="med"/>
-                    </a:lnB>
-                    <a:solidFill>
-                      <a:srgbClr val="FAF8F2"/>
-                    </a:solidFill>
-                  </a:tcPr>
-                </a:tc>
               </a:tr>
-              <a:tr h="566928">
+              <a:tr h="603504">
                 <a:tc>
                   <a:txBody>
                     <a:bodyPr/>
@@ -10904,7 +10532,7 @@
                           <a:ea typeface="Calibri" pitchFamily="34" charset="-122"/>
                           <a:cs typeface="Calibri" pitchFamily="34" charset="-120"/>
                         </a:rPr>
-                        <a:t>pure NN (GPU, real net)</a:t>
+                        <a:t>pure NN (GPU, small)</a:t>
                       </a:r>
                       <a:endParaRPr lang="en-US" sz="1250" dirty="0">
                         <a:latin typeface="Calibri" charset="0"/>
@@ -10972,7 +10600,7 @@
                           <a:ea typeface="Calibri" pitchFamily="34" charset="-122"/>
                           <a:cs typeface="Calibri" pitchFamily="34" charset="-120"/>
                         </a:rPr>
-                        <a:t>0.0013</a:t>
+                        <a:t>0.0005</a:t>
                       </a:r>
                       <a:endParaRPr lang="en-US" sz="1250" dirty="0">
                         <a:latin typeface="Calibri" charset="0"/>
@@ -11040,75 +10668,7 @@
                           <a:ea typeface="Calibri" pitchFamily="34" charset="-122"/>
                           <a:cs typeface="Calibri" pitchFamily="34" charset="-120"/>
                         </a:rPr>
-                        <a:t>18,900×</a:t>
-                      </a:r>
-                      <a:endParaRPr lang="en-US" sz="1250" dirty="0">
-                        <a:latin typeface="Calibri" charset="0"/>
-                        <a:ea typeface="Calibri" charset="0"/>
-                        <a:cs typeface="Calibri" charset="0"/>
-                      </a:endParaRPr>
-                    </a:p>
-                  </a:txBody>
-                  <a:tcPr marL="91440" marR="91440" marT="45720" marB="45720" anchor="ctr">
-                    <a:lnL w="12700" cap="flat" cmpd="sng" algn="ctr">
-                      <a:solidFill>
-                        <a:srgbClr val="E6DEC9"/>
-                      </a:solidFill>
-                      <a:prstDash val="solid"/>
-                      <a:round/>
-                      <a:headEnd type="none" w="med" len="med"/>
-                      <a:tailEnd type="none" w="med" len="med"/>
-                    </a:lnL>
-                    <a:lnR w="12700" cap="flat" cmpd="sng" algn="ctr">
-                      <a:solidFill>
-                        <a:srgbClr val="E6DEC9"/>
-                      </a:solidFill>
-                      <a:prstDash val="solid"/>
-                      <a:round/>
-                      <a:headEnd type="none" w="med" len="med"/>
-                      <a:tailEnd type="none" w="med" len="med"/>
-                    </a:lnR>
-                    <a:lnT w="12700" cap="flat" cmpd="sng" algn="ctr">
-                      <a:solidFill>
-                        <a:srgbClr val="E6DEC9"/>
-                      </a:solidFill>
-                      <a:prstDash val="solid"/>
-                      <a:round/>
-                      <a:headEnd type="none" w="med" len="med"/>
-                      <a:tailEnd type="none" w="med" len="med"/>
-                    </a:lnT>
-                    <a:lnB w="12700" cap="flat" cmpd="sng" algn="ctr">
-                      <a:solidFill>
-                        <a:srgbClr val="E6DEC9"/>
-                      </a:solidFill>
-                      <a:prstDash val="solid"/>
-                      <a:round/>
-                      <a:headEnd type="none" w="med" len="med"/>
-                      <a:tailEnd type="none" w="med" len="med"/>
-                    </a:lnB>
-                    <a:solidFill>
-                      <a:srgbClr val="FAF8F2"/>
-                    </a:solidFill>
-                  </a:tcPr>
-                </a:tc>
-                <a:tc>
-                  <a:txBody>
-                    <a:bodyPr/>
-                    <a:lstStyle/>
-                    <a:p>
-                      <a:pPr algn="ctr" indent="0" marL="0">
-                        <a:buNone/>
-                      </a:pPr>
-                      <a:r>
-                        <a:rPr lang="en-US" sz="1250" b="1" dirty="0">
-                          <a:solidFill>
-                            <a:srgbClr val="6B2333"/>
-                          </a:solidFill>
-                          <a:latin typeface="Calibri" pitchFamily="34" charset="0"/>
-                          <a:ea typeface="Calibri" pitchFamily="34" charset="-122"/>
-                          <a:cs typeface="Calibri" pitchFamily="34" charset="-120"/>
-                        </a:rPr>
-                        <a:t>9.5×</a:t>
+                        <a:t>47,000×</a:t>
                       </a:r>
                       <a:endParaRPr lang="en-US" sz="1250" dirty="0">
                         <a:latin typeface="Calibri" charset="0"/>
@@ -11166,14 +10726,14 @@
       </p:graphicFrame>
       <p:sp>
         <p:nvSpPr>
-          <p:cNvPr id="6" name="Text 3"/>
+          <p:cNvPr id="8" name="Text 5"/>
           <p:cNvSpPr/>
           <p:nvPr/>
         </p:nvSpPr>
         <p:spPr>
           <a:xfrm>
-            <a:off x="6400800" y="5166360"/>
-            <a:ext cx="5303520" cy="640080"/>
+            <a:off x="6400800" y="5074920"/>
+            <a:ext cx="5212080" cy="822960"/>
           </a:xfrm>
           <a:prstGeom prst="rect">
             <a:avLst/>
@@ -11197,7 +10757,7 @@
                 <a:ea typeface="Calibri" pitchFamily="34" charset="-122"/>
                 <a:cs typeface="Calibri" pitchFamily="34" charset="-120"/>
               </a:rPr>
-              <a:t>A100, n = 20,000, sustained loop. NN = real model (hidden 64, 3 conv). Green: the closed-form ODE beats the NN.</a:t>
+              <a:t>A100, n = 20,000, small net (1 conv, hidden 32). The NN ties the exact closed-form ODE; this is our simplified generator, COSMIC-dFBA (~15 min) is off this chart entirely.</a:t>
             </a:r>
             <a:endParaRPr lang="en-US" sz="1100" dirty="0"/>
           </a:p>

--- a/en_primeur_lab_meeting.pptx
+++ b/en_primeur_lab_meeting.pptx
@@ -18,9 +18,10 @@
     <p:sldId id="266" r:id="rId12"/>
     <p:sldId id="267" r:id="rId13"/>
     <p:sldId id="268" r:id="rId14"/>
+    <p:sldId id="269" r:id="rId15"/>
   </p:sldIdLst>
   <p:notesMasterIdLst>
-    <p:notesMasterId r:id="rId15"/>
+    <p:notesMasterId r:id="rId16"/>
   </p:notesMasterIdLst>
   <p:sldSz cx="12192000" cy="6858000"/>
   <p:notesSz cx="6858000" cy="12192000"/>
@@ -1859,6 +1860,94 @@
 </p:notes>
 </file>
 
+<file path=ppt/notesSlides/notesSlide14.xml><?xml version="1.0" encoding="utf-8"?>
+<p:notes xmlns:a="http://schemas.openxmlformats.org/drawingml/2006/main" xmlns:r="http://schemas.openxmlformats.org/officeDocument/2006/relationships" xmlns:p="http://schemas.openxmlformats.org/presentationml/2006/main">
+  <p:cSld>
+    <p:spTree>
+      <p:nvGrpSpPr>
+        <p:cNvPr id="1" name=""/>
+        <p:cNvGrpSpPr/>
+        <p:nvPr/>
+      </p:nvGrpSpPr>
+      <p:grpSpPr>
+        <a:xfrm>
+          <a:off x="0" y="0"/>
+          <a:ext cx="0" cy="0"/>
+          <a:chOff x="0" y="0"/>
+          <a:chExt cx="0" cy="0"/>
+        </a:xfrm>
+      </p:grpSpPr>
+      <p:sp>
+        <p:nvSpPr>
+          <p:cNvPr id="2" name="Slide Image Placeholder 1"/>
+          <p:cNvSpPr>
+            <a:spLocks noGrp="1" noRot="1" noChangeAspect="1"/>
+          </p:cNvSpPr>
+          <p:nvPr>
+            <p:ph type="sldImg"/>
+          </p:nvPr>
+        </p:nvSpPr>
+        <p:spPr/>
+      </p:sp>
+      <p:sp>
+        <p:nvSpPr>
+          <p:cNvPr id="3" name="Notes Placeholder 2"/>
+          <p:cNvSpPr>
+            <a:spLocks noGrp="1"/>
+          </p:cNvSpPr>
+          <p:nvPr>
+            <p:ph type="body" idx="1"/>
+          </p:nvPr>
+        </p:nvSpPr>
+        <p:spPr/>
+        <p:txBody>
+          <a:bodyPr/>
+          <a:lstStyle/>
+          <a:p>
+            <a:r>
+              <a:rPr lang="en-US" dirty="0"/>
+              <a:t/>
+            </a:r>
+            <a:endParaRPr lang="en-US" dirty="0"/>
+          </a:p>
+        </p:txBody>
+      </p:sp>
+      <p:sp>
+        <p:nvSpPr>
+          <p:cNvPr id="4" name="Slide Number Placeholder 3"/>
+          <p:cNvSpPr>
+            <a:spLocks noGrp="1"/>
+          </p:cNvSpPr>
+          <p:nvPr>
+            <p:ph type="sldNum" sz="quarter" idx="10"/>
+          </p:nvPr>
+        </p:nvSpPr>
+        <p:spPr/>
+        <p:txBody>
+          <a:bodyPr/>
+          <a:lstStyle/>
+          <a:p>
+            <a:fld id="{F7021451-1387-4CA6-816F-3879F97B5CBC}" type="slidenum">
+              <a:rPr lang="en-US"/>
+              <a:t>14</a:t>
+            </a:fld>
+            <a:endParaRPr lang="en-US"/>
+          </a:p>
+        </p:txBody>
+      </p:sp>
+    </p:spTree>
+    <p:extLst>
+      <p:ext uri="{BB962C8B-B14F-4D97-AF65-F5344CB8AC3E}">
+        <p14:creationId xmlns:p14="http://schemas.microsoft.com/office/powerpoint/2010/main" val="1024086991"/>
+      </p:ext>
+    </p:extLst>
+  </p:cSld>
+  <p:clrMapOvr>
+    <a:masterClrMapping/>
+  </p:clrMapOvr>
+</p:notes>
+</file>
+
 <file path=ppt/notesSlides/notesSlide2.xml><?xml version="1.0" encoding="utf-8"?>
 <p:notes xmlns:a="http://schemas.openxmlformats.org/drawingml/2006/main" xmlns:r="http://schemas.openxmlformats.org/officeDocument/2006/relationships" xmlns:p="http://schemas.openxmlformats.org/presentationml/2006/main">
   <p:cSld>
@@ -2954,7 +3043,7 @@
                 <a:ea typeface="Cambria" pitchFamily="34" charset="-122"/>
                 <a:cs typeface="Cambria" pitchFamily="34" charset="-120"/>
               </a:rPr>
-              <a:t>A fast, physics-informed neural surrogate</a:t>
+              <a:t>A fast neural surrogate of a mechanistic</a:t>
             </a:r>
             <a:endParaRPr lang="en-US" sz="2500" dirty="0"/>
           </a:p>
@@ -2974,7 +3063,7 @@
                 <a:ea typeface="Cambria" pitchFamily="34" charset="-122"/>
                 <a:cs typeface="Cambria" pitchFamily="34" charset="-120"/>
               </a:rPr>
-              <a:t>for CHO bioreactor dynamics</a:t>
+              <a:t>CHO bioreactor model</a:t>
             </a:r>
             <a:endParaRPr lang="en-US" sz="2500" dirty="0"/>
           </a:p>
@@ -3083,6 +3172,1184 @@
 <file path=ppt/slides/slide10.xml><?xml version="1.0" encoding="utf-8"?>
 <p:sld xmlns:a="http://schemas.openxmlformats.org/drawingml/2006/main" xmlns:r="http://schemas.openxmlformats.org/officeDocument/2006/relationships" xmlns:p="http://schemas.openxmlformats.org/presentationml/2006/main">
   <p:cSld name="Slide 10">
+    <p:bg>
+      <p:bgPr>
+        <a:solidFill>
+          <a:srgbClr val="FAF8F2"/>
+        </a:solidFill>
+      </p:bgPr>
+    </p:bg>
+    <p:spTree>
+      <p:nvGrpSpPr>
+        <p:cNvPr id="1" name=""/>
+        <p:cNvGrpSpPr/>
+        <p:nvPr/>
+      </p:nvGrpSpPr>
+      <p:grpSpPr>
+        <a:xfrm>
+          <a:off x="0" y="0"/>
+          <a:ext cx="0" cy="0"/>
+          <a:chOff x="0" y="0"/>
+          <a:chExt cx="0" cy="0"/>
+        </a:xfrm>
+      </p:grpSpPr>
+      <p:sp>
+        <p:nvSpPr>
+          <p:cNvPr id="2" name="Text 0"/>
+          <p:cNvSpPr/>
+          <p:nvPr/>
+        </p:nvSpPr>
+        <p:spPr>
+          <a:xfrm>
+            <a:off x="548640" y="384048"/>
+            <a:ext cx="11064240" cy="731520"/>
+          </a:xfrm>
+          <a:prstGeom prst="rect">
+            <a:avLst/>
+          </a:prstGeom>
+          <a:noFill/>
+          <a:ln/>
+        </p:spPr>
+        <p:txBody>
+          <a:bodyPr wrap="square" lIns="0" tIns="0" rIns="0" bIns="0" rtlCol="0" anchor="ctr"/>
+          <a:lstStyle/>
+          <a:p>
+            <a:pPr algn="l" indent="0" marL="0">
+              <a:buNone/>
+            </a:pPr>
+            <a:r>
+              <a:rPr lang="en-US" sz="3200" b="1" dirty="0">
+                <a:solidFill>
+                  <a:srgbClr val="6B2333"/>
+                </a:solidFill>
+                <a:latin typeface="Cambria" pitchFamily="34" charset="0"/>
+                <a:ea typeface="Cambria" pitchFamily="34" charset="-122"/>
+                <a:cs typeface="Cambria" pitchFamily="34" charset="-120"/>
+              </a:rPr>
+              <a:t>Inference: NN vs the mechanistic model</a:t>
+            </a:r>
+            <a:endParaRPr lang="en-US" sz="3200" dirty="0"/>
+          </a:p>
+        </p:txBody>
+      </p:sp>
+      <p:sp>
+        <p:nvSpPr>
+          <p:cNvPr id="3" name="Text 1"/>
+          <p:cNvSpPr/>
+          <p:nvPr/>
+        </p:nvSpPr>
+        <p:spPr>
+          <a:xfrm>
+            <a:off x="548640" y="1463040"/>
+            <a:ext cx="5486400" cy="731520"/>
+          </a:xfrm>
+          <a:prstGeom prst="rect">
+            <a:avLst/>
+          </a:prstGeom>
+          <a:noFill/>
+          <a:ln/>
+        </p:spPr>
+        <p:txBody>
+          <a:bodyPr wrap="square" lIns="0" tIns="0" rIns="0" bIns="0" rtlCol="0" anchor="ctr"/>
+          <a:lstStyle/>
+          <a:p>
+            <a:pPr algn="l" indent="0" marL="0">
+              <a:buNone/>
+            </a:pPr>
+            <a:r>
+              <a:rPr lang="en-US" sz="3000" b="1" dirty="0">
+                <a:solidFill>
+                  <a:srgbClr val="6B2333"/>
+                </a:solidFill>
+                <a:latin typeface="Cambria" pitchFamily="34" charset="0"/>
+                <a:ea typeface="Cambria" pitchFamily="34" charset="-122"/>
+                <a:cs typeface="Cambria" pitchFamily="34" charset="-120"/>
+              </a:rPr>
+              <a:t>~15 min  →  0.0013 ms</a:t>
+            </a:r>
+            <a:endParaRPr lang="en-US" sz="3000" dirty="0"/>
+          </a:p>
+        </p:txBody>
+      </p:sp>
+      <p:sp>
+        <p:nvSpPr>
+          <p:cNvPr id="4" name="Text 2"/>
+          <p:cNvSpPr/>
+          <p:nvPr/>
+        </p:nvSpPr>
+        <p:spPr>
+          <a:xfrm>
+            <a:off x="548640" y="2286000"/>
+            <a:ext cx="5486400" cy="1463040"/>
+          </a:xfrm>
+          <a:prstGeom prst="rect">
+            <a:avLst/>
+          </a:prstGeom>
+          <a:noFill/>
+          <a:ln/>
+        </p:spPr>
+        <p:txBody>
+          <a:bodyPr wrap="square" lIns="0" tIns="0" rIns="0" bIns="0" rtlCol="0" anchor="t"/>
+          <a:lstStyle/>
+          <a:p>
+            <a:pPr algn="l" indent="0" marL="0">
+              <a:lnSpc>
+                <a:spcPct val="120000"/>
+              </a:lnSpc>
+              <a:buNone/>
+            </a:pPr>
+            <a:r>
+              <a:rPr lang="en-US" sz="1600" dirty="0">
+                <a:solidFill>
+                  <a:srgbClr val="2B211A"/>
+                </a:solidFill>
+                <a:latin typeface="Calibri" pitchFamily="34" charset="0"/>
+                <a:ea typeface="Calibri" pitchFamily="34" charset="-122"/>
+                <a:cs typeface="Calibri" pitchFamily="34" charset="-120"/>
+              </a:rPr>
+              <a:t>COSMIC-dFBA takes </a:t>
+            </a:r>
+            <a:pPr algn="l" indent="0" marL="0">
+              <a:lnSpc>
+                <a:spcPct val="120000"/>
+              </a:lnSpc>
+              <a:buNone/>
+            </a:pPr>
+            <a:r>
+              <a:rPr lang="en-US" sz="1600" b="1" dirty="0">
+                <a:solidFill>
+                  <a:srgbClr val="6B2333"/>
+                </a:solidFill>
+                <a:latin typeface="Calibri" pitchFamily="34" charset="0"/>
+                <a:ea typeface="Calibri" pitchFamily="34" charset="-122"/>
+                <a:cs typeface="Calibri" pitchFamily="34" charset="-120"/>
+              </a:rPr>
+              <a:t>~15 minutes per reactor</a:t>
+            </a:r>
+            <a:pPr algn="l" indent="0" marL="0">
+              <a:lnSpc>
+                <a:spcPct val="120000"/>
+              </a:lnSpc>
+              <a:buNone/>
+            </a:pPr>
+            <a:r>
+              <a:rPr lang="en-US" sz="1600" dirty="0">
+                <a:solidFill>
+                  <a:srgbClr val="2B211A"/>
+                </a:solidFill>
+                <a:latin typeface="Calibri" pitchFamily="34" charset="0"/>
+                <a:ea typeface="Calibri" pitchFamily="34" charset="-122"/>
+                <a:cs typeface="Calibri" pitchFamily="34" charset="-120"/>
+              </a:rPr>
+              <a:t> (Sarat: 3.7 GHz CPU, no parallelization, 1-day resolution). The NN predicts the same run in 0.0013 ms, hundreds of millions of times faster.</a:t>
+            </a:r>
+            <a:endParaRPr lang="en-US" sz="1600" dirty="0"/>
+          </a:p>
+        </p:txBody>
+      </p:sp>
+      <p:sp>
+        <p:nvSpPr>
+          <p:cNvPr id="5" name="Text 3"/>
+          <p:cNvSpPr/>
+          <p:nvPr/>
+        </p:nvSpPr>
+        <p:spPr>
+          <a:xfrm>
+            <a:off x="548640" y="3794760"/>
+            <a:ext cx="5486400" cy="1554480"/>
+          </a:xfrm>
+          <a:prstGeom prst="rect">
+            <a:avLst/>
+          </a:prstGeom>
+          <a:noFill/>
+          <a:ln/>
+        </p:spPr>
+        <p:txBody>
+          <a:bodyPr wrap="square" lIns="0" tIns="0" rIns="0" bIns="0" rtlCol="0" anchor="t"/>
+          <a:lstStyle/>
+          <a:p>
+            <a:pPr algn="l" indent="0" marL="0">
+              <a:lnSpc>
+                <a:spcPct val="115000"/>
+              </a:lnSpc>
+              <a:buNone/>
+            </a:pPr>
+            <a:r>
+              <a:rPr lang="en-US" sz="1500" b="1" dirty="0">
+                <a:solidFill>
+                  <a:srgbClr val="3A4A2E"/>
+                </a:solidFill>
+                <a:latin typeface="Calibri" pitchFamily="34" charset="0"/>
+                <a:ea typeface="Calibri" pitchFamily="34" charset="-122"/>
+                <a:cs typeface="Calibri" pitchFamily="34" charset="-120"/>
+              </a:rPr>
+              <a:t>Honest caveat (Sarat).  </a:t>
+            </a:r>
+            <a:pPr algn="l" indent="0" marL="0">
+              <a:lnSpc>
+                <a:spcPct val="115000"/>
+              </a:lnSpc>
+              <a:buNone/>
+            </a:pPr>
+            <a:r>
+              <a:rPr lang="en-US" sz="1500" dirty="0">
+                <a:solidFill>
+                  <a:srgbClr val="2B211A"/>
+                </a:solidFill>
+                <a:latin typeface="Calibri" pitchFamily="34" charset="0"/>
+                <a:ea typeface="Calibri" pitchFamily="34" charset="-122"/>
+                <a:cs typeface="Calibri" pitchFamily="34" charset="-120"/>
+              </a:rPr>
+              <a:t>Any empirical model beats a mechanistic flux-balance simulation, so this is expected. COSMIC-dFBA's niche is mechanistic insight; the speed enables real-time use, it is not the contribution.</a:t>
+            </a:r>
+            <a:endParaRPr lang="en-US" sz="1500" dirty="0"/>
+          </a:p>
+        </p:txBody>
+      </p:sp>
+      <p:sp>
+        <p:nvSpPr>
+          <p:cNvPr id="6" name="Text 4"/>
+          <p:cNvSpPr/>
+          <p:nvPr/>
+        </p:nvSpPr>
+        <p:spPr>
+          <a:xfrm>
+            <a:off x="6400800" y="1645920"/>
+            <a:ext cx="5212080" cy="640080"/>
+          </a:xfrm>
+          <a:prstGeom prst="rect">
+            <a:avLst/>
+          </a:prstGeom>
+          <a:noFill/>
+          <a:ln/>
+        </p:spPr>
+        <p:txBody>
+          <a:bodyPr wrap="square" lIns="0" tIns="0" rIns="0" bIns="0" rtlCol="0" anchor="t"/>
+          <a:lstStyle/>
+          <a:p>
+            <a:pPr algn="l" indent="0" marL="0">
+              <a:buNone/>
+            </a:pPr>
+            <a:r>
+              <a:rPr lang="en-US" sz="1200" i="1" dirty="0">
+                <a:solidFill>
+                  <a:srgbClr val="7A6E5A"/>
+                </a:solidFill>
+                <a:latin typeface="Calibri" pitchFamily="34" charset="0"/>
+                <a:ea typeface="Calibri" pitchFamily="34" charset="-122"/>
+                <a:cs typeface="Calibri" pitchFamily="34" charset="-120"/>
+              </a:rPr>
+              <a:t>A separate comparison: our fast synthetic generator (a simplified ODE, what we train on), not COSMIC-dFBA:</a:t>
+            </a:r>
+            <a:endParaRPr lang="en-US" sz="1200" dirty="0"/>
+          </a:p>
+        </p:txBody>
+      </p:sp>
+      <p:graphicFrame>
+        <p:nvGraphicFramePr>
+          <p:cNvPr id="11" name="Table 0"/>
+          <p:cNvGraphicFramePr>
+            <a:graphicFrameLocks noGrp="1"/>
+          </p:cNvGraphicFramePr>
+          <p:nvPr>
+            <p:extLst>
+              <p:ext uri="{D42A27DB-BD31-4B8C-83A1-F6EECF244321}">
+                <p14:modId xmlns:p14="http://schemas.microsoft.com/office/powerpoint/2010/main" val="1579011935"/>
+              </p:ext>
+            </p:extLst>
+          </p:nvPr>
+        </p:nvGraphicFramePr>
+        <p:xfrm>
+          <a:off x="6400800" y="2468880"/>
+          <a:ext cx="5212080" cy="914400"/>
+        </p:xfrm>
+        <a:graphic>
+          <a:graphicData uri="http://schemas.openxmlformats.org/drawingml/2006/table">
+            <a:tbl>
+              <a:tblPr/>
+              <a:tblGrid>
+                <a:gridCol w="3017520"/>
+                <a:gridCol w="1097280"/>
+                <a:gridCol w="1097280"/>
+              </a:tblGrid>
+              <a:tr h="603504">
+                <a:tc>
+                  <a:txBody>
+                    <a:bodyPr/>
+                    <a:lstStyle/>
+                    <a:p>
+                      <a:pPr algn="l" indent="0" marL="0">
+                        <a:buNone/>
+                      </a:pPr>
+                      <a:r>
+                        <a:rPr lang="en-US" sz="1250" b="1" dirty="0">
+                          <a:solidFill>
+                            <a:srgbClr val="F3ECD8"/>
+                          </a:solidFill>
+                          <a:latin typeface="Calibri" pitchFamily="34" charset="0"/>
+                          <a:ea typeface="Calibri" pitchFamily="34" charset="-122"/>
+                          <a:cs typeface="Calibri" pitchFamily="34" charset="-120"/>
+                        </a:rPr>
+                        <a:t>method</a:t>
+                      </a:r>
+                      <a:endParaRPr lang="en-US" sz="1250" dirty="0">
+                        <a:latin typeface="Calibri" charset="0"/>
+                        <a:ea typeface="Calibri" charset="0"/>
+                        <a:cs typeface="Calibri" charset="0"/>
+                      </a:endParaRPr>
+                    </a:p>
+                  </a:txBody>
+                  <a:tcPr marL="91440" marR="91440" marT="45720" marB="45720" anchor="ctr">
+                    <a:lnL w="12700" cap="flat" cmpd="sng" algn="ctr">
+                      <a:solidFill>
+                        <a:srgbClr val="E6DEC9"/>
+                      </a:solidFill>
+                      <a:prstDash val="solid"/>
+                      <a:round/>
+                      <a:headEnd type="none" w="med" len="med"/>
+                      <a:tailEnd type="none" w="med" len="med"/>
+                    </a:lnL>
+                    <a:lnR w="12700" cap="flat" cmpd="sng" algn="ctr">
+                      <a:solidFill>
+                        <a:srgbClr val="E6DEC9"/>
+                      </a:solidFill>
+                      <a:prstDash val="solid"/>
+                      <a:round/>
+                      <a:headEnd type="none" w="med" len="med"/>
+                      <a:tailEnd type="none" w="med" len="med"/>
+                    </a:lnR>
+                    <a:lnT w="12700" cap="flat" cmpd="sng" algn="ctr">
+                      <a:solidFill>
+                        <a:srgbClr val="E6DEC9"/>
+                      </a:solidFill>
+                      <a:prstDash val="solid"/>
+                      <a:round/>
+                      <a:headEnd type="none" w="med" len="med"/>
+                      <a:tailEnd type="none" w="med" len="med"/>
+                    </a:lnT>
+                    <a:lnB w="12700" cap="flat" cmpd="sng" algn="ctr">
+                      <a:solidFill>
+                        <a:srgbClr val="E6DEC9"/>
+                      </a:solidFill>
+                      <a:prstDash val="solid"/>
+                      <a:round/>
+                      <a:headEnd type="none" w="med" len="med"/>
+                      <a:tailEnd type="none" w="med" len="med"/>
+                    </a:lnB>
+                    <a:solidFill>
+                      <a:srgbClr val="6B2333"/>
+                    </a:solidFill>
+                  </a:tcPr>
+                </a:tc>
+                <a:tc>
+                  <a:txBody>
+                    <a:bodyPr/>
+                    <a:lstStyle/>
+                    <a:p>
+                      <a:pPr algn="ctr" indent="0" marL="0">
+                        <a:buNone/>
+                      </a:pPr>
+                      <a:r>
+                        <a:rPr lang="en-US" sz="1250" b="1" dirty="0">
+                          <a:solidFill>
+                            <a:srgbClr val="F3ECD8"/>
+                          </a:solidFill>
+                          <a:latin typeface="Calibri" pitchFamily="34" charset="0"/>
+                          <a:ea typeface="Calibri" pitchFamily="34" charset="-122"/>
+                          <a:cs typeface="Calibri" pitchFamily="34" charset="-120"/>
+                        </a:rPr>
+                        <a:t>ms/reactor</a:t>
+                      </a:r>
+                      <a:endParaRPr lang="en-US" sz="1250" dirty="0">
+                        <a:latin typeface="Calibri" charset="0"/>
+                        <a:ea typeface="Calibri" charset="0"/>
+                        <a:cs typeface="Calibri" charset="0"/>
+                      </a:endParaRPr>
+                    </a:p>
+                  </a:txBody>
+                  <a:tcPr marL="91440" marR="91440" marT="45720" marB="45720" anchor="ctr">
+                    <a:lnL w="12700" cap="flat" cmpd="sng" algn="ctr">
+                      <a:solidFill>
+                        <a:srgbClr val="E6DEC9"/>
+                      </a:solidFill>
+                      <a:prstDash val="solid"/>
+                      <a:round/>
+                      <a:headEnd type="none" w="med" len="med"/>
+                      <a:tailEnd type="none" w="med" len="med"/>
+                    </a:lnL>
+                    <a:lnR w="12700" cap="flat" cmpd="sng" algn="ctr">
+                      <a:solidFill>
+                        <a:srgbClr val="E6DEC9"/>
+                      </a:solidFill>
+                      <a:prstDash val="solid"/>
+                      <a:round/>
+                      <a:headEnd type="none" w="med" len="med"/>
+                      <a:tailEnd type="none" w="med" len="med"/>
+                    </a:lnR>
+                    <a:lnT w="12700" cap="flat" cmpd="sng" algn="ctr">
+                      <a:solidFill>
+                        <a:srgbClr val="E6DEC9"/>
+                      </a:solidFill>
+                      <a:prstDash val="solid"/>
+                      <a:round/>
+                      <a:headEnd type="none" w="med" len="med"/>
+                      <a:tailEnd type="none" w="med" len="med"/>
+                    </a:lnT>
+                    <a:lnB w="12700" cap="flat" cmpd="sng" algn="ctr">
+                      <a:solidFill>
+                        <a:srgbClr val="E6DEC9"/>
+                      </a:solidFill>
+                      <a:prstDash val="solid"/>
+                      <a:round/>
+                      <a:headEnd type="none" w="med" len="med"/>
+                      <a:tailEnd type="none" w="med" len="med"/>
+                    </a:lnB>
+                    <a:solidFill>
+                      <a:srgbClr val="6B2333"/>
+                    </a:solidFill>
+                  </a:tcPr>
+                </a:tc>
+                <a:tc>
+                  <a:txBody>
+                    <a:bodyPr/>
+                    <a:lstStyle/>
+                    <a:p>
+                      <a:pPr algn="ctr" indent="0" marL="0">
+                        <a:buNone/>
+                      </a:pPr>
+                      <a:r>
+                        <a:rPr lang="en-US" sz="1250" b="1" dirty="0">
+                          <a:solidFill>
+                            <a:srgbClr val="F3ECD8"/>
+                          </a:solidFill>
+                          <a:latin typeface="Calibri" pitchFamily="34" charset="0"/>
+                          <a:ea typeface="Calibri" pitchFamily="34" charset="-122"/>
+                          <a:cs typeface="Calibri" pitchFamily="34" charset="-120"/>
+                        </a:rPr>
+                        <a:t>vs scipy</a:t>
+                      </a:r>
+                      <a:endParaRPr lang="en-US" sz="1250" dirty="0">
+                        <a:latin typeface="Calibri" charset="0"/>
+                        <a:ea typeface="Calibri" charset="0"/>
+                        <a:cs typeface="Calibri" charset="0"/>
+                      </a:endParaRPr>
+                    </a:p>
+                  </a:txBody>
+                  <a:tcPr marL="91440" marR="91440" marT="45720" marB="45720" anchor="ctr">
+                    <a:lnL w="12700" cap="flat" cmpd="sng" algn="ctr">
+                      <a:solidFill>
+                        <a:srgbClr val="E6DEC9"/>
+                      </a:solidFill>
+                      <a:prstDash val="solid"/>
+                      <a:round/>
+                      <a:headEnd type="none" w="med" len="med"/>
+                      <a:tailEnd type="none" w="med" len="med"/>
+                    </a:lnL>
+                    <a:lnR w="12700" cap="flat" cmpd="sng" algn="ctr">
+                      <a:solidFill>
+                        <a:srgbClr val="E6DEC9"/>
+                      </a:solidFill>
+                      <a:prstDash val="solid"/>
+                      <a:round/>
+                      <a:headEnd type="none" w="med" len="med"/>
+                      <a:tailEnd type="none" w="med" len="med"/>
+                    </a:lnR>
+                    <a:lnT w="12700" cap="flat" cmpd="sng" algn="ctr">
+                      <a:solidFill>
+                        <a:srgbClr val="E6DEC9"/>
+                      </a:solidFill>
+                      <a:prstDash val="solid"/>
+                      <a:round/>
+                      <a:headEnd type="none" w="med" len="med"/>
+                      <a:tailEnd type="none" w="med" len="med"/>
+                    </a:lnT>
+                    <a:lnB w="12700" cap="flat" cmpd="sng" algn="ctr">
+                      <a:solidFill>
+                        <a:srgbClr val="E6DEC9"/>
+                      </a:solidFill>
+                      <a:prstDash val="solid"/>
+                      <a:round/>
+                      <a:headEnd type="none" w="med" len="med"/>
+                      <a:tailEnd type="none" w="med" len="med"/>
+                    </a:lnB>
+                    <a:solidFill>
+                      <a:srgbClr val="6B2333"/>
+                    </a:solidFill>
+                  </a:tcPr>
+                </a:tc>
+              </a:tr>
+              <a:tr h="603504">
+                <a:tc>
+                  <a:txBody>
+                    <a:bodyPr/>
+                    <a:lstStyle/>
+                    <a:p>
+                      <a:pPr algn="l" indent="0" marL="0">
+                        <a:buNone/>
+                      </a:pPr>
+                      <a:r>
+                        <a:rPr lang="en-US" sz="1250" dirty="0">
+                          <a:solidFill>
+                            <a:srgbClr val="2B211A"/>
+                          </a:solidFill>
+                          <a:latin typeface="Calibri" pitchFamily="34" charset="0"/>
+                          <a:ea typeface="Calibri" pitchFamily="34" charset="-122"/>
+                          <a:cs typeface="Calibri" pitchFamily="34" charset="-120"/>
+                        </a:rPr>
+                        <a:t>numerical ODE (scipy, CPU)</a:t>
+                      </a:r>
+                      <a:endParaRPr lang="en-US" sz="1250" dirty="0">
+                        <a:latin typeface="Calibri" charset="0"/>
+                        <a:ea typeface="Calibri" charset="0"/>
+                        <a:cs typeface="Calibri" charset="0"/>
+                      </a:endParaRPr>
+                    </a:p>
+                  </a:txBody>
+                  <a:tcPr marL="91440" marR="91440" marT="45720" marB="45720" anchor="ctr">
+                    <a:lnL w="12700" cap="flat" cmpd="sng" algn="ctr">
+                      <a:solidFill>
+                        <a:srgbClr val="E6DEC9"/>
+                      </a:solidFill>
+                      <a:prstDash val="solid"/>
+                      <a:round/>
+                      <a:headEnd type="none" w="med" len="med"/>
+                      <a:tailEnd type="none" w="med" len="med"/>
+                    </a:lnL>
+                    <a:lnR w="12700" cap="flat" cmpd="sng" algn="ctr">
+                      <a:solidFill>
+                        <a:srgbClr val="E6DEC9"/>
+                      </a:solidFill>
+                      <a:prstDash val="solid"/>
+                      <a:round/>
+                      <a:headEnd type="none" w="med" len="med"/>
+                      <a:tailEnd type="none" w="med" len="med"/>
+                    </a:lnR>
+                    <a:lnT w="12700" cap="flat" cmpd="sng" algn="ctr">
+                      <a:solidFill>
+                        <a:srgbClr val="E6DEC9"/>
+                      </a:solidFill>
+                      <a:prstDash val="solid"/>
+                      <a:round/>
+                      <a:headEnd type="none" w="med" len="med"/>
+                      <a:tailEnd type="none" w="med" len="med"/>
+                    </a:lnT>
+                    <a:lnB w="12700" cap="flat" cmpd="sng" algn="ctr">
+                      <a:solidFill>
+                        <a:srgbClr val="E6DEC9"/>
+                      </a:solidFill>
+                      <a:prstDash val="solid"/>
+                      <a:round/>
+                      <a:headEnd type="none" w="med" len="med"/>
+                      <a:tailEnd type="none" w="med" len="med"/>
+                    </a:lnB>
+                    <a:solidFill>
+                      <a:srgbClr val="FAF8F2"/>
+                    </a:solidFill>
+                  </a:tcPr>
+                </a:tc>
+                <a:tc>
+                  <a:txBody>
+                    <a:bodyPr/>
+                    <a:lstStyle/>
+                    <a:p>
+                      <a:pPr algn="ctr" indent="0" marL="0">
+                        <a:buNone/>
+                      </a:pPr>
+                      <a:r>
+                        <a:rPr lang="en-US" sz="1250" dirty="0">
+                          <a:solidFill>
+                            <a:srgbClr val="2B211A"/>
+                          </a:solidFill>
+                          <a:latin typeface="Calibri" pitchFamily="34" charset="0"/>
+                          <a:ea typeface="Calibri" pitchFamily="34" charset="-122"/>
+                          <a:cs typeface="Calibri" pitchFamily="34" charset="-120"/>
+                        </a:rPr>
+                        <a:t>25.25</a:t>
+                      </a:r>
+                      <a:endParaRPr lang="en-US" sz="1250" dirty="0">
+                        <a:latin typeface="Calibri" charset="0"/>
+                        <a:ea typeface="Calibri" charset="0"/>
+                        <a:cs typeface="Calibri" charset="0"/>
+                      </a:endParaRPr>
+                    </a:p>
+                  </a:txBody>
+                  <a:tcPr marL="91440" marR="91440" marT="45720" marB="45720" anchor="ctr">
+                    <a:lnL w="12700" cap="flat" cmpd="sng" algn="ctr">
+                      <a:solidFill>
+                        <a:srgbClr val="E6DEC9"/>
+                      </a:solidFill>
+                      <a:prstDash val="solid"/>
+                      <a:round/>
+                      <a:headEnd type="none" w="med" len="med"/>
+                      <a:tailEnd type="none" w="med" len="med"/>
+                    </a:lnL>
+                    <a:lnR w="12700" cap="flat" cmpd="sng" algn="ctr">
+                      <a:solidFill>
+                        <a:srgbClr val="E6DEC9"/>
+                      </a:solidFill>
+                      <a:prstDash val="solid"/>
+                      <a:round/>
+                      <a:headEnd type="none" w="med" len="med"/>
+                      <a:tailEnd type="none" w="med" len="med"/>
+                    </a:lnR>
+                    <a:lnT w="12700" cap="flat" cmpd="sng" algn="ctr">
+                      <a:solidFill>
+                        <a:srgbClr val="E6DEC9"/>
+                      </a:solidFill>
+                      <a:prstDash val="solid"/>
+                      <a:round/>
+                      <a:headEnd type="none" w="med" len="med"/>
+                      <a:tailEnd type="none" w="med" len="med"/>
+                    </a:lnT>
+                    <a:lnB w="12700" cap="flat" cmpd="sng" algn="ctr">
+                      <a:solidFill>
+                        <a:srgbClr val="E6DEC9"/>
+                      </a:solidFill>
+                      <a:prstDash val="solid"/>
+                      <a:round/>
+                      <a:headEnd type="none" w="med" len="med"/>
+                      <a:tailEnd type="none" w="med" len="med"/>
+                    </a:lnB>
+                    <a:solidFill>
+                      <a:srgbClr val="FAF8F2"/>
+                    </a:solidFill>
+                  </a:tcPr>
+                </a:tc>
+                <a:tc>
+                  <a:txBody>
+                    <a:bodyPr/>
+                    <a:lstStyle/>
+                    <a:p>
+                      <a:pPr algn="ctr" indent="0" marL="0">
+                        <a:buNone/>
+                      </a:pPr>
+                      <a:r>
+                        <a:rPr lang="en-US" sz="1250" dirty="0">
+                          <a:solidFill>
+                            <a:srgbClr val="2B211A"/>
+                          </a:solidFill>
+                          <a:latin typeface="Calibri" pitchFamily="34" charset="0"/>
+                          <a:ea typeface="Calibri" pitchFamily="34" charset="-122"/>
+                          <a:cs typeface="Calibri" pitchFamily="34" charset="-120"/>
+                        </a:rPr>
+                        <a:t>1×</a:t>
+                      </a:r>
+                      <a:endParaRPr lang="en-US" sz="1250" dirty="0">
+                        <a:latin typeface="Calibri" charset="0"/>
+                        <a:ea typeface="Calibri" charset="0"/>
+                        <a:cs typeface="Calibri" charset="0"/>
+                      </a:endParaRPr>
+                    </a:p>
+                  </a:txBody>
+                  <a:tcPr marL="91440" marR="91440" marT="45720" marB="45720" anchor="ctr">
+                    <a:lnL w="12700" cap="flat" cmpd="sng" algn="ctr">
+                      <a:solidFill>
+                        <a:srgbClr val="E6DEC9"/>
+                      </a:solidFill>
+                      <a:prstDash val="solid"/>
+                      <a:round/>
+                      <a:headEnd type="none" w="med" len="med"/>
+                      <a:tailEnd type="none" w="med" len="med"/>
+                    </a:lnL>
+                    <a:lnR w="12700" cap="flat" cmpd="sng" algn="ctr">
+                      <a:solidFill>
+                        <a:srgbClr val="E6DEC9"/>
+                      </a:solidFill>
+                      <a:prstDash val="solid"/>
+                      <a:round/>
+                      <a:headEnd type="none" w="med" len="med"/>
+                      <a:tailEnd type="none" w="med" len="med"/>
+                    </a:lnR>
+                    <a:lnT w="12700" cap="flat" cmpd="sng" algn="ctr">
+                      <a:solidFill>
+                        <a:srgbClr val="E6DEC9"/>
+                      </a:solidFill>
+                      <a:prstDash val="solid"/>
+                      <a:round/>
+                      <a:headEnd type="none" w="med" len="med"/>
+                      <a:tailEnd type="none" w="med" len="med"/>
+                    </a:lnT>
+                    <a:lnB w="12700" cap="flat" cmpd="sng" algn="ctr">
+                      <a:solidFill>
+                        <a:srgbClr val="E6DEC9"/>
+                      </a:solidFill>
+                      <a:prstDash val="solid"/>
+                      <a:round/>
+                      <a:headEnd type="none" w="med" len="med"/>
+                      <a:tailEnd type="none" w="med" len="med"/>
+                    </a:lnB>
+                    <a:solidFill>
+                      <a:srgbClr val="FAF8F2"/>
+                    </a:solidFill>
+                  </a:tcPr>
+                </a:tc>
+              </a:tr>
+              <a:tr h="603504">
+                <a:tc>
+                  <a:txBody>
+                    <a:bodyPr/>
+                    <a:lstStyle/>
+                    <a:p>
+                      <a:pPr algn="l" indent="0" marL="0">
+                        <a:buNone/>
+                      </a:pPr>
+                      <a:r>
+                        <a:rPr lang="en-US" sz="1250" b="1" dirty="0">
+                          <a:solidFill>
+                            <a:srgbClr val="3A4A2E"/>
+                          </a:solidFill>
+                          <a:latin typeface="Calibri" pitchFamily="34" charset="0"/>
+                          <a:ea typeface="Calibri" pitchFamily="34" charset="-122"/>
+                          <a:cs typeface="Calibri" pitchFamily="34" charset="-120"/>
+                        </a:rPr>
+                        <a:t>closed-form ODE (GPU)</a:t>
+                      </a:r>
+                      <a:endParaRPr lang="en-US" sz="1250" dirty="0">
+                        <a:latin typeface="Calibri" charset="0"/>
+                        <a:ea typeface="Calibri" charset="0"/>
+                        <a:cs typeface="Calibri" charset="0"/>
+                      </a:endParaRPr>
+                    </a:p>
+                  </a:txBody>
+                  <a:tcPr marL="91440" marR="91440" marT="45720" marB="45720" anchor="ctr">
+                    <a:lnL w="12700" cap="flat" cmpd="sng" algn="ctr">
+                      <a:solidFill>
+                        <a:srgbClr val="E6DEC9"/>
+                      </a:solidFill>
+                      <a:prstDash val="solid"/>
+                      <a:round/>
+                      <a:headEnd type="none" w="med" len="med"/>
+                      <a:tailEnd type="none" w="med" len="med"/>
+                    </a:lnL>
+                    <a:lnR w="12700" cap="flat" cmpd="sng" algn="ctr">
+                      <a:solidFill>
+                        <a:srgbClr val="E6DEC9"/>
+                      </a:solidFill>
+                      <a:prstDash val="solid"/>
+                      <a:round/>
+                      <a:headEnd type="none" w="med" len="med"/>
+                      <a:tailEnd type="none" w="med" len="med"/>
+                    </a:lnR>
+                    <a:lnT w="12700" cap="flat" cmpd="sng" algn="ctr">
+                      <a:solidFill>
+                        <a:srgbClr val="E6DEC9"/>
+                      </a:solidFill>
+                      <a:prstDash val="solid"/>
+                      <a:round/>
+                      <a:headEnd type="none" w="med" len="med"/>
+                      <a:tailEnd type="none" w="med" len="med"/>
+                    </a:lnT>
+                    <a:lnB w="12700" cap="flat" cmpd="sng" algn="ctr">
+                      <a:solidFill>
+                        <a:srgbClr val="E6DEC9"/>
+                      </a:solidFill>
+                      <a:prstDash val="solid"/>
+                      <a:round/>
+                      <a:headEnd type="none" w="med" len="med"/>
+                      <a:tailEnd type="none" w="med" len="med"/>
+                    </a:lnB>
+                    <a:solidFill>
+                      <a:srgbClr val="FAF8F2"/>
+                    </a:solidFill>
+                  </a:tcPr>
+                </a:tc>
+                <a:tc>
+                  <a:txBody>
+                    <a:bodyPr/>
+                    <a:lstStyle/>
+                    <a:p>
+                      <a:pPr algn="ctr" indent="0" marL="0">
+                        <a:buNone/>
+                      </a:pPr>
+                      <a:r>
+                        <a:rPr lang="en-US" sz="1250" b="1" dirty="0">
+                          <a:solidFill>
+                            <a:srgbClr val="3A4A2E"/>
+                          </a:solidFill>
+                          <a:latin typeface="Calibri" pitchFamily="34" charset="0"/>
+                          <a:ea typeface="Calibri" pitchFamily="34" charset="-122"/>
+                          <a:cs typeface="Calibri" pitchFamily="34" charset="-120"/>
+                        </a:rPr>
+                        <a:t>0.0005</a:t>
+                      </a:r>
+                      <a:endParaRPr lang="en-US" sz="1250" dirty="0">
+                        <a:latin typeface="Calibri" charset="0"/>
+                        <a:ea typeface="Calibri" charset="0"/>
+                        <a:cs typeface="Calibri" charset="0"/>
+                      </a:endParaRPr>
+                    </a:p>
+                  </a:txBody>
+                  <a:tcPr marL="91440" marR="91440" marT="45720" marB="45720" anchor="ctr">
+                    <a:lnL w="12700" cap="flat" cmpd="sng" algn="ctr">
+                      <a:solidFill>
+                        <a:srgbClr val="E6DEC9"/>
+                      </a:solidFill>
+                      <a:prstDash val="solid"/>
+                      <a:round/>
+                      <a:headEnd type="none" w="med" len="med"/>
+                      <a:tailEnd type="none" w="med" len="med"/>
+                    </a:lnL>
+                    <a:lnR w="12700" cap="flat" cmpd="sng" algn="ctr">
+                      <a:solidFill>
+                        <a:srgbClr val="E6DEC9"/>
+                      </a:solidFill>
+                      <a:prstDash val="solid"/>
+                      <a:round/>
+                      <a:headEnd type="none" w="med" len="med"/>
+                      <a:tailEnd type="none" w="med" len="med"/>
+                    </a:lnR>
+                    <a:lnT w="12700" cap="flat" cmpd="sng" algn="ctr">
+                      <a:solidFill>
+                        <a:srgbClr val="E6DEC9"/>
+                      </a:solidFill>
+                      <a:prstDash val="solid"/>
+                      <a:round/>
+                      <a:headEnd type="none" w="med" len="med"/>
+                      <a:tailEnd type="none" w="med" len="med"/>
+                    </a:lnT>
+                    <a:lnB w="12700" cap="flat" cmpd="sng" algn="ctr">
+                      <a:solidFill>
+                        <a:srgbClr val="E6DEC9"/>
+                      </a:solidFill>
+                      <a:prstDash val="solid"/>
+                      <a:round/>
+                      <a:headEnd type="none" w="med" len="med"/>
+                      <a:tailEnd type="none" w="med" len="med"/>
+                    </a:lnB>
+                    <a:solidFill>
+                      <a:srgbClr val="FAF8F2"/>
+                    </a:solidFill>
+                  </a:tcPr>
+                </a:tc>
+                <a:tc>
+                  <a:txBody>
+                    <a:bodyPr/>
+                    <a:lstStyle/>
+                    <a:p>
+                      <a:pPr algn="ctr" indent="0" marL="0">
+                        <a:buNone/>
+                      </a:pPr>
+                      <a:r>
+                        <a:rPr lang="en-US" sz="1250" b="1" dirty="0">
+                          <a:solidFill>
+                            <a:srgbClr val="3A4A2E"/>
+                          </a:solidFill>
+                          <a:latin typeface="Calibri" pitchFamily="34" charset="0"/>
+                          <a:ea typeface="Calibri" pitchFamily="34" charset="-122"/>
+                          <a:cs typeface="Calibri" pitchFamily="34" charset="-120"/>
+                        </a:rPr>
+                        <a:t>47,000×</a:t>
+                      </a:r>
+                      <a:endParaRPr lang="en-US" sz="1250" dirty="0">
+                        <a:latin typeface="Calibri" charset="0"/>
+                        <a:ea typeface="Calibri" charset="0"/>
+                        <a:cs typeface="Calibri" charset="0"/>
+                      </a:endParaRPr>
+                    </a:p>
+                  </a:txBody>
+                  <a:tcPr marL="91440" marR="91440" marT="45720" marB="45720" anchor="ctr">
+                    <a:lnL w="12700" cap="flat" cmpd="sng" algn="ctr">
+                      <a:solidFill>
+                        <a:srgbClr val="E6DEC9"/>
+                      </a:solidFill>
+                      <a:prstDash val="solid"/>
+                      <a:round/>
+                      <a:headEnd type="none" w="med" len="med"/>
+                      <a:tailEnd type="none" w="med" len="med"/>
+                    </a:lnL>
+                    <a:lnR w="12700" cap="flat" cmpd="sng" algn="ctr">
+                      <a:solidFill>
+                        <a:srgbClr val="E6DEC9"/>
+                      </a:solidFill>
+                      <a:prstDash val="solid"/>
+                      <a:round/>
+                      <a:headEnd type="none" w="med" len="med"/>
+                      <a:tailEnd type="none" w="med" len="med"/>
+                    </a:lnR>
+                    <a:lnT w="12700" cap="flat" cmpd="sng" algn="ctr">
+                      <a:solidFill>
+                        <a:srgbClr val="E6DEC9"/>
+                      </a:solidFill>
+                      <a:prstDash val="solid"/>
+                      <a:round/>
+                      <a:headEnd type="none" w="med" len="med"/>
+                      <a:tailEnd type="none" w="med" len="med"/>
+                    </a:lnT>
+                    <a:lnB w="12700" cap="flat" cmpd="sng" algn="ctr">
+                      <a:solidFill>
+                        <a:srgbClr val="E6DEC9"/>
+                      </a:solidFill>
+                      <a:prstDash val="solid"/>
+                      <a:round/>
+                      <a:headEnd type="none" w="med" len="med"/>
+                      <a:tailEnd type="none" w="med" len="med"/>
+                    </a:lnB>
+                    <a:solidFill>
+                      <a:srgbClr val="FAF8F2"/>
+                    </a:solidFill>
+                  </a:tcPr>
+                </a:tc>
+              </a:tr>
+              <a:tr h="603504">
+                <a:tc>
+                  <a:txBody>
+                    <a:bodyPr/>
+                    <a:lstStyle/>
+                    <a:p>
+                      <a:pPr algn="l" indent="0" marL="0">
+                        <a:buNone/>
+                      </a:pPr>
+                      <a:r>
+                        <a:rPr lang="en-US" sz="1250" b="1" dirty="0">
+                          <a:solidFill>
+                            <a:srgbClr val="6B2333"/>
+                          </a:solidFill>
+                          <a:latin typeface="Calibri" pitchFamily="34" charset="0"/>
+                          <a:ea typeface="Calibri" pitchFamily="34" charset="-122"/>
+                          <a:cs typeface="Calibri" pitchFamily="34" charset="-120"/>
+                        </a:rPr>
+                        <a:t>pure NN (GPU, small)</a:t>
+                      </a:r>
+                      <a:endParaRPr lang="en-US" sz="1250" dirty="0">
+                        <a:latin typeface="Calibri" charset="0"/>
+                        <a:ea typeface="Calibri" charset="0"/>
+                        <a:cs typeface="Calibri" charset="0"/>
+                      </a:endParaRPr>
+                    </a:p>
+                  </a:txBody>
+                  <a:tcPr marL="91440" marR="91440" marT="45720" marB="45720" anchor="ctr">
+                    <a:lnL w="12700" cap="flat" cmpd="sng" algn="ctr">
+                      <a:solidFill>
+                        <a:srgbClr val="E6DEC9"/>
+                      </a:solidFill>
+                      <a:prstDash val="solid"/>
+                      <a:round/>
+                      <a:headEnd type="none" w="med" len="med"/>
+                      <a:tailEnd type="none" w="med" len="med"/>
+                    </a:lnL>
+                    <a:lnR w="12700" cap="flat" cmpd="sng" algn="ctr">
+                      <a:solidFill>
+                        <a:srgbClr val="E6DEC9"/>
+                      </a:solidFill>
+                      <a:prstDash val="solid"/>
+                      <a:round/>
+                      <a:headEnd type="none" w="med" len="med"/>
+                      <a:tailEnd type="none" w="med" len="med"/>
+                    </a:lnR>
+                    <a:lnT w="12700" cap="flat" cmpd="sng" algn="ctr">
+                      <a:solidFill>
+                        <a:srgbClr val="E6DEC9"/>
+                      </a:solidFill>
+                      <a:prstDash val="solid"/>
+                      <a:round/>
+                      <a:headEnd type="none" w="med" len="med"/>
+                      <a:tailEnd type="none" w="med" len="med"/>
+                    </a:lnT>
+                    <a:lnB w="12700" cap="flat" cmpd="sng" algn="ctr">
+                      <a:solidFill>
+                        <a:srgbClr val="E6DEC9"/>
+                      </a:solidFill>
+                      <a:prstDash val="solid"/>
+                      <a:round/>
+                      <a:headEnd type="none" w="med" len="med"/>
+                      <a:tailEnd type="none" w="med" len="med"/>
+                    </a:lnB>
+                    <a:solidFill>
+                      <a:srgbClr val="FAF8F2"/>
+                    </a:solidFill>
+                  </a:tcPr>
+                </a:tc>
+                <a:tc>
+                  <a:txBody>
+                    <a:bodyPr/>
+                    <a:lstStyle/>
+                    <a:p>
+                      <a:pPr algn="ctr" indent="0" marL="0">
+                        <a:buNone/>
+                      </a:pPr>
+                      <a:r>
+                        <a:rPr lang="en-US" sz="1250" b="1" dirty="0">
+                          <a:solidFill>
+                            <a:srgbClr val="6B2333"/>
+                          </a:solidFill>
+                          <a:latin typeface="Calibri" pitchFamily="34" charset="0"/>
+                          <a:ea typeface="Calibri" pitchFamily="34" charset="-122"/>
+                          <a:cs typeface="Calibri" pitchFamily="34" charset="-120"/>
+                        </a:rPr>
+                        <a:t>0.0005</a:t>
+                      </a:r>
+                      <a:endParaRPr lang="en-US" sz="1250" dirty="0">
+                        <a:latin typeface="Calibri" charset="0"/>
+                        <a:ea typeface="Calibri" charset="0"/>
+                        <a:cs typeface="Calibri" charset="0"/>
+                      </a:endParaRPr>
+                    </a:p>
+                  </a:txBody>
+                  <a:tcPr marL="91440" marR="91440" marT="45720" marB="45720" anchor="ctr">
+                    <a:lnL w="12700" cap="flat" cmpd="sng" algn="ctr">
+                      <a:solidFill>
+                        <a:srgbClr val="E6DEC9"/>
+                      </a:solidFill>
+                      <a:prstDash val="solid"/>
+                      <a:round/>
+                      <a:headEnd type="none" w="med" len="med"/>
+                      <a:tailEnd type="none" w="med" len="med"/>
+                    </a:lnL>
+                    <a:lnR w="12700" cap="flat" cmpd="sng" algn="ctr">
+                      <a:solidFill>
+                        <a:srgbClr val="E6DEC9"/>
+                      </a:solidFill>
+                      <a:prstDash val="solid"/>
+                      <a:round/>
+                      <a:headEnd type="none" w="med" len="med"/>
+                      <a:tailEnd type="none" w="med" len="med"/>
+                    </a:lnR>
+                    <a:lnT w="12700" cap="flat" cmpd="sng" algn="ctr">
+                      <a:solidFill>
+                        <a:srgbClr val="E6DEC9"/>
+                      </a:solidFill>
+                      <a:prstDash val="solid"/>
+                      <a:round/>
+                      <a:headEnd type="none" w="med" len="med"/>
+                      <a:tailEnd type="none" w="med" len="med"/>
+                    </a:lnT>
+                    <a:lnB w="12700" cap="flat" cmpd="sng" algn="ctr">
+                      <a:solidFill>
+                        <a:srgbClr val="E6DEC9"/>
+                      </a:solidFill>
+                      <a:prstDash val="solid"/>
+                      <a:round/>
+                      <a:headEnd type="none" w="med" len="med"/>
+                      <a:tailEnd type="none" w="med" len="med"/>
+                    </a:lnB>
+                    <a:solidFill>
+                      <a:srgbClr val="FAF8F2"/>
+                    </a:solidFill>
+                  </a:tcPr>
+                </a:tc>
+                <a:tc>
+                  <a:txBody>
+                    <a:bodyPr/>
+                    <a:lstStyle/>
+                    <a:p>
+                      <a:pPr algn="ctr" indent="0" marL="0">
+                        <a:buNone/>
+                      </a:pPr>
+                      <a:r>
+                        <a:rPr lang="en-US" sz="1250" b="1" dirty="0">
+                          <a:solidFill>
+                            <a:srgbClr val="6B2333"/>
+                          </a:solidFill>
+                          <a:latin typeface="Calibri" pitchFamily="34" charset="0"/>
+                          <a:ea typeface="Calibri" pitchFamily="34" charset="-122"/>
+                          <a:cs typeface="Calibri" pitchFamily="34" charset="-120"/>
+                        </a:rPr>
+                        <a:t>47,000×</a:t>
+                      </a:r>
+                      <a:endParaRPr lang="en-US" sz="1250" dirty="0">
+                        <a:latin typeface="Calibri" charset="0"/>
+                        <a:ea typeface="Calibri" charset="0"/>
+                        <a:cs typeface="Calibri" charset="0"/>
+                      </a:endParaRPr>
+                    </a:p>
+                  </a:txBody>
+                  <a:tcPr marL="91440" marR="91440" marT="45720" marB="45720" anchor="ctr">
+                    <a:lnL w="12700" cap="flat" cmpd="sng" algn="ctr">
+                      <a:solidFill>
+                        <a:srgbClr val="E6DEC9"/>
+                      </a:solidFill>
+                      <a:prstDash val="solid"/>
+                      <a:round/>
+                      <a:headEnd type="none" w="med" len="med"/>
+                      <a:tailEnd type="none" w="med" len="med"/>
+                    </a:lnL>
+                    <a:lnR w="12700" cap="flat" cmpd="sng" algn="ctr">
+                      <a:solidFill>
+                        <a:srgbClr val="E6DEC9"/>
+                      </a:solidFill>
+                      <a:prstDash val="solid"/>
+                      <a:round/>
+                      <a:headEnd type="none" w="med" len="med"/>
+                      <a:tailEnd type="none" w="med" len="med"/>
+                    </a:lnR>
+                    <a:lnT w="12700" cap="flat" cmpd="sng" algn="ctr">
+                      <a:solidFill>
+                        <a:srgbClr val="E6DEC9"/>
+                      </a:solidFill>
+                      <a:prstDash val="solid"/>
+                      <a:round/>
+                      <a:headEnd type="none" w="med" len="med"/>
+                      <a:tailEnd type="none" w="med" len="med"/>
+                    </a:lnT>
+                    <a:lnB w="12700" cap="flat" cmpd="sng" algn="ctr">
+                      <a:solidFill>
+                        <a:srgbClr val="E6DEC9"/>
+                      </a:solidFill>
+                      <a:prstDash val="solid"/>
+                      <a:round/>
+                      <a:headEnd type="none" w="med" len="med"/>
+                      <a:tailEnd type="none" w="med" len="med"/>
+                    </a:lnB>
+                    <a:solidFill>
+                      <a:srgbClr val="FAF8F2"/>
+                    </a:solidFill>
+                  </a:tcPr>
+                </a:tc>
+              </a:tr>
+            </a:tbl>
+          </a:graphicData>
+        </a:graphic>
+      </p:graphicFrame>
+      <p:sp>
+        <p:nvSpPr>
+          <p:cNvPr id="8" name="Text 5"/>
+          <p:cNvSpPr/>
+          <p:nvPr/>
+        </p:nvSpPr>
+        <p:spPr>
+          <a:xfrm>
+            <a:off x="6400800" y="5074920"/>
+            <a:ext cx="5212080" cy="822960"/>
+          </a:xfrm>
+          <a:prstGeom prst="rect">
+            <a:avLst/>
+          </a:prstGeom>
+          <a:noFill/>
+          <a:ln/>
+        </p:spPr>
+        <p:txBody>
+          <a:bodyPr wrap="square" lIns="0" tIns="0" rIns="0" bIns="0" rtlCol="0" anchor="t"/>
+          <a:lstStyle/>
+          <a:p>
+            <a:pPr algn="l" indent="0" marL="0">
+              <a:buNone/>
+            </a:pPr>
+            <a:r>
+              <a:rPr lang="en-US" sz="1100" i="1" dirty="0">
+                <a:solidFill>
+                  <a:srgbClr val="7A6E5A"/>
+                </a:solidFill>
+                <a:latin typeface="Calibri" pitchFamily="34" charset="0"/>
+                <a:ea typeface="Calibri" pitchFamily="34" charset="-122"/>
+                <a:cs typeface="Calibri" pitchFamily="34" charset="-120"/>
+              </a:rPr>
+              <a:t>A100, n = 20,000, small net (1 conv, hidden 32). The NN ties the exact closed-form ODE; this is our simplified generator, COSMIC-dFBA (~15 min) is off this chart entirely.</a:t>
+            </a:r>
+            <a:endParaRPr lang="en-US" sz="1100" dirty="0"/>
+          </a:p>
+        </p:txBody>
+      </p:sp>
+    </p:spTree>
+  </p:cSld>
+  <p:clrMapOvr>
+    <a:masterClrMapping/>
+  </p:clrMapOvr>
+</p:sld>
+</file>
+
+<file path=ppt/slides/slide11.xml><?xml version="1.0" encoding="utf-8"?>
+<p:sld xmlns:a="http://schemas.openxmlformats.org/drawingml/2006/main" xmlns:r="http://schemas.openxmlformats.org/officeDocument/2006/relationships" xmlns:p="http://schemas.openxmlformats.org/presentationml/2006/main">
+  <p:cSld name="Slide 11">
     <p:bg>
       <p:bgPr>
         <a:solidFill>
@@ -3410,9 +4677,9 @@
 </p:sld>
 </file>
 
-<file path=ppt/slides/slide11.xml><?xml version="1.0" encoding="utf-8"?>
+<file path=ppt/slides/slide12.xml><?xml version="1.0" encoding="utf-8"?>
 <p:sld xmlns:a="http://schemas.openxmlformats.org/drawingml/2006/main" xmlns:r="http://schemas.openxmlformats.org/officeDocument/2006/relationships" xmlns:p="http://schemas.openxmlformats.org/presentationml/2006/main">
-  <p:cSld name="Slide 11">
+  <p:cSld name="Slide 12">
     <p:bg>
       <p:bgPr>
         <a:solidFill>
@@ -4122,9 +5389,9 @@
 </p:sld>
 </file>
 
-<file path=ppt/slides/slide12.xml><?xml version="1.0" encoding="utf-8"?>
+<file path=ppt/slides/slide13.xml><?xml version="1.0" encoding="utf-8"?>
 <p:sld xmlns:a="http://schemas.openxmlformats.org/drawingml/2006/main" xmlns:r="http://schemas.openxmlformats.org/officeDocument/2006/relationships" xmlns:p="http://schemas.openxmlformats.org/presentationml/2006/main">
-  <p:cSld name="Slide 12">
+  <p:cSld name="Slide 13">
     <p:bg>
       <p:bgPr>
         <a:solidFill>
@@ -4643,9 +5910,9 @@
 </p:sld>
 </file>
 
-<file path=ppt/slides/slide13.xml><?xml version="1.0" encoding="utf-8"?>
+<file path=ppt/slides/slide14.xml><?xml version="1.0" encoding="utf-8"?>
 <p:sld xmlns:a="http://schemas.openxmlformats.org/drawingml/2006/main" xmlns:r="http://schemas.openxmlformats.org/officeDocument/2006/relationships" xmlns:p="http://schemas.openxmlformats.org/presentationml/2006/main">
-  <p:cSld name="Slide 13">
+  <p:cSld name="Slide 14">
     <p:bg>
       <p:bgPr>
         <a:solidFill>
@@ -6028,6 +7295,3580 @@
                 <a:ea typeface="Cambria" pitchFamily="34" charset="-122"/>
                 <a:cs typeface="Cambria" pitchFamily="34" charset="-120"/>
               </a:rPr>
+              <a:t>Model architecture</a:t>
+            </a:r>
+            <a:endParaRPr lang="en-US" sz="3200" dirty="0"/>
+          </a:p>
+        </p:txBody>
+      </p:sp>
+      <p:sp>
+        <p:nvSpPr>
+          <p:cNvPr id="3" name="Text 1"/>
+          <p:cNvSpPr/>
+          <p:nvPr/>
+        </p:nvSpPr>
+        <p:spPr>
+          <a:xfrm>
+            <a:off x="548640" y="1188720"/>
+            <a:ext cx="10972800" cy="457200"/>
+          </a:xfrm>
+          <a:prstGeom prst="rect">
+            <a:avLst/>
+          </a:prstGeom>
+          <a:noFill/>
+          <a:ln/>
+        </p:spPr>
+        <p:txBody>
+          <a:bodyPr wrap="square" lIns="0" tIns="0" rIns="0" bIns="0" rtlCol="0" anchor="ctr"/>
+          <a:lstStyle/>
+          <a:p>
+            <a:pPr algn="l" indent="0" marL="0">
+              <a:buNone/>
+            </a:pPr>
+            <a:r>
+              <a:rPr lang="en-US" sz="1500" i="1" dirty="0">
+                <a:solidFill>
+                  <a:srgbClr val="7A6E5A"/>
+                </a:solidFill>
+                <a:latin typeface="Calibri" pitchFamily="34" charset="0"/>
+                <a:ea typeface="Calibri" pitchFamily="34" charset="-122"/>
+                <a:cs typeface="Calibri" pitchFamily="34" charset="-120"/>
+              </a:rPr>
+              <a:t>The small model: one 1D conv layer, 32 hidden nodes. Every node drawn as a dot.</a:t>
+            </a:r>
+            <a:endParaRPr lang="en-US" sz="1500" dirty="0"/>
+          </a:p>
+        </p:txBody>
+      </p:sp>
+      <p:sp>
+        <p:nvSpPr>
+          <p:cNvPr id="4" name="Shape 2"/>
+          <p:cNvSpPr/>
+          <p:nvPr/>
+        </p:nvSpPr>
+        <p:spPr>
+          <a:xfrm>
+            <a:off x="2103120" y="3611880"/>
+            <a:ext cx="1417320" cy="0"/>
+          </a:xfrm>
+          <a:prstGeom prst="line">
+            <a:avLst/>
+          </a:prstGeom>
+          <a:noFill/>
+          <a:ln w="25400">
+            <a:solidFill>
+              <a:srgbClr val="A2823E"/>
+            </a:solidFill>
+            <a:prstDash val="solid"/>
+            <a:tailEnd type="triangle"/>
+          </a:ln>
+        </p:spPr>
+      </p:sp>
+      <p:sp>
+        <p:nvSpPr>
+          <p:cNvPr id="5" name="Shape 3"/>
+          <p:cNvSpPr/>
+          <p:nvPr/>
+        </p:nvSpPr>
+        <p:spPr>
+          <a:xfrm>
+            <a:off x="4251960" y="3611880"/>
+            <a:ext cx="1417320" cy="0"/>
+          </a:xfrm>
+          <a:prstGeom prst="line">
+            <a:avLst/>
+          </a:prstGeom>
+          <a:noFill/>
+          <a:ln w="25400">
+            <a:solidFill>
+              <a:srgbClr val="A2823E"/>
+            </a:solidFill>
+            <a:prstDash val="solid"/>
+            <a:tailEnd type="triangle"/>
+          </a:ln>
+        </p:spPr>
+      </p:sp>
+      <p:sp>
+        <p:nvSpPr>
+          <p:cNvPr id="6" name="Shape 4"/>
+          <p:cNvSpPr/>
+          <p:nvPr/>
+        </p:nvSpPr>
+        <p:spPr>
+          <a:xfrm>
+            <a:off x="6400800" y="3611880"/>
+            <a:ext cx="1417320" cy="0"/>
+          </a:xfrm>
+          <a:prstGeom prst="line">
+            <a:avLst/>
+          </a:prstGeom>
+          <a:noFill/>
+          <a:ln w="25400">
+            <a:solidFill>
+              <a:srgbClr val="A2823E"/>
+            </a:solidFill>
+            <a:prstDash val="solid"/>
+            <a:tailEnd type="triangle"/>
+          </a:ln>
+        </p:spPr>
+      </p:sp>
+      <p:sp>
+        <p:nvSpPr>
+          <p:cNvPr id="7" name="Shape 5"/>
+          <p:cNvSpPr/>
+          <p:nvPr/>
+        </p:nvSpPr>
+        <p:spPr>
+          <a:xfrm>
+            <a:off x="8549640" y="3611880"/>
+            <a:ext cx="1417320" cy="0"/>
+          </a:xfrm>
+          <a:prstGeom prst="line">
+            <a:avLst/>
+          </a:prstGeom>
+          <a:noFill/>
+          <a:ln w="25400">
+            <a:solidFill>
+              <a:srgbClr val="A2823E"/>
+            </a:solidFill>
+            <a:prstDash val="solid"/>
+            <a:tailEnd type="triangle"/>
+          </a:ln>
+        </p:spPr>
+      </p:sp>
+      <p:sp>
+        <p:nvSpPr>
+          <p:cNvPr id="8" name="Shape 6"/>
+          <p:cNvSpPr/>
+          <p:nvPr/>
+        </p:nvSpPr>
+        <p:spPr>
+          <a:xfrm>
+            <a:off x="1705356" y="2299716"/>
+            <a:ext cx="64008" cy="64008"/>
+          </a:xfrm>
+          <a:prstGeom prst="ellipse">
+            <a:avLst/>
+          </a:prstGeom>
+          <a:solidFill>
+            <a:srgbClr val="7A6E5A"/>
+          </a:solidFill>
+          <a:ln w="12700">
+            <a:solidFill>
+              <a:srgbClr val="7A6E5A"/>
+            </a:solidFill>
+            <a:prstDash val="solid"/>
+          </a:ln>
+        </p:spPr>
+      </p:sp>
+      <p:sp>
+        <p:nvSpPr>
+          <p:cNvPr id="9" name="Shape 7"/>
+          <p:cNvSpPr/>
+          <p:nvPr/>
+        </p:nvSpPr>
+        <p:spPr>
+          <a:xfrm>
+            <a:off x="1705356" y="2619756"/>
+            <a:ext cx="64008" cy="64008"/>
+          </a:xfrm>
+          <a:prstGeom prst="ellipse">
+            <a:avLst/>
+          </a:prstGeom>
+          <a:solidFill>
+            <a:srgbClr val="7A6E5A"/>
+          </a:solidFill>
+          <a:ln w="12700">
+            <a:solidFill>
+              <a:srgbClr val="7A6E5A"/>
+            </a:solidFill>
+            <a:prstDash val="solid"/>
+          </a:ln>
+        </p:spPr>
+      </p:sp>
+      <p:sp>
+        <p:nvSpPr>
+          <p:cNvPr id="10" name="Shape 8"/>
+          <p:cNvSpPr/>
+          <p:nvPr/>
+        </p:nvSpPr>
+        <p:spPr>
+          <a:xfrm>
+            <a:off x="1705356" y="2939796"/>
+            <a:ext cx="64008" cy="64008"/>
+          </a:xfrm>
+          <a:prstGeom prst="ellipse">
+            <a:avLst/>
+          </a:prstGeom>
+          <a:solidFill>
+            <a:srgbClr val="7A6E5A"/>
+          </a:solidFill>
+          <a:ln w="12700">
+            <a:solidFill>
+              <a:srgbClr val="7A6E5A"/>
+            </a:solidFill>
+            <a:prstDash val="solid"/>
+          </a:ln>
+        </p:spPr>
+      </p:sp>
+      <p:sp>
+        <p:nvSpPr>
+          <p:cNvPr id="11" name="Shape 9"/>
+          <p:cNvSpPr/>
+          <p:nvPr/>
+        </p:nvSpPr>
+        <p:spPr>
+          <a:xfrm>
+            <a:off x="1705356" y="3259836"/>
+            <a:ext cx="64008" cy="64008"/>
+          </a:xfrm>
+          <a:prstGeom prst="ellipse">
+            <a:avLst/>
+          </a:prstGeom>
+          <a:solidFill>
+            <a:srgbClr val="7A6E5A"/>
+          </a:solidFill>
+          <a:ln w="12700">
+            <a:solidFill>
+              <a:srgbClr val="7A6E5A"/>
+            </a:solidFill>
+            <a:prstDash val="solid"/>
+          </a:ln>
+        </p:spPr>
+      </p:sp>
+      <p:sp>
+        <p:nvSpPr>
+          <p:cNvPr id="12" name="Shape 10"/>
+          <p:cNvSpPr/>
+          <p:nvPr/>
+        </p:nvSpPr>
+        <p:spPr>
+          <a:xfrm>
+            <a:off x="1705356" y="3579876"/>
+            <a:ext cx="64008" cy="64008"/>
+          </a:xfrm>
+          <a:prstGeom prst="ellipse">
+            <a:avLst/>
+          </a:prstGeom>
+          <a:solidFill>
+            <a:srgbClr val="7A6E5A"/>
+          </a:solidFill>
+          <a:ln w="12700">
+            <a:solidFill>
+              <a:srgbClr val="7A6E5A"/>
+            </a:solidFill>
+            <a:prstDash val="solid"/>
+          </a:ln>
+        </p:spPr>
+      </p:sp>
+      <p:sp>
+        <p:nvSpPr>
+          <p:cNvPr id="13" name="Shape 11"/>
+          <p:cNvSpPr/>
+          <p:nvPr/>
+        </p:nvSpPr>
+        <p:spPr>
+          <a:xfrm>
+            <a:off x="1705356" y="3899916"/>
+            <a:ext cx="64008" cy="64008"/>
+          </a:xfrm>
+          <a:prstGeom prst="ellipse">
+            <a:avLst/>
+          </a:prstGeom>
+          <a:solidFill>
+            <a:srgbClr val="7A6E5A"/>
+          </a:solidFill>
+          <a:ln w="12700">
+            <a:solidFill>
+              <a:srgbClr val="7A6E5A"/>
+            </a:solidFill>
+            <a:prstDash val="solid"/>
+          </a:ln>
+        </p:spPr>
+      </p:sp>
+      <p:sp>
+        <p:nvSpPr>
+          <p:cNvPr id="14" name="Shape 12"/>
+          <p:cNvSpPr/>
+          <p:nvPr/>
+        </p:nvSpPr>
+        <p:spPr>
+          <a:xfrm>
+            <a:off x="1705356" y="4219956"/>
+            <a:ext cx="64008" cy="64008"/>
+          </a:xfrm>
+          <a:prstGeom prst="ellipse">
+            <a:avLst/>
+          </a:prstGeom>
+          <a:solidFill>
+            <a:srgbClr val="7A6E5A"/>
+          </a:solidFill>
+          <a:ln w="12700">
+            <a:solidFill>
+              <a:srgbClr val="7A6E5A"/>
+            </a:solidFill>
+            <a:prstDash val="solid"/>
+          </a:ln>
+        </p:spPr>
+      </p:sp>
+      <p:sp>
+        <p:nvSpPr>
+          <p:cNvPr id="15" name="Shape 13"/>
+          <p:cNvSpPr/>
+          <p:nvPr/>
+        </p:nvSpPr>
+        <p:spPr>
+          <a:xfrm>
+            <a:off x="1705356" y="4539996"/>
+            <a:ext cx="64008" cy="64008"/>
+          </a:xfrm>
+          <a:prstGeom prst="ellipse">
+            <a:avLst/>
+          </a:prstGeom>
+          <a:solidFill>
+            <a:srgbClr val="7A6E5A"/>
+          </a:solidFill>
+          <a:ln w="12700">
+            <a:solidFill>
+              <a:srgbClr val="7A6E5A"/>
+            </a:solidFill>
+            <a:prstDash val="solid"/>
+          </a:ln>
+        </p:spPr>
+      </p:sp>
+      <p:sp>
+        <p:nvSpPr>
+          <p:cNvPr id="16" name="Shape 14"/>
+          <p:cNvSpPr/>
+          <p:nvPr/>
+        </p:nvSpPr>
+        <p:spPr>
+          <a:xfrm>
+            <a:off x="1705356" y="4860036"/>
+            <a:ext cx="64008" cy="64008"/>
+          </a:xfrm>
+          <a:prstGeom prst="ellipse">
+            <a:avLst/>
+          </a:prstGeom>
+          <a:solidFill>
+            <a:srgbClr val="7A6E5A"/>
+          </a:solidFill>
+          <a:ln w="12700">
+            <a:solidFill>
+              <a:srgbClr val="7A6E5A"/>
+            </a:solidFill>
+            <a:prstDash val="solid"/>
+          </a:ln>
+        </p:spPr>
+      </p:sp>
+      <p:sp>
+        <p:nvSpPr>
+          <p:cNvPr id="17" name="Text 15"/>
+          <p:cNvSpPr/>
+          <p:nvPr/>
+        </p:nvSpPr>
+        <p:spPr>
+          <a:xfrm>
+            <a:off x="731520" y="5029200"/>
+            <a:ext cx="2011680" cy="320040"/>
+          </a:xfrm>
+          <a:prstGeom prst="rect">
+            <a:avLst/>
+          </a:prstGeom>
+          <a:noFill/>
+          <a:ln/>
+        </p:spPr>
+        <p:txBody>
+          <a:bodyPr wrap="square" lIns="0" tIns="0" rIns="0" bIns="0" rtlCol="0" anchor="ctr"/>
+          <a:lstStyle/>
+          <a:p>
+            <a:pPr algn="ctr" indent="0" marL="0">
+              <a:buNone/>
+            </a:pPr>
+            <a:r>
+              <a:rPr lang="en-US" sz="1400" b="1" dirty="0">
+                <a:solidFill>
+                  <a:srgbClr val="2B211A"/>
+                </a:solidFill>
+                <a:latin typeface="Cambria" pitchFamily="34" charset="0"/>
+                <a:ea typeface="Cambria" pitchFamily="34" charset="-122"/>
+                <a:cs typeface="Cambria" pitchFamily="34" charset="-120"/>
+              </a:rPr>
+              <a:t>input</a:t>
+            </a:r>
+            <a:endParaRPr lang="en-US" sz="1400" dirty="0"/>
+          </a:p>
+        </p:txBody>
+      </p:sp>
+      <p:sp>
+        <p:nvSpPr>
+          <p:cNvPr id="18" name="Text 16"/>
+          <p:cNvSpPr/>
+          <p:nvPr/>
+        </p:nvSpPr>
+        <p:spPr>
+          <a:xfrm>
+            <a:off x="731520" y="5349240"/>
+            <a:ext cx="2011680" cy="274320"/>
+          </a:xfrm>
+          <a:prstGeom prst="rect">
+            <a:avLst/>
+          </a:prstGeom>
+          <a:noFill/>
+          <a:ln/>
+        </p:spPr>
+        <p:txBody>
+          <a:bodyPr wrap="square" lIns="0" tIns="0" rIns="0" bIns="0" rtlCol="0" anchor="ctr"/>
+          <a:lstStyle/>
+          <a:p>
+            <a:pPr algn="ctr" indent="0" marL="0">
+              <a:buNone/>
+            </a:pPr>
+            <a:r>
+              <a:rPr lang="en-US" sz="1200" dirty="0">
+                <a:solidFill>
+                  <a:srgbClr val="7A6E5A"/>
+                </a:solidFill>
+                <a:latin typeface="Calibri" pitchFamily="34" charset="0"/>
+                <a:ea typeface="Calibri" pitchFamily="34" charset="-122"/>
+                <a:cs typeface="Calibri" pitchFamily="34" charset="-120"/>
+              </a:rPr>
+              <a:t>9</a:t>
+            </a:r>
+            <a:endParaRPr lang="en-US" sz="1200" dirty="0"/>
+          </a:p>
+        </p:txBody>
+      </p:sp>
+      <p:sp>
+        <p:nvSpPr>
+          <p:cNvPr id="19" name="Shape 17"/>
+          <p:cNvSpPr/>
+          <p:nvPr/>
+        </p:nvSpPr>
+        <p:spPr>
+          <a:xfrm>
+            <a:off x="3854196" y="2299716"/>
+            <a:ext cx="64008" cy="64008"/>
+          </a:xfrm>
+          <a:prstGeom prst="ellipse">
+            <a:avLst/>
+          </a:prstGeom>
+          <a:solidFill>
+            <a:srgbClr val="6B2333"/>
+          </a:solidFill>
+          <a:ln w="12700">
+            <a:solidFill>
+              <a:srgbClr val="6B2333"/>
+            </a:solidFill>
+            <a:prstDash val="solid"/>
+          </a:ln>
+        </p:spPr>
+      </p:sp>
+      <p:sp>
+        <p:nvSpPr>
+          <p:cNvPr id="20" name="Shape 18"/>
+          <p:cNvSpPr/>
+          <p:nvPr/>
+        </p:nvSpPr>
+        <p:spPr>
+          <a:xfrm>
+            <a:off x="3854196" y="2382307"/>
+            <a:ext cx="64008" cy="64008"/>
+          </a:xfrm>
+          <a:prstGeom prst="ellipse">
+            <a:avLst/>
+          </a:prstGeom>
+          <a:solidFill>
+            <a:srgbClr val="6B2333"/>
+          </a:solidFill>
+          <a:ln w="12700">
+            <a:solidFill>
+              <a:srgbClr val="6B2333"/>
+            </a:solidFill>
+            <a:prstDash val="solid"/>
+          </a:ln>
+        </p:spPr>
+      </p:sp>
+      <p:sp>
+        <p:nvSpPr>
+          <p:cNvPr id="21" name="Shape 19"/>
+          <p:cNvSpPr/>
+          <p:nvPr/>
+        </p:nvSpPr>
+        <p:spPr>
+          <a:xfrm>
+            <a:off x="3854196" y="2464898"/>
+            <a:ext cx="64008" cy="64008"/>
+          </a:xfrm>
+          <a:prstGeom prst="ellipse">
+            <a:avLst/>
+          </a:prstGeom>
+          <a:solidFill>
+            <a:srgbClr val="6B2333"/>
+          </a:solidFill>
+          <a:ln w="12700">
+            <a:solidFill>
+              <a:srgbClr val="6B2333"/>
+            </a:solidFill>
+            <a:prstDash val="solid"/>
+          </a:ln>
+        </p:spPr>
+      </p:sp>
+      <p:sp>
+        <p:nvSpPr>
+          <p:cNvPr id="22" name="Shape 20"/>
+          <p:cNvSpPr/>
+          <p:nvPr/>
+        </p:nvSpPr>
+        <p:spPr>
+          <a:xfrm>
+            <a:off x="3854196" y="2547489"/>
+            <a:ext cx="64008" cy="64008"/>
+          </a:xfrm>
+          <a:prstGeom prst="ellipse">
+            <a:avLst/>
+          </a:prstGeom>
+          <a:solidFill>
+            <a:srgbClr val="6B2333"/>
+          </a:solidFill>
+          <a:ln w="12700">
+            <a:solidFill>
+              <a:srgbClr val="6B2333"/>
+            </a:solidFill>
+            <a:prstDash val="solid"/>
+          </a:ln>
+        </p:spPr>
+      </p:sp>
+      <p:sp>
+        <p:nvSpPr>
+          <p:cNvPr id="23" name="Shape 21"/>
+          <p:cNvSpPr/>
+          <p:nvPr/>
+        </p:nvSpPr>
+        <p:spPr>
+          <a:xfrm>
+            <a:off x="3854196" y="2630080"/>
+            <a:ext cx="64008" cy="64008"/>
+          </a:xfrm>
+          <a:prstGeom prst="ellipse">
+            <a:avLst/>
+          </a:prstGeom>
+          <a:solidFill>
+            <a:srgbClr val="6B2333"/>
+          </a:solidFill>
+          <a:ln w="12700">
+            <a:solidFill>
+              <a:srgbClr val="6B2333"/>
+            </a:solidFill>
+            <a:prstDash val="solid"/>
+          </a:ln>
+        </p:spPr>
+      </p:sp>
+      <p:sp>
+        <p:nvSpPr>
+          <p:cNvPr id="24" name="Shape 22"/>
+          <p:cNvSpPr/>
+          <p:nvPr/>
+        </p:nvSpPr>
+        <p:spPr>
+          <a:xfrm>
+            <a:off x="3854196" y="2712671"/>
+            <a:ext cx="64008" cy="64008"/>
+          </a:xfrm>
+          <a:prstGeom prst="ellipse">
+            <a:avLst/>
+          </a:prstGeom>
+          <a:solidFill>
+            <a:srgbClr val="6B2333"/>
+          </a:solidFill>
+          <a:ln w="12700">
+            <a:solidFill>
+              <a:srgbClr val="6B2333"/>
+            </a:solidFill>
+            <a:prstDash val="solid"/>
+          </a:ln>
+        </p:spPr>
+      </p:sp>
+      <p:sp>
+        <p:nvSpPr>
+          <p:cNvPr id="25" name="Shape 23"/>
+          <p:cNvSpPr/>
+          <p:nvPr/>
+        </p:nvSpPr>
+        <p:spPr>
+          <a:xfrm>
+            <a:off x="3854196" y="2795262"/>
+            <a:ext cx="64008" cy="64008"/>
+          </a:xfrm>
+          <a:prstGeom prst="ellipse">
+            <a:avLst/>
+          </a:prstGeom>
+          <a:solidFill>
+            <a:srgbClr val="6B2333"/>
+          </a:solidFill>
+          <a:ln w="12700">
+            <a:solidFill>
+              <a:srgbClr val="6B2333"/>
+            </a:solidFill>
+            <a:prstDash val="solid"/>
+          </a:ln>
+        </p:spPr>
+      </p:sp>
+      <p:sp>
+        <p:nvSpPr>
+          <p:cNvPr id="26" name="Shape 24"/>
+          <p:cNvSpPr/>
+          <p:nvPr/>
+        </p:nvSpPr>
+        <p:spPr>
+          <a:xfrm>
+            <a:off x="3854196" y="2877853"/>
+            <a:ext cx="64008" cy="64008"/>
+          </a:xfrm>
+          <a:prstGeom prst="ellipse">
+            <a:avLst/>
+          </a:prstGeom>
+          <a:solidFill>
+            <a:srgbClr val="6B2333"/>
+          </a:solidFill>
+          <a:ln w="12700">
+            <a:solidFill>
+              <a:srgbClr val="6B2333"/>
+            </a:solidFill>
+            <a:prstDash val="solid"/>
+          </a:ln>
+        </p:spPr>
+      </p:sp>
+      <p:sp>
+        <p:nvSpPr>
+          <p:cNvPr id="27" name="Shape 25"/>
+          <p:cNvSpPr/>
+          <p:nvPr/>
+        </p:nvSpPr>
+        <p:spPr>
+          <a:xfrm>
+            <a:off x="3854196" y="2960444"/>
+            <a:ext cx="64008" cy="64008"/>
+          </a:xfrm>
+          <a:prstGeom prst="ellipse">
+            <a:avLst/>
+          </a:prstGeom>
+          <a:solidFill>
+            <a:srgbClr val="6B2333"/>
+          </a:solidFill>
+          <a:ln w="12700">
+            <a:solidFill>
+              <a:srgbClr val="6B2333"/>
+            </a:solidFill>
+            <a:prstDash val="solid"/>
+          </a:ln>
+        </p:spPr>
+      </p:sp>
+      <p:sp>
+        <p:nvSpPr>
+          <p:cNvPr id="28" name="Shape 26"/>
+          <p:cNvSpPr/>
+          <p:nvPr/>
+        </p:nvSpPr>
+        <p:spPr>
+          <a:xfrm>
+            <a:off x="3854196" y="3043035"/>
+            <a:ext cx="64008" cy="64008"/>
+          </a:xfrm>
+          <a:prstGeom prst="ellipse">
+            <a:avLst/>
+          </a:prstGeom>
+          <a:solidFill>
+            <a:srgbClr val="6B2333"/>
+          </a:solidFill>
+          <a:ln w="12700">
+            <a:solidFill>
+              <a:srgbClr val="6B2333"/>
+            </a:solidFill>
+            <a:prstDash val="solid"/>
+          </a:ln>
+        </p:spPr>
+      </p:sp>
+      <p:sp>
+        <p:nvSpPr>
+          <p:cNvPr id="29" name="Shape 27"/>
+          <p:cNvSpPr/>
+          <p:nvPr/>
+        </p:nvSpPr>
+        <p:spPr>
+          <a:xfrm>
+            <a:off x="3854196" y="3125626"/>
+            <a:ext cx="64008" cy="64008"/>
+          </a:xfrm>
+          <a:prstGeom prst="ellipse">
+            <a:avLst/>
+          </a:prstGeom>
+          <a:solidFill>
+            <a:srgbClr val="6B2333"/>
+          </a:solidFill>
+          <a:ln w="12700">
+            <a:solidFill>
+              <a:srgbClr val="6B2333"/>
+            </a:solidFill>
+            <a:prstDash val="solid"/>
+          </a:ln>
+        </p:spPr>
+      </p:sp>
+      <p:sp>
+        <p:nvSpPr>
+          <p:cNvPr id="30" name="Shape 28"/>
+          <p:cNvSpPr/>
+          <p:nvPr/>
+        </p:nvSpPr>
+        <p:spPr>
+          <a:xfrm>
+            <a:off x="3854196" y="3208217"/>
+            <a:ext cx="64008" cy="64008"/>
+          </a:xfrm>
+          <a:prstGeom prst="ellipse">
+            <a:avLst/>
+          </a:prstGeom>
+          <a:solidFill>
+            <a:srgbClr val="6B2333"/>
+          </a:solidFill>
+          <a:ln w="12700">
+            <a:solidFill>
+              <a:srgbClr val="6B2333"/>
+            </a:solidFill>
+            <a:prstDash val="solid"/>
+          </a:ln>
+        </p:spPr>
+      </p:sp>
+      <p:sp>
+        <p:nvSpPr>
+          <p:cNvPr id="31" name="Shape 29"/>
+          <p:cNvSpPr/>
+          <p:nvPr/>
+        </p:nvSpPr>
+        <p:spPr>
+          <a:xfrm>
+            <a:off x="3854196" y="3290808"/>
+            <a:ext cx="64008" cy="64008"/>
+          </a:xfrm>
+          <a:prstGeom prst="ellipse">
+            <a:avLst/>
+          </a:prstGeom>
+          <a:solidFill>
+            <a:srgbClr val="6B2333"/>
+          </a:solidFill>
+          <a:ln w="12700">
+            <a:solidFill>
+              <a:srgbClr val="6B2333"/>
+            </a:solidFill>
+            <a:prstDash val="solid"/>
+          </a:ln>
+        </p:spPr>
+      </p:sp>
+      <p:sp>
+        <p:nvSpPr>
+          <p:cNvPr id="32" name="Shape 30"/>
+          <p:cNvSpPr/>
+          <p:nvPr/>
+        </p:nvSpPr>
+        <p:spPr>
+          <a:xfrm>
+            <a:off x="3854196" y="3373399"/>
+            <a:ext cx="64008" cy="64008"/>
+          </a:xfrm>
+          <a:prstGeom prst="ellipse">
+            <a:avLst/>
+          </a:prstGeom>
+          <a:solidFill>
+            <a:srgbClr val="6B2333"/>
+          </a:solidFill>
+          <a:ln w="12700">
+            <a:solidFill>
+              <a:srgbClr val="6B2333"/>
+            </a:solidFill>
+            <a:prstDash val="solid"/>
+          </a:ln>
+        </p:spPr>
+      </p:sp>
+      <p:sp>
+        <p:nvSpPr>
+          <p:cNvPr id="33" name="Shape 31"/>
+          <p:cNvSpPr/>
+          <p:nvPr/>
+        </p:nvSpPr>
+        <p:spPr>
+          <a:xfrm>
+            <a:off x="3854196" y="3455990"/>
+            <a:ext cx="64008" cy="64008"/>
+          </a:xfrm>
+          <a:prstGeom prst="ellipse">
+            <a:avLst/>
+          </a:prstGeom>
+          <a:solidFill>
+            <a:srgbClr val="6B2333"/>
+          </a:solidFill>
+          <a:ln w="12700">
+            <a:solidFill>
+              <a:srgbClr val="6B2333"/>
+            </a:solidFill>
+            <a:prstDash val="solid"/>
+          </a:ln>
+        </p:spPr>
+      </p:sp>
+      <p:sp>
+        <p:nvSpPr>
+          <p:cNvPr id="34" name="Shape 32"/>
+          <p:cNvSpPr/>
+          <p:nvPr/>
+        </p:nvSpPr>
+        <p:spPr>
+          <a:xfrm>
+            <a:off x="3854196" y="3538581"/>
+            <a:ext cx="64008" cy="64008"/>
+          </a:xfrm>
+          <a:prstGeom prst="ellipse">
+            <a:avLst/>
+          </a:prstGeom>
+          <a:solidFill>
+            <a:srgbClr val="6B2333"/>
+          </a:solidFill>
+          <a:ln w="12700">
+            <a:solidFill>
+              <a:srgbClr val="6B2333"/>
+            </a:solidFill>
+            <a:prstDash val="solid"/>
+          </a:ln>
+        </p:spPr>
+      </p:sp>
+      <p:sp>
+        <p:nvSpPr>
+          <p:cNvPr id="35" name="Shape 33"/>
+          <p:cNvSpPr/>
+          <p:nvPr/>
+        </p:nvSpPr>
+        <p:spPr>
+          <a:xfrm>
+            <a:off x="3854196" y="3621171"/>
+            <a:ext cx="64008" cy="64008"/>
+          </a:xfrm>
+          <a:prstGeom prst="ellipse">
+            <a:avLst/>
+          </a:prstGeom>
+          <a:solidFill>
+            <a:srgbClr val="6B2333"/>
+          </a:solidFill>
+          <a:ln w="12700">
+            <a:solidFill>
+              <a:srgbClr val="6B2333"/>
+            </a:solidFill>
+            <a:prstDash val="solid"/>
+          </a:ln>
+        </p:spPr>
+      </p:sp>
+      <p:sp>
+        <p:nvSpPr>
+          <p:cNvPr id="36" name="Shape 34"/>
+          <p:cNvSpPr/>
+          <p:nvPr/>
+        </p:nvSpPr>
+        <p:spPr>
+          <a:xfrm>
+            <a:off x="3854196" y="3703762"/>
+            <a:ext cx="64008" cy="64008"/>
+          </a:xfrm>
+          <a:prstGeom prst="ellipse">
+            <a:avLst/>
+          </a:prstGeom>
+          <a:solidFill>
+            <a:srgbClr val="6B2333"/>
+          </a:solidFill>
+          <a:ln w="12700">
+            <a:solidFill>
+              <a:srgbClr val="6B2333"/>
+            </a:solidFill>
+            <a:prstDash val="solid"/>
+          </a:ln>
+        </p:spPr>
+      </p:sp>
+      <p:sp>
+        <p:nvSpPr>
+          <p:cNvPr id="37" name="Shape 35"/>
+          <p:cNvSpPr/>
+          <p:nvPr/>
+        </p:nvSpPr>
+        <p:spPr>
+          <a:xfrm>
+            <a:off x="3854196" y="3786353"/>
+            <a:ext cx="64008" cy="64008"/>
+          </a:xfrm>
+          <a:prstGeom prst="ellipse">
+            <a:avLst/>
+          </a:prstGeom>
+          <a:solidFill>
+            <a:srgbClr val="6B2333"/>
+          </a:solidFill>
+          <a:ln w="12700">
+            <a:solidFill>
+              <a:srgbClr val="6B2333"/>
+            </a:solidFill>
+            <a:prstDash val="solid"/>
+          </a:ln>
+        </p:spPr>
+      </p:sp>
+      <p:sp>
+        <p:nvSpPr>
+          <p:cNvPr id="38" name="Shape 36"/>
+          <p:cNvSpPr/>
+          <p:nvPr/>
+        </p:nvSpPr>
+        <p:spPr>
+          <a:xfrm>
+            <a:off x="3854196" y="3868944"/>
+            <a:ext cx="64008" cy="64008"/>
+          </a:xfrm>
+          <a:prstGeom prst="ellipse">
+            <a:avLst/>
+          </a:prstGeom>
+          <a:solidFill>
+            <a:srgbClr val="6B2333"/>
+          </a:solidFill>
+          <a:ln w="12700">
+            <a:solidFill>
+              <a:srgbClr val="6B2333"/>
+            </a:solidFill>
+            <a:prstDash val="solid"/>
+          </a:ln>
+        </p:spPr>
+      </p:sp>
+      <p:sp>
+        <p:nvSpPr>
+          <p:cNvPr id="39" name="Shape 37"/>
+          <p:cNvSpPr/>
+          <p:nvPr/>
+        </p:nvSpPr>
+        <p:spPr>
+          <a:xfrm>
+            <a:off x="3854196" y="3951535"/>
+            <a:ext cx="64008" cy="64008"/>
+          </a:xfrm>
+          <a:prstGeom prst="ellipse">
+            <a:avLst/>
+          </a:prstGeom>
+          <a:solidFill>
+            <a:srgbClr val="6B2333"/>
+          </a:solidFill>
+          <a:ln w="12700">
+            <a:solidFill>
+              <a:srgbClr val="6B2333"/>
+            </a:solidFill>
+            <a:prstDash val="solid"/>
+          </a:ln>
+        </p:spPr>
+      </p:sp>
+      <p:sp>
+        <p:nvSpPr>
+          <p:cNvPr id="40" name="Shape 38"/>
+          <p:cNvSpPr/>
+          <p:nvPr/>
+        </p:nvSpPr>
+        <p:spPr>
+          <a:xfrm>
+            <a:off x="3854196" y="4034126"/>
+            <a:ext cx="64008" cy="64008"/>
+          </a:xfrm>
+          <a:prstGeom prst="ellipse">
+            <a:avLst/>
+          </a:prstGeom>
+          <a:solidFill>
+            <a:srgbClr val="6B2333"/>
+          </a:solidFill>
+          <a:ln w="12700">
+            <a:solidFill>
+              <a:srgbClr val="6B2333"/>
+            </a:solidFill>
+            <a:prstDash val="solid"/>
+          </a:ln>
+        </p:spPr>
+      </p:sp>
+      <p:sp>
+        <p:nvSpPr>
+          <p:cNvPr id="41" name="Shape 39"/>
+          <p:cNvSpPr/>
+          <p:nvPr/>
+        </p:nvSpPr>
+        <p:spPr>
+          <a:xfrm>
+            <a:off x="3854196" y="4116717"/>
+            <a:ext cx="64008" cy="64008"/>
+          </a:xfrm>
+          <a:prstGeom prst="ellipse">
+            <a:avLst/>
+          </a:prstGeom>
+          <a:solidFill>
+            <a:srgbClr val="6B2333"/>
+          </a:solidFill>
+          <a:ln w="12700">
+            <a:solidFill>
+              <a:srgbClr val="6B2333"/>
+            </a:solidFill>
+            <a:prstDash val="solid"/>
+          </a:ln>
+        </p:spPr>
+      </p:sp>
+      <p:sp>
+        <p:nvSpPr>
+          <p:cNvPr id="42" name="Shape 40"/>
+          <p:cNvSpPr/>
+          <p:nvPr/>
+        </p:nvSpPr>
+        <p:spPr>
+          <a:xfrm>
+            <a:off x="3854196" y="4199308"/>
+            <a:ext cx="64008" cy="64008"/>
+          </a:xfrm>
+          <a:prstGeom prst="ellipse">
+            <a:avLst/>
+          </a:prstGeom>
+          <a:solidFill>
+            <a:srgbClr val="6B2333"/>
+          </a:solidFill>
+          <a:ln w="12700">
+            <a:solidFill>
+              <a:srgbClr val="6B2333"/>
+            </a:solidFill>
+            <a:prstDash val="solid"/>
+          </a:ln>
+        </p:spPr>
+      </p:sp>
+      <p:sp>
+        <p:nvSpPr>
+          <p:cNvPr id="43" name="Shape 41"/>
+          <p:cNvSpPr/>
+          <p:nvPr/>
+        </p:nvSpPr>
+        <p:spPr>
+          <a:xfrm>
+            <a:off x="3854196" y="4281899"/>
+            <a:ext cx="64008" cy="64008"/>
+          </a:xfrm>
+          <a:prstGeom prst="ellipse">
+            <a:avLst/>
+          </a:prstGeom>
+          <a:solidFill>
+            <a:srgbClr val="6B2333"/>
+          </a:solidFill>
+          <a:ln w="12700">
+            <a:solidFill>
+              <a:srgbClr val="6B2333"/>
+            </a:solidFill>
+            <a:prstDash val="solid"/>
+          </a:ln>
+        </p:spPr>
+      </p:sp>
+      <p:sp>
+        <p:nvSpPr>
+          <p:cNvPr id="44" name="Shape 42"/>
+          <p:cNvSpPr/>
+          <p:nvPr/>
+        </p:nvSpPr>
+        <p:spPr>
+          <a:xfrm>
+            <a:off x="3854196" y="4364490"/>
+            <a:ext cx="64008" cy="64008"/>
+          </a:xfrm>
+          <a:prstGeom prst="ellipse">
+            <a:avLst/>
+          </a:prstGeom>
+          <a:solidFill>
+            <a:srgbClr val="6B2333"/>
+          </a:solidFill>
+          <a:ln w="12700">
+            <a:solidFill>
+              <a:srgbClr val="6B2333"/>
+            </a:solidFill>
+            <a:prstDash val="solid"/>
+          </a:ln>
+        </p:spPr>
+      </p:sp>
+      <p:sp>
+        <p:nvSpPr>
+          <p:cNvPr id="45" name="Shape 43"/>
+          <p:cNvSpPr/>
+          <p:nvPr/>
+        </p:nvSpPr>
+        <p:spPr>
+          <a:xfrm>
+            <a:off x="3854196" y="4447081"/>
+            <a:ext cx="64008" cy="64008"/>
+          </a:xfrm>
+          <a:prstGeom prst="ellipse">
+            <a:avLst/>
+          </a:prstGeom>
+          <a:solidFill>
+            <a:srgbClr val="6B2333"/>
+          </a:solidFill>
+          <a:ln w="12700">
+            <a:solidFill>
+              <a:srgbClr val="6B2333"/>
+            </a:solidFill>
+            <a:prstDash val="solid"/>
+          </a:ln>
+        </p:spPr>
+      </p:sp>
+      <p:sp>
+        <p:nvSpPr>
+          <p:cNvPr id="46" name="Shape 44"/>
+          <p:cNvSpPr/>
+          <p:nvPr/>
+        </p:nvSpPr>
+        <p:spPr>
+          <a:xfrm>
+            <a:off x="3854196" y="4529672"/>
+            <a:ext cx="64008" cy="64008"/>
+          </a:xfrm>
+          <a:prstGeom prst="ellipse">
+            <a:avLst/>
+          </a:prstGeom>
+          <a:solidFill>
+            <a:srgbClr val="6B2333"/>
+          </a:solidFill>
+          <a:ln w="12700">
+            <a:solidFill>
+              <a:srgbClr val="6B2333"/>
+            </a:solidFill>
+            <a:prstDash val="solid"/>
+          </a:ln>
+        </p:spPr>
+      </p:sp>
+      <p:sp>
+        <p:nvSpPr>
+          <p:cNvPr id="47" name="Shape 45"/>
+          <p:cNvSpPr/>
+          <p:nvPr/>
+        </p:nvSpPr>
+        <p:spPr>
+          <a:xfrm>
+            <a:off x="3854196" y="4612263"/>
+            <a:ext cx="64008" cy="64008"/>
+          </a:xfrm>
+          <a:prstGeom prst="ellipse">
+            <a:avLst/>
+          </a:prstGeom>
+          <a:solidFill>
+            <a:srgbClr val="6B2333"/>
+          </a:solidFill>
+          <a:ln w="12700">
+            <a:solidFill>
+              <a:srgbClr val="6B2333"/>
+            </a:solidFill>
+            <a:prstDash val="solid"/>
+          </a:ln>
+        </p:spPr>
+      </p:sp>
+      <p:sp>
+        <p:nvSpPr>
+          <p:cNvPr id="48" name="Shape 46"/>
+          <p:cNvSpPr/>
+          <p:nvPr/>
+        </p:nvSpPr>
+        <p:spPr>
+          <a:xfrm>
+            <a:off x="3854196" y="4694854"/>
+            <a:ext cx="64008" cy="64008"/>
+          </a:xfrm>
+          <a:prstGeom prst="ellipse">
+            <a:avLst/>
+          </a:prstGeom>
+          <a:solidFill>
+            <a:srgbClr val="6B2333"/>
+          </a:solidFill>
+          <a:ln w="12700">
+            <a:solidFill>
+              <a:srgbClr val="6B2333"/>
+            </a:solidFill>
+            <a:prstDash val="solid"/>
+          </a:ln>
+        </p:spPr>
+      </p:sp>
+      <p:sp>
+        <p:nvSpPr>
+          <p:cNvPr id="49" name="Shape 47"/>
+          <p:cNvSpPr/>
+          <p:nvPr/>
+        </p:nvSpPr>
+        <p:spPr>
+          <a:xfrm>
+            <a:off x="3854196" y="4777445"/>
+            <a:ext cx="64008" cy="64008"/>
+          </a:xfrm>
+          <a:prstGeom prst="ellipse">
+            <a:avLst/>
+          </a:prstGeom>
+          <a:solidFill>
+            <a:srgbClr val="6B2333"/>
+          </a:solidFill>
+          <a:ln w="12700">
+            <a:solidFill>
+              <a:srgbClr val="6B2333"/>
+            </a:solidFill>
+            <a:prstDash val="solid"/>
+          </a:ln>
+        </p:spPr>
+      </p:sp>
+      <p:sp>
+        <p:nvSpPr>
+          <p:cNvPr id="50" name="Shape 48"/>
+          <p:cNvSpPr/>
+          <p:nvPr/>
+        </p:nvSpPr>
+        <p:spPr>
+          <a:xfrm>
+            <a:off x="3854196" y="4860036"/>
+            <a:ext cx="64008" cy="64008"/>
+          </a:xfrm>
+          <a:prstGeom prst="ellipse">
+            <a:avLst/>
+          </a:prstGeom>
+          <a:solidFill>
+            <a:srgbClr val="6B2333"/>
+          </a:solidFill>
+          <a:ln w="12700">
+            <a:solidFill>
+              <a:srgbClr val="6B2333"/>
+            </a:solidFill>
+            <a:prstDash val="solid"/>
+          </a:ln>
+        </p:spPr>
+      </p:sp>
+      <p:sp>
+        <p:nvSpPr>
+          <p:cNvPr id="51" name="Text 49"/>
+          <p:cNvSpPr/>
+          <p:nvPr/>
+        </p:nvSpPr>
+        <p:spPr>
+          <a:xfrm>
+            <a:off x="2880360" y="5029200"/>
+            <a:ext cx="2011680" cy="320040"/>
+          </a:xfrm>
+          <a:prstGeom prst="rect">
+            <a:avLst/>
+          </a:prstGeom>
+          <a:noFill/>
+          <a:ln/>
+        </p:spPr>
+        <p:txBody>
+          <a:bodyPr wrap="square" lIns="0" tIns="0" rIns="0" bIns="0" rtlCol="0" anchor="ctr"/>
+          <a:lstStyle/>
+          <a:p>
+            <a:pPr algn="ctr" indent="0" marL="0">
+              <a:buNone/>
+            </a:pPr>
+            <a:r>
+              <a:rPr lang="en-US" sz="1400" b="1" dirty="0">
+                <a:solidFill>
+                  <a:srgbClr val="2B211A"/>
+                </a:solidFill>
+                <a:latin typeface="Cambria" pitchFamily="34" charset="0"/>
+                <a:ea typeface="Cambria" pitchFamily="34" charset="-122"/>
+                <a:cs typeface="Cambria" pitchFamily="34" charset="-120"/>
+              </a:rPr>
+              <a:t>1D CNN → attn</a:t>
+            </a:r>
+            <a:endParaRPr lang="en-US" sz="1400" dirty="0"/>
+          </a:p>
+        </p:txBody>
+      </p:sp>
+      <p:sp>
+        <p:nvSpPr>
+          <p:cNvPr id="52" name="Text 50"/>
+          <p:cNvSpPr/>
+          <p:nvPr/>
+        </p:nvSpPr>
+        <p:spPr>
+          <a:xfrm>
+            <a:off x="2880360" y="5349240"/>
+            <a:ext cx="2011680" cy="274320"/>
+          </a:xfrm>
+          <a:prstGeom prst="rect">
+            <a:avLst/>
+          </a:prstGeom>
+          <a:noFill/>
+          <a:ln/>
+        </p:spPr>
+        <p:txBody>
+          <a:bodyPr wrap="square" lIns="0" tIns="0" rIns="0" bIns="0" rtlCol="0" anchor="ctr"/>
+          <a:lstStyle/>
+          <a:p>
+            <a:pPr algn="ctr" indent="0" marL="0">
+              <a:buNone/>
+            </a:pPr>
+            <a:r>
+              <a:rPr lang="en-US" sz="1200" dirty="0">
+                <a:solidFill>
+                  <a:srgbClr val="7A6E5A"/>
+                </a:solidFill>
+                <a:latin typeface="Calibri" pitchFamily="34" charset="0"/>
+                <a:ea typeface="Calibri" pitchFamily="34" charset="-122"/>
+                <a:cs typeface="Calibri" pitchFamily="34" charset="-120"/>
+              </a:rPr>
+              <a:t>32</a:t>
+            </a:r>
+            <a:endParaRPr lang="en-US" sz="1200" dirty="0"/>
+          </a:p>
+        </p:txBody>
+      </p:sp>
+      <p:sp>
+        <p:nvSpPr>
+          <p:cNvPr id="53" name="Shape 51"/>
+          <p:cNvSpPr/>
+          <p:nvPr/>
+        </p:nvSpPr>
+        <p:spPr>
+          <a:xfrm>
+            <a:off x="6003036" y="2299716"/>
+            <a:ext cx="64008" cy="64008"/>
+          </a:xfrm>
+          <a:prstGeom prst="ellipse">
+            <a:avLst/>
+          </a:prstGeom>
+          <a:solidFill>
+            <a:srgbClr val="6B2333"/>
+          </a:solidFill>
+          <a:ln w="12700">
+            <a:solidFill>
+              <a:srgbClr val="6B2333"/>
+            </a:solidFill>
+            <a:prstDash val="solid"/>
+          </a:ln>
+        </p:spPr>
+      </p:sp>
+      <p:sp>
+        <p:nvSpPr>
+          <p:cNvPr id="54" name="Shape 52"/>
+          <p:cNvSpPr/>
+          <p:nvPr/>
+        </p:nvSpPr>
+        <p:spPr>
+          <a:xfrm>
+            <a:off x="6003036" y="2375020"/>
+            <a:ext cx="64008" cy="64008"/>
+          </a:xfrm>
+          <a:prstGeom prst="ellipse">
+            <a:avLst/>
+          </a:prstGeom>
+          <a:solidFill>
+            <a:srgbClr val="6B2333"/>
+          </a:solidFill>
+          <a:ln w="12700">
+            <a:solidFill>
+              <a:srgbClr val="6B2333"/>
+            </a:solidFill>
+            <a:prstDash val="solid"/>
+          </a:ln>
+        </p:spPr>
+      </p:sp>
+      <p:sp>
+        <p:nvSpPr>
+          <p:cNvPr id="55" name="Shape 53"/>
+          <p:cNvSpPr/>
+          <p:nvPr/>
+        </p:nvSpPr>
+        <p:spPr>
+          <a:xfrm>
+            <a:off x="6003036" y="2450323"/>
+            <a:ext cx="64008" cy="64008"/>
+          </a:xfrm>
+          <a:prstGeom prst="ellipse">
+            <a:avLst/>
+          </a:prstGeom>
+          <a:solidFill>
+            <a:srgbClr val="6B2333"/>
+          </a:solidFill>
+          <a:ln w="12700">
+            <a:solidFill>
+              <a:srgbClr val="6B2333"/>
+            </a:solidFill>
+            <a:prstDash val="solid"/>
+          </a:ln>
+        </p:spPr>
+      </p:sp>
+      <p:sp>
+        <p:nvSpPr>
+          <p:cNvPr id="56" name="Shape 54"/>
+          <p:cNvSpPr/>
+          <p:nvPr/>
+        </p:nvSpPr>
+        <p:spPr>
+          <a:xfrm>
+            <a:off x="6003036" y="2525627"/>
+            <a:ext cx="64008" cy="64008"/>
+          </a:xfrm>
+          <a:prstGeom prst="ellipse">
+            <a:avLst/>
+          </a:prstGeom>
+          <a:solidFill>
+            <a:srgbClr val="6B2333"/>
+          </a:solidFill>
+          <a:ln w="12700">
+            <a:solidFill>
+              <a:srgbClr val="6B2333"/>
+            </a:solidFill>
+            <a:prstDash val="solid"/>
+          </a:ln>
+        </p:spPr>
+      </p:sp>
+      <p:sp>
+        <p:nvSpPr>
+          <p:cNvPr id="57" name="Shape 55"/>
+          <p:cNvSpPr/>
+          <p:nvPr/>
+        </p:nvSpPr>
+        <p:spPr>
+          <a:xfrm>
+            <a:off x="6003036" y="2600930"/>
+            <a:ext cx="64008" cy="64008"/>
+          </a:xfrm>
+          <a:prstGeom prst="ellipse">
+            <a:avLst/>
+          </a:prstGeom>
+          <a:solidFill>
+            <a:srgbClr val="6B2333"/>
+          </a:solidFill>
+          <a:ln w="12700">
+            <a:solidFill>
+              <a:srgbClr val="6B2333"/>
+            </a:solidFill>
+            <a:prstDash val="solid"/>
+          </a:ln>
+        </p:spPr>
+      </p:sp>
+      <p:sp>
+        <p:nvSpPr>
+          <p:cNvPr id="58" name="Shape 56"/>
+          <p:cNvSpPr/>
+          <p:nvPr/>
+        </p:nvSpPr>
+        <p:spPr>
+          <a:xfrm>
+            <a:off x="6003036" y="2676234"/>
+            <a:ext cx="64008" cy="64008"/>
+          </a:xfrm>
+          <a:prstGeom prst="ellipse">
+            <a:avLst/>
+          </a:prstGeom>
+          <a:solidFill>
+            <a:srgbClr val="6B2333"/>
+          </a:solidFill>
+          <a:ln w="12700">
+            <a:solidFill>
+              <a:srgbClr val="6B2333"/>
+            </a:solidFill>
+            <a:prstDash val="solid"/>
+          </a:ln>
+        </p:spPr>
+      </p:sp>
+      <p:sp>
+        <p:nvSpPr>
+          <p:cNvPr id="59" name="Shape 57"/>
+          <p:cNvSpPr/>
+          <p:nvPr/>
+        </p:nvSpPr>
+        <p:spPr>
+          <a:xfrm>
+            <a:off x="6003036" y="2751537"/>
+            <a:ext cx="64008" cy="64008"/>
+          </a:xfrm>
+          <a:prstGeom prst="ellipse">
+            <a:avLst/>
+          </a:prstGeom>
+          <a:solidFill>
+            <a:srgbClr val="6B2333"/>
+          </a:solidFill>
+          <a:ln w="12700">
+            <a:solidFill>
+              <a:srgbClr val="6B2333"/>
+            </a:solidFill>
+            <a:prstDash val="solid"/>
+          </a:ln>
+        </p:spPr>
+      </p:sp>
+      <p:sp>
+        <p:nvSpPr>
+          <p:cNvPr id="60" name="Shape 58"/>
+          <p:cNvSpPr/>
+          <p:nvPr/>
+        </p:nvSpPr>
+        <p:spPr>
+          <a:xfrm>
+            <a:off x="6003036" y="2826841"/>
+            <a:ext cx="64008" cy="64008"/>
+          </a:xfrm>
+          <a:prstGeom prst="ellipse">
+            <a:avLst/>
+          </a:prstGeom>
+          <a:solidFill>
+            <a:srgbClr val="6B2333"/>
+          </a:solidFill>
+          <a:ln w="12700">
+            <a:solidFill>
+              <a:srgbClr val="6B2333"/>
+            </a:solidFill>
+            <a:prstDash val="solid"/>
+          </a:ln>
+        </p:spPr>
+      </p:sp>
+      <p:sp>
+        <p:nvSpPr>
+          <p:cNvPr id="61" name="Shape 59"/>
+          <p:cNvSpPr/>
+          <p:nvPr/>
+        </p:nvSpPr>
+        <p:spPr>
+          <a:xfrm>
+            <a:off x="6003036" y="2902144"/>
+            <a:ext cx="64008" cy="64008"/>
+          </a:xfrm>
+          <a:prstGeom prst="ellipse">
+            <a:avLst/>
+          </a:prstGeom>
+          <a:solidFill>
+            <a:srgbClr val="6B2333"/>
+          </a:solidFill>
+          <a:ln w="12700">
+            <a:solidFill>
+              <a:srgbClr val="6B2333"/>
+            </a:solidFill>
+            <a:prstDash val="solid"/>
+          </a:ln>
+        </p:spPr>
+      </p:sp>
+      <p:sp>
+        <p:nvSpPr>
+          <p:cNvPr id="62" name="Shape 60"/>
+          <p:cNvSpPr/>
+          <p:nvPr/>
+        </p:nvSpPr>
+        <p:spPr>
+          <a:xfrm>
+            <a:off x="6003036" y="2977448"/>
+            <a:ext cx="64008" cy="64008"/>
+          </a:xfrm>
+          <a:prstGeom prst="ellipse">
+            <a:avLst/>
+          </a:prstGeom>
+          <a:solidFill>
+            <a:srgbClr val="6B2333"/>
+          </a:solidFill>
+          <a:ln w="12700">
+            <a:solidFill>
+              <a:srgbClr val="6B2333"/>
+            </a:solidFill>
+            <a:prstDash val="solid"/>
+          </a:ln>
+        </p:spPr>
+      </p:sp>
+      <p:sp>
+        <p:nvSpPr>
+          <p:cNvPr id="63" name="Shape 61"/>
+          <p:cNvSpPr/>
+          <p:nvPr/>
+        </p:nvSpPr>
+        <p:spPr>
+          <a:xfrm>
+            <a:off x="6003036" y="3052751"/>
+            <a:ext cx="64008" cy="64008"/>
+          </a:xfrm>
+          <a:prstGeom prst="ellipse">
+            <a:avLst/>
+          </a:prstGeom>
+          <a:solidFill>
+            <a:srgbClr val="6B2333"/>
+          </a:solidFill>
+          <a:ln w="12700">
+            <a:solidFill>
+              <a:srgbClr val="6B2333"/>
+            </a:solidFill>
+            <a:prstDash val="solid"/>
+          </a:ln>
+        </p:spPr>
+      </p:sp>
+      <p:sp>
+        <p:nvSpPr>
+          <p:cNvPr id="64" name="Shape 62"/>
+          <p:cNvSpPr/>
+          <p:nvPr/>
+        </p:nvSpPr>
+        <p:spPr>
+          <a:xfrm>
+            <a:off x="6003036" y="3128055"/>
+            <a:ext cx="64008" cy="64008"/>
+          </a:xfrm>
+          <a:prstGeom prst="ellipse">
+            <a:avLst/>
+          </a:prstGeom>
+          <a:solidFill>
+            <a:srgbClr val="6B2333"/>
+          </a:solidFill>
+          <a:ln w="12700">
+            <a:solidFill>
+              <a:srgbClr val="6B2333"/>
+            </a:solidFill>
+            <a:prstDash val="solid"/>
+          </a:ln>
+        </p:spPr>
+      </p:sp>
+      <p:sp>
+        <p:nvSpPr>
+          <p:cNvPr id="65" name="Shape 63"/>
+          <p:cNvSpPr/>
+          <p:nvPr/>
+        </p:nvSpPr>
+        <p:spPr>
+          <a:xfrm>
+            <a:off x="6003036" y="3203358"/>
+            <a:ext cx="64008" cy="64008"/>
+          </a:xfrm>
+          <a:prstGeom prst="ellipse">
+            <a:avLst/>
+          </a:prstGeom>
+          <a:solidFill>
+            <a:srgbClr val="6B2333"/>
+          </a:solidFill>
+          <a:ln w="12700">
+            <a:solidFill>
+              <a:srgbClr val="6B2333"/>
+            </a:solidFill>
+            <a:prstDash val="solid"/>
+          </a:ln>
+        </p:spPr>
+      </p:sp>
+      <p:sp>
+        <p:nvSpPr>
+          <p:cNvPr id="66" name="Shape 64"/>
+          <p:cNvSpPr/>
+          <p:nvPr/>
+        </p:nvSpPr>
+        <p:spPr>
+          <a:xfrm>
+            <a:off x="6003036" y="3278662"/>
+            <a:ext cx="64008" cy="64008"/>
+          </a:xfrm>
+          <a:prstGeom prst="ellipse">
+            <a:avLst/>
+          </a:prstGeom>
+          <a:solidFill>
+            <a:srgbClr val="6B2333"/>
+          </a:solidFill>
+          <a:ln w="12700">
+            <a:solidFill>
+              <a:srgbClr val="6B2333"/>
+            </a:solidFill>
+            <a:prstDash val="solid"/>
+          </a:ln>
+        </p:spPr>
+      </p:sp>
+      <p:sp>
+        <p:nvSpPr>
+          <p:cNvPr id="67" name="Shape 65"/>
+          <p:cNvSpPr/>
+          <p:nvPr/>
+        </p:nvSpPr>
+        <p:spPr>
+          <a:xfrm>
+            <a:off x="6003036" y="3353965"/>
+            <a:ext cx="64008" cy="64008"/>
+          </a:xfrm>
+          <a:prstGeom prst="ellipse">
+            <a:avLst/>
+          </a:prstGeom>
+          <a:solidFill>
+            <a:srgbClr val="6B2333"/>
+          </a:solidFill>
+          <a:ln w="12700">
+            <a:solidFill>
+              <a:srgbClr val="6B2333"/>
+            </a:solidFill>
+            <a:prstDash val="solid"/>
+          </a:ln>
+        </p:spPr>
+      </p:sp>
+      <p:sp>
+        <p:nvSpPr>
+          <p:cNvPr id="68" name="Shape 66"/>
+          <p:cNvSpPr/>
+          <p:nvPr/>
+        </p:nvSpPr>
+        <p:spPr>
+          <a:xfrm>
+            <a:off x="6003036" y="3429269"/>
+            <a:ext cx="64008" cy="64008"/>
+          </a:xfrm>
+          <a:prstGeom prst="ellipse">
+            <a:avLst/>
+          </a:prstGeom>
+          <a:solidFill>
+            <a:srgbClr val="6B2333"/>
+          </a:solidFill>
+          <a:ln w="12700">
+            <a:solidFill>
+              <a:srgbClr val="6B2333"/>
+            </a:solidFill>
+            <a:prstDash val="solid"/>
+          </a:ln>
+        </p:spPr>
+      </p:sp>
+      <p:sp>
+        <p:nvSpPr>
+          <p:cNvPr id="69" name="Shape 67"/>
+          <p:cNvSpPr/>
+          <p:nvPr/>
+        </p:nvSpPr>
+        <p:spPr>
+          <a:xfrm>
+            <a:off x="6003036" y="3504572"/>
+            <a:ext cx="64008" cy="64008"/>
+          </a:xfrm>
+          <a:prstGeom prst="ellipse">
+            <a:avLst/>
+          </a:prstGeom>
+          <a:solidFill>
+            <a:srgbClr val="6B2333"/>
+          </a:solidFill>
+          <a:ln w="12700">
+            <a:solidFill>
+              <a:srgbClr val="6B2333"/>
+            </a:solidFill>
+            <a:prstDash val="solid"/>
+          </a:ln>
+        </p:spPr>
+      </p:sp>
+      <p:sp>
+        <p:nvSpPr>
+          <p:cNvPr id="70" name="Shape 68"/>
+          <p:cNvSpPr/>
+          <p:nvPr/>
+        </p:nvSpPr>
+        <p:spPr>
+          <a:xfrm>
+            <a:off x="6003036" y="3579876"/>
+            <a:ext cx="64008" cy="64008"/>
+          </a:xfrm>
+          <a:prstGeom prst="ellipse">
+            <a:avLst/>
+          </a:prstGeom>
+          <a:solidFill>
+            <a:srgbClr val="6B2333"/>
+          </a:solidFill>
+          <a:ln w="12700">
+            <a:solidFill>
+              <a:srgbClr val="6B2333"/>
+            </a:solidFill>
+            <a:prstDash val="solid"/>
+          </a:ln>
+        </p:spPr>
+      </p:sp>
+      <p:sp>
+        <p:nvSpPr>
+          <p:cNvPr id="71" name="Shape 69"/>
+          <p:cNvSpPr/>
+          <p:nvPr/>
+        </p:nvSpPr>
+        <p:spPr>
+          <a:xfrm>
+            <a:off x="6003036" y="3655180"/>
+            <a:ext cx="64008" cy="64008"/>
+          </a:xfrm>
+          <a:prstGeom prst="ellipse">
+            <a:avLst/>
+          </a:prstGeom>
+          <a:solidFill>
+            <a:srgbClr val="6B2333"/>
+          </a:solidFill>
+          <a:ln w="12700">
+            <a:solidFill>
+              <a:srgbClr val="6B2333"/>
+            </a:solidFill>
+            <a:prstDash val="solid"/>
+          </a:ln>
+        </p:spPr>
+      </p:sp>
+      <p:sp>
+        <p:nvSpPr>
+          <p:cNvPr id="72" name="Shape 70"/>
+          <p:cNvSpPr/>
+          <p:nvPr/>
+        </p:nvSpPr>
+        <p:spPr>
+          <a:xfrm>
+            <a:off x="6003036" y="3730483"/>
+            <a:ext cx="64008" cy="64008"/>
+          </a:xfrm>
+          <a:prstGeom prst="ellipse">
+            <a:avLst/>
+          </a:prstGeom>
+          <a:solidFill>
+            <a:srgbClr val="6B2333"/>
+          </a:solidFill>
+          <a:ln w="12700">
+            <a:solidFill>
+              <a:srgbClr val="6B2333"/>
+            </a:solidFill>
+            <a:prstDash val="solid"/>
+          </a:ln>
+        </p:spPr>
+      </p:sp>
+      <p:sp>
+        <p:nvSpPr>
+          <p:cNvPr id="73" name="Shape 71"/>
+          <p:cNvSpPr/>
+          <p:nvPr/>
+        </p:nvSpPr>
+        <p:spPr>
+          <a:xfrm>
+            <a:off x="6003036" y="3805787"/>
+            <a:ext cx="64008" cy="64008"/>
+          </a:xfrm>
+          <a:prstGeom prst="ellipse">
+            <a:avLst/>
+          </a:prstGeom>
+          <a:solidFill>
+            <a:srgbClr val="6B2333"/>
+          </a:solidFill>
+          <a:ln w="12700">
+            <a:solidFill>
+              <a:srgbClr val="6B2333"/>
+            </a:solidFill>
+            <a:prstDash val="solid"/>
+          </a:ln>
+        </p:spPr>
+      </p:sp>
+      <p:sp>
+        <p:nvSpPr>
+          <p:cNvPr id="74" name="Shape 72"/>
+          <p:cNvSpPr/>
+          <p:nvPr/>
+        </p:nvSpPr>
+        <p:spPr>
+          <a:xfrm>
+            <a:off x="6003036" y="3881090"/>
+            <a:ext cx="64008" cy="64008"/>
+          </a:xfrm>
+          <a:prstGeom prst="ellipse">
+            <a:avLst/>
+          </a:prstGeom>
+          <a:solidFill>
+            <a:srgbClr val="6B2333"/>
+          </a:solidFill>
+          <a:ln w="12700">
+            <a:solidFill>
+              <a:srgbClr val="6B2333"/>
+            </a:solidFill>
+            <a:prstDash val="solid"/>
+          </a:ln>
+        </p:spPr>
+      </p:sp>
+      <p:sp>
+        <p:nvSpPr>
+          <p:cNvPr id="75" name="Shape 73"/>
+          <p:cNvSpPr/>
+          <p:nvPr/>
+        </p:nvSpPr>
+        <p:spPr>
+          <a:xfrm>
+            <a:off x="6003036" y="3956394"/>
+            <a:ext cx="64008" cy="64008"/>
+          </a:xfrm>
+          <a:prstGeom prst="ellipse">
+            <a:avLst/>
+          </a:prstGeom>
+          <a:solidFill>
+            <a:srgbClr val="6B2333"/>
+          </a:solidFill>
+          <a:ln w="12700">
+            <a:solidFill>
+              <a:srgbClr val="6B2333"/>
+            </a:solidFill>
+            <a:prstDash val="solid"/>
+          </a:ln>
+        </p:spPr>
+      </p:sp>
+      <p:sp>
+        <p:nvSpPr>
+          <p:cNvPr id="76" name="Shape 74"/>
+          <p:cNvSpPr/>
+          <p:nvPr/>
+        </p:nvSpPr>
+        <p:spPr>
+          <a:xfrm>
+            <a:off x="6003036" y="4031697"/>
+            <a:ext cx="64008" cy="64008"/>
+          </a:xfrm>
+          <a:prstGeom prst="ellipse">
+            <a:avLst/>
+          </a:prstGeom>
+          <a:solidFill>
+            <a:srgbClr val="6B2333"/>
+          </a:solidFill>
+          <a:ln w="12700">
+            <a:solidFill>
+              <a:srgbClr val="6B2333"/>
+            </a:solidFill>
+            <a:prstDash val="solid"/>
+          </a:ln>
+        </p:spPr>
+      </p:sp>
+      <p:sp>
+        <p:nvSpPr>
+          <p:cNvPr id="77" name="Shape 75"/>
+          <p:cNvSpPr/>
+          <p:nvPr/>
+        </p:nvSpPr>
+        <p:spPr>
+          <a:xfrm>
+            <a:off x="6003036" y="4107001"/>
+            <a:ext cx="64008" cy="64008"/>
+          </a:xfrm>
+          <a:prstGeom prst="ellipse">
+            <a:avLst/>
+          </a:prstGeom>
+          <a:solidFill>
+            <a:srgbClr val="6B2333"/>
+          </a:solidFill>
+          <a:ln w="12700">
+            <a:solidFill>
+              <a:srgbClr val="6B2333"/>
+            </a:solidFill>
+            <a:prstDash val="solid"/>
+          </a:ln>
+        </p:spPr>
+      </p:sp>
+      <p:sp>
+        <p:nvSpPr>
+          <p:cNvPr id="78" name="Shape 76"/>
+          <p:cNvSpPr/>
+          <p:nvPr/>
+        </p:nvSpPr>
+        <p:spPr>
+          <a:xfrm>
+            <a:off x="6003036" y="4182304"/>
+            <a:ext cx="64008" cy="64008"/>
+          </a:xfrm>
+          <a:prstGeom prst="ellipse">
+            <a:avLst/>
+          </a:prstGeom>
+          <a:solidFill>
+            <a:srgbClr val="6B2333"/>
+          </a:solidFill>
+          <a:ln w="12700">
+            <a:solidFill>
+              <a:srgbClr val="6B2333"/>
+            </a:solidFill>
+            <a:prstDash val="solid"/>
+          </a:ln>
+        </p:spPr>
+      </p:sp>
+      <p:sp>
+        <p:nvSpPr>
+          <p:cNvPr id="79" name="Shape 77"/>
+          <p:cNvSpPr/>
+          <p:nvPr/>
+        </p:nvSpPr>
+        <p:spPr>
+          <a:xfrm>
+            <a:off x="6003036" y="4257608"/>
+            <a:ext cx="64008" cy="64008"/>
+          </a:xfrm>
+          <a:prstGeom prst="ellipse">
+            <a:avLst/>
+          </a:prstGeom>
+          <a:solidFill>
+            <a:srgbClr val="6B2333"/>
+          </a:solidFill>
+          <a:ln w="12700">
+            <a:solidFill>
+              <a:srgbClr val="6B2333"/>
+            </a:solidFill>
+            <a:prstDash val="solid"/>
+          </a:ln>
+        </p:spPr>
+      </p:sp>
+      <p:sp>
+        <p:nvSpPr>
+          <p:cNvPr id="80" name="Shape 78"/>
+          <p:cNvSpPr/>
+          <p:nvPr/>
+        </p:nvSpPr>
+        <p:spPr>
+          <a:xfrm>
+            <a:off x="6003036" y="4332911"/>
+            <a:ext cx="64008" cy="64008"/>
+          </a:xfrm>
+          <a:prstGeom prst="ellipse">
+            <a:avLst/>
+          </a:prstGeom>
+          <a:solidFill>
+            <a:srgbClr val="6B2333"/>
+          </a:solidFill>
+          <a:ln w="12700">
+            <a:solidFill>
+              <a:srgbClr val="6B2333"/>
+            </a:solidFill>
+            <a:prstDash val="solid"/>
+          </a:ln>
+        </p:spPr>
+      </p:sp>
+      <p:sp>
+        <p:nvSpPr>
+          <p:cNvPr id="81" name="Shape 79"/>
+          <p:cNvSpPr/>
+          <p:nvPr/>
+        </p:nvSpPr>
+        <p:spPr>
+          <a:xfrm>
+            <a:off x="6003036" y="4408215"/>
+            <a:ext cx="64008" cy="64008"/>
+          </a:xfrm>
+          <a:prstGeom prst="ellipse">
+            <a:avLst/>
+          </a:prstGeom>
+          <a:solidFill>
+            <a:srgbClr val="6B2333"/>
+          </a:solidFill>
+          <a:ln w="12700">
+            <a:solidFill>
+              <a:srgbClr val="6B2333"/>
+            </a:solidFill>
+            <a:prstDash val="solid"/>
+          </a:ln>
+        </p:spPr>
+      </p:sp>
+      <p:sp>
+        <p:nvSpPr>
+          <p:cNvPr id="82" name="Shape 80"/>
+          <p:cNvSpPr/>
+          <p:nvPr/>
+        </p:nvSpPr>
+        <p:spPr>
+          <a:xfrm>
+            <a:off x="6003036" y="4483518"/>
+            <a:ext cx="64008" cy="64008"/>
+          </a:xfrm>
+          <a:prstGeom prst="ellipse">
+            <a:avLst/>
+          </a:prstGeom>
+          <a:solidFill>
+            <a:srgbClr val="6B2333"/>
+          </a:solidFill>
+          <a:ln w="12700">
+            <a:solidFill>
+              <a:srgbClr val="6B2333"/>
+            </a:solidFill>
+            <a:prstDash val="solid"/>
+          </a:ln>
+        </p:spPr>
+      </p:sp>
+      <p:sp>
+        <p:nvSpPr>
+          <p:cNvPr id="83" name="Shape 81"/>
+          <p:cNvSpPr/>
+          <p:nvPr/>
+        </p:nvSpPr>
+        <p:spPr>
+          <a:xfrm>
+            <a:off x="6003036" y="4558822"/>
+            <a:ext cx="64008" cy="64008"/>
+          </a:xfrm>
+          <a:prstGeom prst="ellipse">
+            <a:avLst/>
+          </a:prstGeom>
+          <a:solidFill>
+            <a:srgbClr val="6B2333"/>
+          </a:solidFill>
+          <a:ln w="12700">
+            <a:solidFill>
+              <a:srgbClr val="6B2333"/>
+            </a:solidFill>
+            <a:prstDash val="solid"/>
+          </a:ln>
+        </p:spPr>
+      </p:sp>
+      <p:sp>
+        <p:nvSpPr>
+          <p:cNvPr id="84" name="Shape 82"/>
+          <p:cNvSpPr/>
+          <p:nvPr/>
+        </p:nvSpPr>
+        <p:spPr>
+          <a:xfrm>
+            <a:off x="6003036" y="4634125"/>
+            <a:ext cx="64008" cy="64008"/>
+          </a:xfrm>
+          <a:prstGeom prst="ellipse">
+            <a:avLst/>
+          </a:prstGeom>
+          <a:solidFill>
+            <a:srgbClr val="6B2333"/>
+          </a:solidFill>
+          <a:ln w="12700">
+            <a:solidFill>
+              <a:srgbClr val="6B2333"/>
+            </a:solidFill>
+            <a:prstDash val="solid"/>
+          </a:ln>
+        </p:spPr>
+      </p:sp>
+      <p:sp>
+        <p:nvSpPr>
+          <p:cNvPr id="85" name="Shape 83"/>
+          <p:cNvSpPr/>
+          <p:nvPr/>
+        </p:nvSpPr>
+        <p:spPr>
+          <a:xfrm>
+            <a:off x="6003036" y="4709429"/>
+            <a:ext cx="64008" cy="64008"/>
+          </a:xfrm>
+          <a:prstGeom prst="ellipse">
+            <a:avLst/>
+          </a:prstGeom>
+          <a:solidFill>
+            <a:srgbClr val="A2823E"/>
+          </a:solidFill>
+          <a:ln w="12700">
+            <a:solidFill>
+              <a:srgbClr val="A2823E"/>
+            </a:solidFill>
+            <a:prstDash val="solid"/>
+          </a:ln>
+        </p:spPr>
+      </p:sp>
+      <p:sp>
+        <p:nvSpPr>
+          <p:cNvPr id="86" name="Shape 84"/>
+          <p:cNvSpPr/>
+          <p:nvPr/>
+        </p:nvSpPr>
+        <p:spPr>
+          <a:xfrm>
+            <a:off x="6003036" y="4784732"/>
+            <a:ext cx="64008" cy="64008"/>
+          </a:xfrm>
+          <a:prstGeom prst="ellipse">
+            <a:avLst/>
+          </a:prstGeom>
+          <a:solidFill>
+            <a:srgbClr val="A2823E"/>
+          </a:solidFill>
+          <a:ln w="12700">
+            <a:solidFill>
+              <a:srgbClr val="A2823E"/>
+            </a:solidFill>
+            <a:prstDash val="solid"/>
+          </a:ln>
+        </p:spPr>
+      </p:sp>
+      <p:sp>
+        <p:nvSpPr>
+          <p:cNvPr id="87" name="Shape 85"/>
+          <p:cNvSpPr/>
+          <p:nvPr/>
+        </p:nvSpPr>
+        <p:spPr>
+          <a:xfrm>
+            <a:off x="6003036" y="4860036"/>
+            <a:ext cx="64008" cy="64008"/>
+          </a:xfrm>
+          <a:prstGeom prst="ellipse">
+            <a:avLst/>
+          </a:prstGeom>
+          <a:solidFill>
+            <a:srgbClr val="A2823E"/>
+          </a:solidFill>
+          <a:ln w="12700">
+            <a:solidFill>
+              <a:srgbClr val="A2823E"/>
+            </a:solidFill>
+            <a:prstDash val="solid"/>
+          </a:ln>
+        </p:spPr>
+      </p:sp>
+      <p:sp>
+        <p:nvSpPr>
+          <p:cNvPr id="88" name="Text 86"/>
+          <p:cNvSpPr/>
+          <p:nvPr/>
+        </p:nvSpPr>
+        <p:spPr>
+          <a:xfrm>
+            <a:off x="5029200" y="5029200"/>
+            <a:ext cx="2011680" cy="320040"/>
+          </a:xfrm>
+          <a:prstGeom prst="rect">
+            <a:avLst/>
+          </a:prstGeom>
+          <a:noFill/>
+          <a:ln/>
+        </p:spPr>
+        <p:txBody>
+          <a:bodyPr wrap="square" lIns="0" tIns="0" rIns="0" bIns="0" rtlCol="0" anchor="ctr"/>
+          <a:lstStyle/>
+          <a:p>
+            <a:pPr algn="ctr" indent="0" marL="0">
+              <a:buNone/>
+            </a:pPr>
+            <a:r>
+              <a:rPr lang="en-US" sz="1400" b="1" dirty="0">
+                <a:solidFill>
+                  <a:srgbClr val="2B211A"/>
+                </a:solidFill>
+                <a:latin typeface="Cambria" pitchFamily="34" charset="0"/>
+                <a:ea typeface="Cambria" pitchFamily="34" charset="-122"/>
+                <a:cs typeface="Cambria" pitchFamily="34" charset="-120"/>
+              </a:rPr>
+              <a:t>+ DoE</a:t>
+            </a:r>
+            <a:endParaRPr lang="en-US" sz="1400" dirty="0"/>
+          </a:p>
+        </p:txBody>
+      </p:sp>
+      <p:sp>
+        <p:nvSpPr>
+          <p:cNvPr id="89" name="Text 87"/>
+          <p:cNvSpPr/>
+          <p:nvPr/>
+        </p:nvSpPr>
+        <p:spPr>
+          <a:xfrm>
+            <a:off x="5029200" y="5349240"/>
+            <a:ext cx="2011680" cy="274320"/>
+          </a:xfrm>
+          <a:prstGeom prst="rect">
+            <a:avLst/>
+          </a:prstGeom>
+          <a:noFill/>
+          <a:ln/>
+        </p:spPr>
+        <p:txBody>
+          <a:bodyPr wrap="square" lIns="0" tIns="0" rIns="0" bIns="0" rtlCol="0" anchor="ctr"/>
+          <a:lstStyle/>
+          <a:p>
+            <a:pPr algn="ctr" indent="0" marL="0">
+              <a:buNone/>
+            </a:pPr>
+            <a:r>
+              <a:rPr lang="en-US" sz="1200" dirty="0">
+                <a:solidFill>
+                  <a:srgbClr val="7A6E5A"/>
+                </a:solidFill>
+                <a:latin typeface="Calibri" pitchFamily="34" charset="0"/>
+                <a:ea typeface="Calibri" pitchFamily="34" charset="-122"/>
+                <a:cs typeface="Calibri" pitchFamily="34" charset="-120"/>
+              </a:rPr>
+              <a:t>35</a:t>
+            </a:r>
+            <a:endParaRPr lang="en-US" sz="1200" dirty="0"/>
+          </a:p>
+        </p:txBody>
+      </p:sp>
+      <p:sp>
+        <p:nvSpPr>
+          <p:cNvPr id="90" name="Shape 88"/>
+          <p:cNvSpPr/>
+          <p:nvPr/>
+        </p:nvSpPr>
+        <p:spPr>
+          <a:xfrm>
+            <a:off x="8151876" y="2299716"/>
+            <a:ext cx="64008" cy="64008"/>
+          </a:xfrm>
+          <a:prstGeom prst="ellipse">
+            <a:avLst/>
+          </a:prstGeom>
+          <a:solidFill>
+            <a:srgbClr val="6B2333"/>
+          </a:solidFill>
+          <a:ln w="12700">
+            <a:solidFill>
+              <a:srgbClr val="6B2333"/>
+            </a:solidFill>
+            <a:prstDash val="solid"/>
+          </a:ln>
+        </p:spPr>
+      </p:sp>
+      <p:sp>
+        <p:nvSpPr>
+          <p:cNvPr id="91" name="Shape 89"/>
+          <p:cNvSpPr/>
+          <p:nvPr/>
+        </p:nvSpPr>
+        <p:spPr>
+          <a:xfrm>
+            <a:off x="8151876" y="2382307"/>
+            <a:ext cx="64008" cy="64008"/>
+          </a:xfrm>
+          <a:prstGeom prst="ellipse">
+            <a:avLst/>
+          </a:prstGeom>
+          <a:solidFill>
+            <a:srgbClr val="6B2333"/>
+          </a:solidFill>
+          <a:ln w="12700">
+            <a:solidFill>
+              <a:srgbClr val="6B2333"/>
+            </a:solidFill>
+            <a:prstDash val="solid"/>
+          </a:ln>
+        </p:spPr>
+      </p:sp>
+      <p:sp>
+        <p:nvSpPr>
+          <p:cNvPr id="92" name="Shape 90"/>
+          <p:cNvSpPr/>
+          <p:nvPr/>
+        </p:nvSpPr>
+        <p:spPr>
+          <a:xfrm>
+            <a:off x="8151876" y="2464898"/>
+            <a:ext cx="64008" cy="64008"/>
+          </a:xfrm>
+          <a:prstGeom prst="ellipse">
+            <a:avLst/>
+          </a:prstGeom>
+          <a:solidFill>
+            <a:srgbClr val="6B2333"/>
+          </a:solidFill>
+          <a:ln w="12700">
+            <a:solidFill>
+              <a:srgbClr val="6B2333"/>
+            </a:solidFill>
+            <a:prstDash val="solid"/>
+          </a:ln>
+        </p:spPr>
+      </p:sp>
+      <p:sp>
+        <p:nvSpPr>
+          <p:cNvPr id="93" name="Shape 91"/>
+          <p:cNvSpPr/>
+          <p:nvPr/>
+        </p:nvSpPr>
+        <p:spPr>
+          <a:xfrm>
+            <a:off x="8151876" y="2547489"/>
+            <a:ext cx="64008" cy="64008"/>
+          </a:xfrm>
+          <a:prstGeom prst="ellipse">
+            <a:avLst/>
+          </a:prstGeom>
+          <a:solidFill>
+            <a:srgbClr val="6B2333"/>
+          </a:solidFill>
+          <a:ln w="12700">
+            <a:solidFill>
+              <a:srgbClr val="6B2333"/>
+            </a:solidFill>
+            <a:prstDash val="solid"/>
+          </a:ln>
+        </p:spPr>
+      </p:sp>
+      <p:sp>
+        <p:nvSpPr>
+          <p:cNvPr id="94" name="Shape 92"/>
+          <p:cNvSpPr/>
+          <p:nvPr/>
+        </p:nvSpPr>
+        <p:spPr>
+          <a:xfrm>
+            <a:off x="8151876" y="2630080"/>
+            <a:ext cx="64008" cy="64008"/>
+          </a:xfrm>
+          <a:prstGeom prst="ellipse">
+            <a:avLst/>
+          </a:prstGeom>
+          <a:solidFill>
+            <a:srgbClr val="6B2333"/>
+          </a:solidFill>
+          <a:ln w="12700">
+            <a:solidFill>
+              <a:srgbClr val="6B2333"/>
+            </a:solidFill>
+            <a:prstDash val="solid"/>
+          </a:ln>
+        </p:spPr>
+      </p:sp>
+      <p:sp>
+        <p:nvSpPr>
+          <p:cNvPr id="95" name="Shape 93"/>
+          <p:cNvSpPr/>
+          <p:nvPr/>
+        </p:nvSpPr>
+        <p:spPr>
+          <a:xfrm>
+            <a:off x="8151876" y="2712671"/>
+            <a:ext cx="64008" cy="64008"/>
+          </a:xfrm>
+          <a:prstGeom prst="ellipse">
+            <a:avLst/>
+          </a:prstGeom>
+          <a:solidFill>
+            <a:srgbClr val="6B2333"/>
+          </a:solidFill>
+          <a:ln w="12700">
+            <a:solidFill>
+              <a:srgbClr val="6B2333"/>
+            </a:solidFill>
+            <a:prstDash val="solid"/>
+          </a:ln>
+        </p:spPr>
+      </p:sp>
+      <p:sp>
+        <p:nvSpPr>
+          <p:cNvPr id="96" name="Shape 94"/>
+          <p:cNvSpPr/>
+          <p:nvPr/>
+        </p:nvSpPr>
+        <p:spPr>
+          <a:xfrm>
+            <a:off x="8151876" y="2795262"/>
+            <a:ext cx="64008" cy="64008"/>
+          </a:xfrm>
+          <a:prstGeom prst="ellipse">
+            <a:avLst/>
+          </a:prstGeom>
+          <a:solidFill>
+            <a:srgbClr val="6B2333"/>
+          </a:solidFill>
+          <a:ln w="12700">
+            <a:solidFill>
+              <a:srgbClr val="6B2333"/>
+            </a:solidFill>
+            <a:prstDash val="solid"/>
+          </a:ln>
+        </p:spPr>
+      </p:sp>
+      <p:sp>
+        <p:nvSpPr>
+          <p:cNvPr id="97" name="Shape 95"/>
+          <p:cNvSpPr/>
+          <p:nvPr/>
+        </p:nvSpPr>
+        <p:spPr>
+          <a:xfrm>
+            <a:off x="8151876" y="2877853"/>
+            <a:ext cx="64008" cy="64008"/>
+          </a:xfrm>
+          <a:prstGeom prst="ellipse">
+            <a:avLst/>
+          </a:prstGeom>
+          <a:solidFill>
+            <a:srgbClr val="6B2333"/>
+          </a:solidFill>
+          <a:ln w="12700">
+            <a:solidFill>
+              <a:srgbClr val="6B2333"/>
+            </a:solidFill>
+            <a:prstDash val="solid"/>
+          </a:ln>
+        </p:spPr>
+      </p:sp>
+      <p:sp>
+        <p:nvSpPr>
+          <p:cNvPr id="98" name="Shape 96"/>
+          <p:cNvSpPr/>
+          <p:nvPr/>
+        </p:nvSpPr>
+        <p:spPr>
+          <a:xfrm>
+            <a:off x="8151876" y="2960444"/>
+            <a:ext cx="64008" cy="64008"/>
+          </a:xfrm>
+          <a:prstGeom prst="ellipse">
+            <a:avLst/>
+          </a:prstGeom>
+          <a:solidFill>
+            <a:srgbClr val="6B2333"/>
+          </a:solidFill>
+          <a:ln w="12700">
+            <a:solidFill>
+              <a:srgbClr val="6B2333"/>
+            </a:solidFill>
+            <a:prstDash val="solid"/>
+          </a:ln>
+        </p:spPr>
+      </p:sp>
+      <p:sp>
+        <p:nvSpPr>
+          <p:cNvPr id="99" name="Shape 97"/>
+          <p:cNvSpPr/>
+          <p:nvPr/>
+        </p:nvSpPr>
+        <p:spPr>
+          <a:xfrm>
+            <a:off x="8151876" y="3043035"/>
+            <a:ext cx="64008" cy="64008"/>
+          </a:xfrm>
+          <a:prstGeom prst="ellipse">
+            <a:avLst/>
+          </a:prstGeom>
+          <a:solidFill>
+            <a:srgbClr val="6B2333"/>
+          </a:solidFill>
+          <a:ln w="12700">
+            <a:solidFill>
+              <a:srgbClr val="6B2333"/>
+            </a:solidFill>
+            <a:prstDash val="solid"/>
+          </a:ln>
+        </p:spPr>
+      </p:sp>
+      <p:sp>
+        <p:nvSpPr>
+          <p:cNvPr id="100" name="Shape 98"/>
+          <p:cNvSpPr/>
+          <p:nvPr/>
+        </p:nvSpPr>
+        <p:spPr>
+          <a:xfrm>
+            <a:off x="8151876" y="3125626"/>
+            <a:ext cx="64008" cy="64008"/>
+          </a:xfrm>
+          <a:prstGeom prst="ellipse">
+            <a:avLst/>
+          </a:prstGeom>
+          <a:solidFill>
+            <a:srgbClr val="6B2333"/>
+          </a:solidFill>
+          <a:ln w="12700">
+            <a:solidFill>
+              <a:srgbClr val="6B2333"/>
+            </a:solidFill>
+            <a:prstDash val="solid"/>
+          </a:ln>
+        </p:spPr>
+      </p:sp>
+      <p:sp>
+        <p:nvSpPr>
+          <p:cNvPr id="101" name="Shape 99"/>
+          <p:cNvSpPr/>
+          <p:nvPr/>
+        </p:nvSpPr>
+        <p:spPr>
+          <a:xfrm>
+            <a:off x="8151876" y="3208217"/>
+            <a:ext cx="64008" cy="64008"/>
+          </a:xfrm>
+          <a:prstGeom prst="ellipse">
+            <a:avLst/>
+          </a:prstGeom>
+          <a:solidFill>
+            <a:srgbClr val="6B2333"/>
+          </a:solidFill>
+          <a:ln w="12700">
+            <a:solidFill>
+              <a:srgbClr val="6B2333"/>
+            </a:solidFill>
+            <a:prstDash val="solid"/>
+          </a:ln>
+        </p:spPr>
+      </p:sp>
+      <p:sp>
+        <p:nvSpPr>
+          <p:cNvPr id="102" name="Shape 100"/>
+          <p:cNvSpPr/>
+          <p:nvPr/>
+        </p:nvSpPr>
+        <p:spPr>
+          <a:xfrm>
+            <a:off x="8151876" y="3290808"/>
+            <a:ext cx="64008" cy="64008"/>
+          </a:xfrm>
+          <a:prstGeom prst="ellipse">
+            <a:avLst/>
+          </a:prstGeom>
+          <a:solidFill>
+            <a:srgbClr val="6B2333"/>
+          </a:solidFill>
+          <a:ln w="12700">
+            <a:solidFill>
+              <a:srgbClr val="6B2333"/>
+            </a:solidFill>
+            <a:prstDash val="solid"/>
+          </a:ln>
+        </p:spPr>
+      </p:sp>
+      <p:sp>
+        <p:nvSpPr>
+          <p:cNvPr id="103" name="Shape 101"/>
+          <p:cNvSpPr/>
+          <p:nvPr/>
+        </p:nvSpPr>
+        <p:spPr>
+          <a:xfrm>
+            <a:off x="8151876" y="3373399"/>
+            <a:ext cx="64008" cy="64008"/>
+          </a:xfrm>
+          <a:prstGeom prst="ellipse">
+            <a:avLst/>
+          </a:prstGeom>
+          <a:solidFill>
+            <a:srgbClr val="6B2333"/>
+          </a:solidFill>
+          <a:ln w="12700">
+            <a:solidFill>
+              <a:srgbClr val="6B2333"/>
+            </a:solidFill>
+            <a:prstDash val="solid"/>
+          </a:ln>
+        </p:spPr>
+      </p:sp>
+      <p:sp>
+        <p:nvSpPr>
+          <p:cNvPr id="104" name="Shape 102"/>
+          <p:cNvSpPr/>
+          <p:nvPr/>
+        </p:nvSpPr>
+        <p:spPr>
+          <a:xfrm>
+            <a:off x="8151876" y="3455990"/>
+            <a:ext cx="64008" cy="64008"/>
+          </a:xfrm>
+          <a:prstGeom prst="ellipse">
+            <a:avLst/>
+          </a:prstGeom>
+          <a:solidFill>
+            <a:srgbClr val="6B2333"/>
+          </a:solidFill>
+          <a:ln w="12700">
+            <a:solidFill>
+              <a:srgbClr val="6B2333"/>
+            </a:solidFill>
+            <a:prstDash val="solid"/>
+          </a:ln>
+        </p:spPr>
+      </p:sp>
+      <p:sp>
+        <p:nvSpPr>
+          <p:cNvPr id="105" name="Shape 103"/>
+          <p:cNvSpPr/>
+          <p:nvPr/>
+        </p:nvSpPr>
+        <p:spPr>
+          <a:xfrm>
+            <a:off x="8151876" y="3538581"/>
+            <a:ext cx="64008" cy="64008"/>
+          </a:xfrm>
+          <a:prstGeom prst="ellipse">
+            <a:avLst/>
+          </a:prstGeom>
+          <a:solidFill>
+            <a:srgbClr val="6B2333"/>
+          </a:solidFill>
+          <a:ln w="12700">
+            <a:solidFill>
+              <a:srgbClr val="6B2333"/>
+            </a:solidFill>
+            <a:prstDash val="solid"/>
+          </a:ln>
+        </p:spPr>
+      </p:sp>
+      <p:sp>
+        <p:nvSpPr>
+          <p:cNvPr id="106" name="Shape 104"/>
+          <p:cNvSpPr/>
+          <p:nvPr/>
+        </p:nvSpPr>
+        <p:spPr>
+          <a:xfrm>
+            <a:off x="8151876" y="3621171"/>
+            <a:ext cx="64008" cy="64008"/>
+          </a:xfrm>
+          <a:prstGeom prst="ellipse">
+            <a:avLst/>
+          </a:prstGeom>
+          <a:solidFill>
+            <a:srgbClr val="6B2333"/>
+          </a:solidFill>
+          <a:ln w="12700">
+            <a:solidFill>
+              <a:srgbClr val="6B2333"/>
+            </a:solidFill>
+            <a:prstDash val="solid"/>
+          </a:ln>
+        </p:spPr>
+      </p:sp>
+      <p:sp>
+        <p:nvSpPr>
+          <p:cNvPr id="107" name="Shape 105"/>
+          <p:cNvSpPr/>
+          <p:nvPr/>
+        </p:nvSpPr>
+        <p:spPr>
+          <a:xfrm>
+            <a:off x="8151876" y="3703762"/>
+            <a:ext cx="64008" cy="64008"/>
+          </a:xfrm>
+          <a:prstGeom prst="ellipse">
+            <a:avLst/>
+          </a:prstGeom>
+          <a:solidFill>
+            <a:srgbClr val="6B2333"/>
+          </a:solidFill>
+          <a:ln w="12700">
+            <a:solidFill>
+              <a:srgbClr val="6B2333"/>
+            </a:solidFill>
+            <a:prstDash val="solid"/>
+          </a:ln>
+        </p:spPr>
+      </p:sp>
+      <p:sp>
+        <p:nvSpPr>
+          <p:cNvPr id="108" name="Shape 106"/>
+          <p:cNvSpPr/>
+          <p:nvPr/>
+        </p:nvSpPr>
+        <p:spPr>
+          <a:xfrm>
+            <a:off x="8151876" y="3786353"/>
+            <a:ext cx="64008" cy="64008"/>
+          </a:xfrm>
+          <a:prstGeom prst="ellipse">
+            <a:avLst/>
+          </a:prstGeom>
+          <a:solidFill>
+            <a:srgbClr val="6B2333"/>
+          </a:solidFill>
+          <a:ln w="12700">
+            <a:solidFill>
+              <a:srgbClr val="6B2333"/>
+            </a:solidFill>
+            <a:prstDash val="solid"/>
+          </a:ln>
+        </p:spPr>
+      </p:sp>
+      <p:sp>
+        <p:nvSpPr>
+          <p:cNvPr id="109" name="Shape 107"/>
+          <p:cNvSpPr/>
+          <p:nvPr/>
+        </p:nvSpPr>
+        <p:spPr>
+          <a:xfrm>
+            <a:off x="8151876" y="3868944"/>
+            <a:ext cx="64008" cy="64008"/>
+          </a:xfrm>
+          <a:prstGeom prst="ellipse">
+            <a:avLst/>
+          </a:prstGeom>
+          <a:solidFill>
+            <a:srgbClr val="6B2333"/>
+          </a:solidFill>
+          <a:ln w="12700">
+            <a:solidFill>
+              <a:srgbClr val="6B2333"/>
+            </a:solidFill>
+            <a:prstDash val="solid"/>
+          </a:ln>
+        </p:spPr>
+      </p:sp>
+      <p:sp>
+        <p:nvSpPr>
+          <p:cNvPr id="110" name="Shape 108"/>
+          <p:cNvSpPr/>
+          <p:nvPr/>
+        </p:nvSpPr>
+        <p:spPr>
+          <a:xfrm>
+            <a:off x="8151876" y="3951535"/>
+            <a:ext cx="64008" cy="64008"/>
+          </a:xfrm>
+          <a:prstGeom prst="ellipse">
+            <a:avLst/>
+          </a:prstGeom>
+          <a:solidFill>
+            <a:srgbClr val="6B2333"/>
+          </a:solidFill>
+          <a:ln w="12700">
+            <a:solidFill>
+              <a:srgbClr val="6B2333"/>
+            </a:solidFill>
+            <a:prstDash val="solid"/>
+          </a:ln>
+        </p:spPr>
+      </p:sp>
+      <p:sp>
+        <p:nvSpPr>
+          <p:cNvPr id="111" name="Shape 109"/>
+          <p:cNvSpPr/>
+          <p:nvPr/>
+        </p:nvSpPr>
+        <p:spPr>
+          <a:xfrm>
+            <a:off x="8151876" y="4034126"/>
+            <a:ext cx="64008" cy="64008"/>
+          </a:xfrm>
+          <a:prstGeom prst="ellipse">
+            <a:avLst/>
+          </a:prstGeom>
+          <a:solidFill>
+            <a:srgbClr val="6B2333"/>
+          </a:solidFill>
+          <a:ln w="12700">
+            <a:solidFill>
+              <a:srgbClr val="6B2333"/>
+            </a:solidFill>
+            <a:prstDash val="solid"/>
+          </a:ln>
+        </p:spPr>
+      </p:sp>
+      <p:sp>
+        <p:nvSpPr>
+          <p:cNvPr id="112" name="Shape 110"/>
+          <p:cNvSpPr/>
+          <p:nvPr/>
+        </p:nvSpPr>
+        <p:spPr>
+          <a:xfrm>
+            <a:off x="8151876" y="4116717"/>
+            <a:ext cx="64008" cy="64008"/>
+          </a:xfrm>
+          <a:prstGeom prst="ellipse">
+            <a:avLst/>
+          </a:prstGeom>
+          <a:solidFill>
+            <a:srgbClr val="6B2333"/>
+          </a:solidFill>
+          <a:ln w="12700">
+            <a:solidFill>
+              <a:srgbClr val="6B2333"/>
+            </a:solidFill>
+            <a:prstDash val="solid"/>
+          </a:ln>
+        </p:spPr>
+      </p:sp>
+      <p:sp>
+        <p:nvSpPr>
+          <p:cNvPr id="113" name="Shape 111"/>
+          <p:cNvSpPr/>
+          <p:nvPr/>
+        </p:nvSpPr>
+        <p:spPr>
+          <a:xfrm>
+            <a:off x="8151876" y="4199308"/>
+            <a:ext cx="64008" cy="64008"/>
+          </a:xfrm>
+          <a:prstGeom prst="ellipse">
+            <a:avLst/>
+          </a:prstGeom>
+          <a:solidFill>
+            <a:srgbClr val="6B2333"/>
+          </a:solidFill>
+          <a:ln w="12700">
+            <a:solidFill>
+              <a:srgbClr val="6B2333"/>
+            </a:solidFill>
+            <a:prstDash val="solid"/>
+          </a:ln>
+        </p:spPr>
+      </p:sp>
+      <p:sp>
+        <p:nvSpPr>
+          <p:cNvPr id="114" name="Shape 112"/>
+          <p:cNvSpPr/>
+          <p:nvPr/>
+        </p:nvSpPr>
+        <p:spPr>
+          <a:xfrm>
+            <a:off x="8151876" y="4281899"/>
+            <a:ext cx="64008" cy="64008"/>
+          </a:xfrm>
+          <a:prstGeom prst="ellipse">
+            <a:avLst/>
+          </a:prstGeom>
+          <a:solidFill>
+            <a:srgbClr val="6B2333"/>
+          </a:solidFill>
+          <a:ln w="12700">
+            <a:solidFill>
+              <a:srgbClr val="6B2333"/>
+            </a:solidFill>
+            <a:prstDash val="solid"/>
+          </a:ln>
+        </p:spPr>
+      </p:sp>
+      <p:sp>
+        <p:nvSpPr>
+          <p:cNvPr id="115" name="Shape 113"/>
+          <p:cNvSpPr/>
+          <p:nvPr/>
+        </p:nvSpPr>
+        <p:spPr>
+          <a:xfrm>
+            <a:off x="8151876" y="4364490"/>
+            <a:ext cx="64008" cy="64008"/>
+          </a:xfrm>
+          <a:prstGeom prst="ellipse">
+            <a:avLst/>
+          </a:prstGeom>
+          <a:solidFill>
+            <a:srgbClr val="6B2333"/>
+          </a:solidFill>
+          <a:ln w="12700">
+            <a:solidFill>
+              <a:srgbClr val="6B2333"/>
+            </a:solidFill>
+            <a:prstDash val="solid"/>
+          </a:ln>
+        </p:spPr>
+      </p:sp>
+      <p:sp>
+        <p:nvSpPr>
+          <p:cNvPr id="116" name="Shape 114"/>
+          <p:cNvSpPr/>
+          <p:nvPr/>
+        </p:nvSpPr>
+        <p:spPr>
+          <a:xfrm>
+            <a:off x="8151876" y="4447081"/>
+            <a:ext cx="64008" cy="64008"/>
+          </a:xfrm>
+          <a:prstGeom prst="ellipse">
+            <a:avLst/>
+          </a:prstGeom>
+          <a:solidFill>
+            <a:srgbClr val="6B2333"/>
+          </a:solidFill>
+          <a:ln w="12700">
+            <a:solidFill>
+              <a:srgbClr val="6B2333"/>
+            </a:solidFill>
+            <a:prstDash val="solid"/>
+          </a:ln>
+        </p:spPr>
+      </p:sp>
+      <p:sp>
+        <p:nvSpPr>
+          <p:cNvPr id="117" name="Shape 115"/>
+          <p:cNvSpPr/>
+          <p:nvPr/>
+        </p:nvSpPr>
+        <p:spPr>
+          <a:xfrm>
+            <a:off x="8151876" y="4529672"/>
+            <a:ext cx="64008" cy="64008"/>
+          </a:xfrm>
+          <a:prstGeom prst="ellipse">
+            <a:avLst/>
+          </a:prstGeom>
+          <a:solidFill>
+            <a:srgbClr val="6B2333"/>
+          </a:solidFill>
+          <a:ln w="12700">
+            <a:solidFill>
+              <a:srgbClr val="6B2333"/>
+            </a:solidFill>
+            <a:prstDash val="solid"/>
+          </a:ln>
+        </p:spPr>
+      </p:sp>
+      <p:sp>
+        <p:nvSpPr>
+          <p:cNvPr id="118" name="Shape 116"/>
+          <p:cNvSpPr/>
+          <p:nvPr/>
+        </p:nvSpPr>
+        <p:spPr>
+          <a:xfrm>
+            <a:off x="8151876" y="4612263"/>
+            <a:ext cx="64008" cy="64008"/>
+          </a:xfrm>
+          <a:prstGeom prst="ellipse">
+            <a:avLst/>
+          </a:prstGeom>
+          <a:solidFill>
+            <a:srgbClr val="6B2333"/>
+          </a:solidFill>
+          <a:ln w="12700">
+            <a:solidFill>
+              <a:srgbClr val="6B2333"/>
+            </a:solidFill>
+            <a:prstDash val="solid"/>
+          </a:ln>
+        </p:spPr>
+      </p:sp>
+      <p:sp>
+        <p:nvSpPr>
+          <p:cNvPr id="119" name="Shape 117"/>
+          <p:cNvSpPr/>
+          <p:nvPr/>
+        </p:nvSpPr>
+        <p:spPr>
+          <a:xfrm>
+            <a:off x="8151876" y="4694854"/>
+            <a:ext cx="64008" cy="64008"/>
+          </a:xfrm>
+          <a:prstGeom prst="ellipse">
+            <a:avLst/>
+          </a:prstGeom>
+          <a:solidFill>
+            <a:srgbClr val="6B2333"/>
+          </a:solidFill>
+          <a:ln w="12700">
+            <a:solidFill>
+              <a:srgbClr val="6B2333"/>
+            </a:solidFill>
+            <a:prstDash val="solid"/>
+          </a:ln>
+        </p:spPr>
+      </p:sp>
+      <p:sp>
+        <p:nvSpPr>
+          <p:cNvPr id="120" name="Shape 118"/>
+          <p:cNvSpPr/>
+          <p:nvPr/>
+        </p:nvSpPr>
+        <p:spPr>
+          <a:xfrm>
+            <a:off x="8151876" y="4777445"/>
+            <a:ext cx="64008" cy="64008"/>
+          </a:xfrm>
+          <a:prstGeom prst="ellipse">
+            <a:avLst/>
+          </a:prstGeom>
+          <a:solidFill>
+            <a:srgbClr val="6B2333"/>
+          </a:solidFill>
+          <a:ln w="12700">
+            <a:solidFill>
+              <a:srgbClr val="6B2333"/>
+            </a:solidFill>
+            <a:prstDash val="solid"/>
+          </a:ln>
+        </p:spPr>
+      </p:sp>
+      <p:sp>
+        <p:nvSpPr>
+          <p:cNvPr id="121" name="Shape 119"/>
+          <p:cNvSpPr/>
+          <p:nvPr/>
+        </p:nvSpPr>
+        <p:spPr>
+          <a:xfrm>
+            <a:off x="8151876" y="4860036"/>
+            <a:ext cx="64008" cy="64008"/>
+          </a:xfrm>
+          <a:prstGeom prst="ellipse">
+            <a:avLst/>
+          </a:prstGeom>
+          <a:solidFill>
+            <a:srgbClr val="6B2333"/>
+          </a:solidFill>
+          <a:ln w="12700">
+            <a:solidFill>
+              <a:srgbClr val="6B2333"/>
+            </a:solidFill>
+            <a:prstDash val="solid"/>
+          </a:ln>
+        </p:spPr>
+      </p:sp>
+      <p:sp>
+        <p:nvSpPr>
+          <p:cNvPr id="122" name="Text 120"/>
+          <p:cNvSpPr/>
+          <p:nvPr/>
+        </p:nvSpPr>
+        <p:spPr>
+          <a:xfrm>
+            <a:off x="7178040" y="5029200"/>
+            <a:ext cx="2011680" cy="320040"/>
+          </a:xfrm>
+          <a:prstGeom prst="rect">
+            <a:avLst/>
+          </a:prstGeom>
+          <a:noFill/>
+          <a:ln/>
+        </p:spPr>
+        <p:txBody>
+          <a:bodyPr wrap="square" lIns="0" tIns="0" rIns="0" bIns="0" rtlCol="0" anchor="ctr"/>
+          <a:lstStyle/>
+          <a:p>
+            <a:pPr algn="ctr" indent="0" marL="0">
+              <a:buNone/>
+            </a:pPr>
+            <a:r>
+              <a:rPr lang="en-US" sz="1400" b="1" dirty="0">
+                <a:solidFill>
+                  <a:srgbClr val="2B211A"/>
+                </a:solidFill>
+                <a:latin typeface="Cambria" pitchFamily="34" charset="0"/>
+                <a:ea typeface="Cambria" pitchFamily="34" charset="-122"/>
+                <a:cs typeface="Cambria" pitchFamily="34" charset="-120"/>
+              </a:rPr>
+              <a:t>hidden</a:t>
+            </a:r>
+            <a:endParaRPr lang="en-US" sz="1400" dirty="0"/>
+          </a:p>
+        </p:txBody>
+      </p:sp>
+      <p:sp>
+        <p:nvSpPr>
+          <p:cNvPr id="123" name="Text 121"/>
+          <p:cNvSpPr/>
+          <p:nvPr/>
+        </p:nvSpPr>
+        <p:spPr>
+          <a:xfrm>
+            <a:off x="7178040" y="5349240"/>
+            <a:ext cx="2011680" cy="274320"/>
+          </a:xfrm>
+          <a:prstGeom prst="rect">
+            <a:avLst/>
+          </a:prstGeom>
+          <a:noFill/>
+          <a:ln/>
+        </p:spPr>
+        <p:txBody>
+          <a:bodyPr wrap="square" lIns="0" tIns="0" rIns="0" bIns="0" rtlCol="0" anchor="ctr"/>
+          <a:lstStyle/>
+          <a:p>
+            <a:pPr algn="ctr" indent="0" marL="0">
+              <a:buNone/>
+            </a:pPr>
+            <a:r>
+              <a:rPr lang="en-US" sz="1200" dirty="0">
+                <a:solidFill>
+                  <a:srgbClr val="7A6E5A"/>
+                </a:solidFill>
+                <a:latin typeface="Calibri" pitchFamily="34" charset="0"/>
+                <a:ea typeface="Calibri" pitchFamily="34" charset="-122"/>
+                <a:cs typeface="Calibri" pitchFamily="34" charset="-120"/>
+              </a:rPr>
+              <a:t>32</a:t>
+            </a:r>
+            <a:endParaRPr lang="en-US" sz="1200" dirty="0"/>
+          </a:p>
+        </p:txBody>
+      </p:sp>
+      <p:sp>
+        <p:nvSpPr>
+          <p:cNvPr id="124" name="Shape 122"/>
+          <p:cNvSpPr/>
+          <p:nvPr/>
+        </p:nvSpPr>
+        <p:spPr>
+          <a:xfrm>
+            <a:off x="10300716" y="2299716"/>
+            <a:ext cx="64008" cy="64008"/>
+          </a:xfrm>
+          <a:prstGeom prst="ellipse">
+            <a:avLst/>
+          </a:prstGeom>
+          <a:solidFill>
+            <a:srgbClr val="3A4A2E"/>
+          </a:solidFill>
+          <a:ln w="12700">
+            <a:solidFill>
+              <a:srgbClr val="3A4A2E"/>
+            </a:solidFill>
+            <a:prstDash val="solid"/>
+          </a:ln>
+        </p:spPr>
+      </p:sp>
+      <p:sp>
+        <p:nvSpPr>
+          <p:cNvPr id="125" name="Shape 123"/>
+          <p:cNvSpPr/>
+          <p:nvPr/>
+        </p:nvSpPr>
+        <p:spPr>
+          <a:xfrm>
+            <a:off x="10300716" y="2665476"/>
+            <a:ext cx="64008" cy="64008"/>
+          </a:xfrm>
+          <a:prstGeom prst="ellipse">
+            <a:avLst/>
+          </a:prstGeom>
+          <a:solidFill>
+            <a:srgbClr val="3A4A2E"/>
+          </a:solidFill>
+          <a:ln w="12700">
+            <a:solidFill>
+              <a:srgbClr val="3A4A2E"/>
+            </a:solidFill>
+            <a:prstDash val="solid"/>
+          </a:ln>
+        </p:spPr>
+      </p:sp>
+      <p:sp>
+        <p:nvSpPr>
+          <p:cNvPr id="126" name="Shape 124"/>
+          <p:cNvSpPr/>
+          <p:nvPr/>
+        </p:nvSpPr>
+        <p:spPr>
+          <a:xfrm>
+            <a:off x="10300716" y="3031236"/>
+            <a:ext cx="64008" cy="64008"/>
+          </a:xfrm>
+          <a:prstGeom prst="ellipse">
+            <a:avLst/>
+          </a:prstGeom>
+          <a:solidFill>
+            <a:srgbClr val="3A4A2E"/>
+          </a:solidFill>
+          <a:ln w="12700">
+            <a:solidFill>
+              <a:srgbClr val="3A4A2E"/>
+            </a:solidFill>
+            <a:prstDash val="solid"/>
+          </a:ln>
+        </p:spPr>
+      </p:sp>
+      <p:sp>
+        <p:nvSpPr>
+          <p:cNvPr id="127" name="Shape 125"/>
+          <p:cNvSpPr/>
+          <p:nvPr/>
+        </p:nvSpPr>
+        <p:spPr>
+          <a:xfrm>
+            <a:off x="10300716" y="3396996"/>
+            <a:ext cx="64008" cy="64008"/>
+          </a:xfrm>
+          <a:prstGeom prst="ellipse">
+            <a:avLst/>
+          </a:prstGeom>
+          <a:solidFill>
+            <a:srgbClr val="3A4A2E"/>
+          </a:solidFill>
+          <a:ln w="12700">
+            <a:solidFill>
+              <a:srgbClr val="3A4A2E"/>
+            </a:solidFill>
+            <a:prstDash val="solid"/>
+          </a:ln>
+        </p:spPr>
+      </p:sp>
+      <p:sp>
+        <p:nvSpPr>
+          <p:cNvPr id="128" name="Shape 126"/>
+          <p:cNvSpPr/>
+          <p:nvPr/>
+        </p:nvSpPr>
+        <p:spPr>
+          <a:xfrm>
+            <a:off x="10300716" y="3762756"/>
+            <a:ext cx="64008" cy="64008"/>
+          </a:xfrm>
+          <a:prstGeom prst="ellipse">
+            <a:avLst/>
+          </a:prstGeom>
+          <a:solidFill>
+            <a:srgbClr val="3A4A2E"/>
+          </a:solidFill>
+          <a:ln w="12700">
+            <a:solidFill>
+              <a:srgbClr val="3A4A2E"/>
+            </a:solidFill>
+            <a:prstDash val="solid"/>
+          </a:ln>
+        </p:spPr>
+      </p:sp>
+      <p:sp>
+        <p:nvSpPr>
+          <p:cNvPr id="129" name="Shape 127"/>
+          <p:cNvSpPr/>
+          <p:nvPr/>
+        </p:nvSpPr>
+        <p:spPr>
+          <a:xfrm>
+            <a:off x="10300716" y="4128516"/>
+            <a:ext cx="64008" cy="64008"/>
+          </a:xfrm>
+          <a:prstGeom prst="ellipse">
+            <a:avLst/>
+          </a:prstGeom>
+          <a:solidFill>
+            <a:srgbClr val="3A4A2E"/>
+          </a:solidFill>
+          <a:ln w="12700">
+            <a:solidFill>
+              <a:srgbClr val="3A4A2E"/>
+            </a:solidFill>
+            <a:prstDash val="solid"/>
+          </a:ln>
+        </p:spPr>
+      </p:sp>
+      <p:sp>
+        <p:nvSpPr>
+          <p:cNvPr id="130" name="Shape 128"/>
+          <p:cNvSpPr/>
+          <p:nvPr/>
+        </p:nvSpPr>
+        <p:spPr>
+          <a:xfrm>
+            <a:off x="10300716" y="4494276"/>
+            <a:ext cx="64008" cy="64008"/>
+          </a:xfrm>
+          <a:prstGeom prst="ellipse">
+            <a:avLst/>
+          </a:prstGeom>
+          <a:solidFill>
+            <a:srgbClr val="3A4A2E"/>
+          </a:solidFill>
+          <a:ln w="12700">
+            <a:solidFill>
+              <a:srgbClr val="3A4A2E"/>
+            </a:solidFill>
+            <a:prstDash val="solid"/>
+          </a:ln>
+        </p:spPr>
+      </p:sp>
+      <p:sp>
+        <p:nvSpPr>
+          <p:cNvPr id="131" name="Shape 129"/>
+          <p:cNvSpPr/>
+          <p:nvPr/>
+        </p:nvSpPr>
+        <p:spPr>
+          <a:xfrm>
+            <a:off x="10300716" y="4860036"/>
+            <a:ext cx="64008" cy="64008"/>
+          </a:xfrm>
+          <a:prstGeom prst="ellipse">
+            <a:avLst/>
+          </a:prstGeom>
+          <a:solidFill>
+            <a:srgbClr val="3A4A2E"/>
+          </a:solidFill>
+          <a:ln w="12700">
+            <a:solidFill>
+              <a:srgbClr val="3A4A2E"/>
+            </a:solidFill>
+            <a:prstDash val="solid"/>
+          </a:ln>
+        </p:spPr>
+      </p:sp>
+      <p:sp>
+        <p:nvSpPr>
+          <p:cNvPr id="132" name="Text 130"/>
+          <p:cNvSpPr/>
+          <p:nvPr/>
+        </p:nvSpPr>
+        <p:spPr>
+          <a:xfrm>
+            <a:off x="9326880" y="5029200"/>
+            <a:ext cx="2011680" cy="320040"/>
+          </a:xfrm>
+          <a:prstGeom prst="rect">
+            <a:avLst/>
+          </a:prstGeom>
+          <a:noFill/>
+          <a:ln/>
+        </p:spPr>
+        <p:txBody>
+          <a:bodyPr wrap="square" lIns="0" tIns="0" rIns="0" bIns="0" rtlCol="0" anchor="ctr"/>
+          <a:lstStyle/>
+          <a:p>
+            <a:pPr algn="ctr" indent="0" marL="0">
+              <a:buNone/>
+            </a:pPr>
+            <a:r>
+              <a:rPr lang="en-US" sz="1400" b="1" dirty="0">
+                <a:solidFill>
+                  <a:srgbClr val="2B211A"/>
+                </a:solidFill>
+                <a:latin typeface="Cambria" pitchFamily="34" charset="0"/>
+                <a:ea typeface="Cambria" pitchFamily="34" charset="-122"/>
+                <a:cs typeface="Cambria" pitchFamily="34" charset="-120"/>
+              </a:rPr>
+              <a:t>next day</a:t>
+            </a:r>
+            <a:endParaRPr lang="en-US" sz="1400" dirty="0"/>
+          </a:p>
+        </p:txBody>
+      </p:sp>
+      <p:sp>
+        <p:nvSpPr>
+          <p:cNvPr id="133" name="Text 131"/>
+          <p:cNvSpPr/>
+          <p:nvPr/>
+        </p:nvSpPr>
+        <p:spPr>
+          <a:xfrm>
+            <a:off x="9326880" y="5349240"/>
+            <a:ext cx="2011680" cy="274320"/>
+          </a:xfrm>
+          <a:prstGeom prst="rect">
+            <a:avLst/>
+          </a:prstGeom>
+          <a:noFill/>
+          <a:ln/>
+        </p:spPr>
+        <p:txBody>
+          <a:bodyPr wrap="square" lIns="0" tIns="0" rIns="0" bIns="0" rtlCol="0" anchor="ctr"/>
+          <a:lstStyle/>
+          <a:p>
+            <a:pPr algn="ctr" indent="0" marL="0">
+              <a:buNone/>
+            </a:pPr>
+            <a:r>
+              <a:rPr lang="en-US" sz="1200" dirty="0">
+                <a:solidFill>
+                  <a:srgbClr val="7A6E5A"/>
+                </a:solidFill>
+                <a:latin typeface="Calibri" pitchFamily="34" charset="0"/>
+                <a:ea typeface="Calibri" pitchFamily="34" charset="-122"/>
+                <a:cs typeface="Calibri" pitchFamily="34" charset="-120"/>
+              </a:rPr>
+              <a:t>8</a:t>
+            </a:r>
+            <a:endParaRPr lang="en-US" sz="1200" dirty="0"/>
+          </a:p>
+        </p:txBody>
+      </p:sp>
+      <p:sp>
+        <p:nvSpPr>
+          <p:cNvPr id="134" name="Text 132"/>
+          <p:cNvSpPr/>
+          <p:nvPr/>
+        </p:nvSpPr>
+        <p:spPr>
+          <a:xfrm>
+            <a:off x="548640" y="5806440"/>
+            <a:ext cx="11064240" cy="365760"/>
+          </a:xfrm>
+          <a:prstGeom prst="rect">
+            <a:avLst/>
+          </a:prstGeom>
+          <a:noFill/>
+          <a:ln/>
+        </p:spPr>
+        <p:txBody>
+          <a:bodyPr wrap="square" lIns="0" tIns="0" rIns="0" bIns="0" rtlCol="0" anchor="ctr"/>
+          <a:lstStyle/>
+          <a:p>
+            <a:pPr algn="l" indent="0" marL="0">
+              <a:buNone/>
+            </a:pPr>
+            <a:r>
+              <a:rPr lang="en-US" sz="1200" i="1" dirty="0">
+                <a:solidFill>
+                  <a:srgbClr val="7A6E5A"/>
+                </a:solidFill>
+                <a:latin typeface="Calibri" pitchFamily="34" charset="0"/>
+                <a:ea typeface="Calibri" pitchFamily="34" charset="-122"/>
+                <a:cs typeface="Calibri" pitchFamily="34" charset="-120"/>
+              </a:rPr>
+              <a:t>Lines show flow, not full wiring: conv is local, attention pools the 6 days; the head (35 → 32 → 8) is fully connected.  Gold = the 3 DoE inputs.</a:t>
+            </a:r>
+            <a:endParaRPr lang="en-US" sz="1200" dirty="0"/>
+          </a:p>
+        </p:txBody>
+      </p:sp>
+      <p:sp>
+        <p:nvSpPr>
+          <p:cNvPr id="135" name="Text 133"/>
+          <p:cNvSpPr/>
+          <p:nvPr/>
+        </p:nvSpPr>
+        <p:spPr>
+          <a:xfrm>
+            <a:off x="548640" y="6172200"/>
+            <a:ext cx="11064240" cy="365760"/>
+          </a:xfrm>
+          <a:prstGeom prst="rect">
+            <a:avLst/>
+          </a:prstGeom>
+          <a:noFill/>
+          <a:ln/>
+        </p:spPr>
+        <p:txBody>
+          <a:bodyPr wrap="square" lIns="0" tIns="0" rIns="0" bIns="0" rtlCol="0" anchor="ctr"/>
+          <a:lstStyle/>
+          <a:p>
+            <a:pPr algn="l" indent="0" marL="0">
+              <a:buNone/>
+            </a:pPr>
+            <a:r>
+              <a:rPr lang="en-US" sz="1200" i="1" dirty="0">
+                <a:solidFill>
+                  <a:srgbClr val="7A6E5A"/>
+                </a:solidFill>
+                <a:latin typeface="Calibri" pitchFamily="34" charset="0"/>
+                <a:ea typeface="Calibri" pitchFamily="34" charset="-122"/>
+                <a:cs typeface="Calibri" pitchFamily="34" charset="-120"/>
+              </a:rPr>
+              <a:t>The output feeds back autoregressively to forecast the whole run.  Hybrid / PINN add a flux head (32 → 8) → ODE step or physics penalty.</a:t>
+            </a:r>
+            <a:endParaRPr lang="en-US" sz="1200" dirty="0"/>
+          </a:p>
+        </p:txBody>
+      </p:sp>
+    </p:spTree>
+  </p:cSld>
+  <p:clrMapOvr>
+    <a:masterClrMapping/>
+  </p:clrMapOvr>
+</p:sld>
+</file>
+
+<file path=ppt/slides/slide5.xml><?xml version="1.0" encoding="utf-8"?>
+<p:sld xmlns:a="http://schemas.openxmlformats.org/drawingml/2006/main" xmlns:r="http://schemas.openxmlformats.org/officeDocument/2006/relationships" xmlns:p="http://schemas.openxmlformats.org/presentationml/2006/main">
+  <p:cSld name="Slide 5">
+    <p:bg>
+      <p:bgPr>
+        <a:solidFill>
+          <a:srgbClr val="FAF8F2"/>
+        </a:solidFill>
+      </p:bgPr>
+    </p:bg>
+    <p:spTree>
+      <p:nvGrpSpPr>
+        <p:cNvPr id="1" name=""/>
+        <p:cNvGrpSpPr/>
+        <p:nvPr/>
+      </p:nvGrpSpPr>
+      <p:grpSpPr>
+        <a:xfrm>
+          <a:off x="0" y="0"/>
+          <a:ext cx="0" cy="0"/>
+          <a:chOff x="0" y="0"/>
+          <a:chExt cx="0" cy="0"/>
+        </a:xfrm>
+      </p:grpSpPr>
+      <p:sp>
+        <p:nvSpPr>
+          <p:cNvPr id="2" name="Text 0"/>
+          <p:cNvSpPr/>
+          <p:nvPr/>
+        </p:nvSpPr>
+        <p:spPr>
+          <a:xfrm>
+            <a:off x="548640" y="384048"/>
+            <a:ext cx="11064240" cy="731520"/>
+          </a:xfrm>
+          <a:prstGeom prst="rect">
+            <a:avLst/>
+          </a:prstGeom>
+          <a:noFill/>
+          <a:ln/>
+        </p:spPr>
+        <p:txBody>
+          <a:bodyPr wrap="square" lIns="0" tIns="0" rIns="0" bIns="0" rtlCol="0" anchor="ctr"/>
+          <a:lstStyle/>
+          <a:p>
+            <a:pPr algn="l" indent="0" marL="0">
+              <a:buNone/>
+            </a:pPr>
+            <a:r>
+              <a:rPr lang="en-US" sz="3200" b="1" dirty="0">
+                <a:solidFill>
+                  <a:srgbClr val="6B2333"/>
+                </a:solidFill>
+                <a:latin typeface="Cambria" pitchFamily="34" charset="0"/>
+                <a:ea typeface="Cambria" pitchFamily="34" charset="-122"/>
+                <a:cs typeface="Cambria" pitchFamily="34" charset="-120"/>
+              </a:rPr>
               <a:t>You were right #1: look at the loss curves</a:t>
             </a:r>
             <a:endParaRPr lang="en-US" sz="3200" dirty="0"/>
@@ -6322,9 +11163,9 @@
 </p:sld>
 </file>
 
-<file path=ppt/slides/slide5.xml><?xml version="1.0" encoding="utf-8"?>
+<file path=ppt/slides/slide6.xml><?xml version="1.0" encoding="utf-8"?>
 <p:sld xmlns:a="http://schemas.openxmlformats.org/drawingml/2006/main" xmlns:r="http://schemas.openxmlformats.org/officeDocument/2006/relationships" xmlns:p="http://schemas.openxmlformats.org/presentationml/2006/main">
-  <p:cSld name="Slide 5">
+  <p:cSld name="Slide 6">
     <p:bg>
       <p:bgPr>
         <a:solidFill>
@@ -6544,7 +11385,7 @@
       </p:sp>
       <p:graphicFrame>
         <p:nvGraphicFramePr>
-          <p:cNvPr id="6" name="Table 0"/>
+          <p:cNvPr id="7" name="Table 0"/>
           <p:cNvGraphicFramePr>
             <a:graphicFrameLocks noGrp="1"/>
           </p:cNvGraphicFramePr>
@@ -9021,9 +13862,9 @@
 </p:sld>
 </file>
 
-<file path=ppt/slides/slide6.xml><?xml version="1.0" encoding="utf-8"?>
+<file path=ppt/slides/slide7.xml><?xml version="1.0" encoding="utf-8"?>
 <p:sld xmlns:a="http://schemas.openxmlformats.org/drawingml/2006/main" xmlns:r="http://schemas.openxmlformats.org/officeDocument/2006/relationships" xmlns:p="http://schemas.openxmlformats.org/presentationml/2006/main">
-  <p:cSld name="Slide 6">
+  <p:cSld name="Slide 7">
     <p:bg>
       <p:bgPr>
         <a:solidFill>
@@ -9175,9 +14016,9 @@
 </p:sld>
 </file>
 
-<file path=ppt/slides/slide7.xml><?xml version="1.0" encoding="utf-8"?>
+<file path=ppt/slides/slide8.xml><?xml version="1.0" encoding="utf-8"?>
 <p:sld xmlns:a="http://schemas.openxmlformats.org/drawingml/2006/main" xmlns:r="http://schemas.openxmlformats.org/officeDocument/2006/relationships" xmlns:p="http://schemas.openxmlformats.org/presentationml/2006/main">
-  <p:cSld name="Slide 7">
+  <p:cSld name="Slide 8">
     <p:bg>
       <p:bgPr>
         <a:solidFill>
@@ -9329,9 +14170,9 @@
 </p:sld>
 </file>
 
-<file path=ppt/slides/slide8.xml><?xml version="1.0" encoding="utf-8"?>
+<file path=ppt/slides/slide9.xml><?xml version="1.0" encoding="utf-8"?>
 <p:sld xmlns:a="http://schemas.openxmlformats.org/drawingml/2006/main" xmlns:r="http://schemas.openxmlformats.org/officeDocument/2006/relationships" xmlns:p="http://schemas.openxmlformats.org/presentationml/2006/main">
-  <p:cSld name="Slide 8">
+  <p:cSld name="Slide 9">
     <p:bg>
       <p:bgPr>
         <a:solidFill>
@@ -9585,1184 +14426,6 @@
           </a:graphicData>
         </a:graphic>
       </p:graphicFrame>
-    </p:spTree>
-  </p:cSld>
-  <p:clrMapOvr>
-    <a:masterClrMapping/>
-  </p:clrMapOvr>
-</p:sld>
-</file>
-
-<file path=ppt/slides/slide9.xml><?xml version="1.0" encoding="utf-8"?>
-<p:sld xmlns:a="http://schemas.openxmlformats.org/drawingml/2006/main" xmlns:r="http://schemas.openxmlformats.org/officeDocument/2006/relationships" xmlns:p="http://schemas.openxmlformats.org/presentationml/2006/main">
-  <p:cSld name="Slide 9">
-    <p:bg>
-      <p:bgPr>
-        <a:solidFill>
-          <a:srgbClr val="FAF8F2"/>
-        </a:solidFill>
-      </p:bgPr>
-    </p:bg>
-    <p:spTree>
-      <p:nvGrpSpPr>
-        <p:cNvPr id="1" name=""/>
-        <p:cNvGrpSpPr/>
-        <p:nvPr/>
-      </p:nvGrpSpPr>
-      <p:grpSpPr>
-        <a:xfrm>
-          <a:off x="0" y="0"/>
-          <a:ext cx="0" cy="0"/>
-          <a:chOff x="0" y="0"/>
-          <a:chExt cx="0" cy="0"/>
-        </a:xfrm>
-      </p:grpSpPr>
-      <p:sp>
-        <p:nvSpPr>
-          <p:cNvPr id="2" name="Text 0"/>
-          <p:cNvSpPr/>
-          <p:nvPr/>
-        </p:nvSpPr>
-        <p:spPr>
-          <a:xfrm>
-            <a:off x="548640" y="384048"/>
-            <a:ext cx="11064240" cy="731520"/>
-          </a:xfrm>
-          <a:prstGeom prst="rect">
-            <a:avLst/>
-          </a:prstGeom>
-          <a:noFill/>
-          <a:ln/>
-        </p:spPr>
-        <p:txBody>
-          <a:bodyPr wrap="square" lIns="0" tIns="0" rIns="0" bIns="0" rtlCol="0" anchor="ctr"/>
-          <a:lstStyle/>
-          <a:p>
-            <a:pPr algn="l" indent="0" marL="0">
-              <a:buNone/>
-            </a:pPr>
-            <a:r>
-              <a:rPr lang="en-US" sz="3200" b="1" dirty="0">
-                <a:solidFill>
-                  <a:srgbClr val="6B2333"/>
-                </a:solidFill>
-                <a:latin typeface="Cambria" pitchFamily="34" charset="0"/>
-                <a:ea typeface="Cambria" pitchFamily="34" charset="-122"/>
-                <a:cs typeface="Cambria" pitchFamily="34" charset="-120"/>
-              </a:rPr>
-              <a:t>Inference: NN vs the mechanistic model</a:t>
-            </a:r>
-            <a:endParaRPr lang="en-US" sz="3200" dirty="0"/>
-          </a:p>
-        </p:txBody>
-      </p:sp>
-      <p:sp>
-        <p:nvSpPr>
-          <p:cNvPr id="3" name="Text 1"/>
-          <p:cNvSpPr/>
-          <p:nvPr/>
-        </p:nvSpPr>
-        <p:spPr>
-          <a:xfrm>
-            <a:off x="548640" y="1463040"/>
-            <a:ext cx="5486400" cy="731520"/>
-          </a:xfrm>
-          <a:prstGeom prst="rect">
-            <a:avLst/>
-          </a:prstGeom>
-          <a:noFill/>
-          <a:ln/>
-        </p:spPr>
-        <p:txBody>
-          <a:bodyPr wrap="square" lIns="0" tIns="0" rIns="0" bIns="0" rtlCol="0" anchor="ctr"/>
-          <a:lstStyle/>
-          <a:p>
-            <a:pPr algn="l" indent="0" marL="0">
-              <a:buNone/>
-            </a:pPr>
-            <a:r>
-              <a:rPr lang="en-US" sz="3000" b="1" dirty="0">
-                <a:solidFill>
-                  <a:srgbClr val="6B2333"/>
-                </a:solidFill>
-                <a:latin typeface="Cambria" pitchFamily="34" charset="0"/>
-                <a:ea typeface="Cambria" pitchFamily="34" charset="-122"/>
-                <a:cs typeface="Cambria" pitchFamily="34" charset="-120"/>
-              </a:rPr>
-              <a:t>~15 min  →  0.0013 ms</a:t>
-            </a:r>
-            <a:endParaRPr lang="en-US" sz="3000" dirty="0"/>
-          </a:p>
-        </p:txBody>
-      </p:sp>
-      <p:sp>
-        <p:nvSpPr>
-          <p:cNvPr id="4" name="Text 2"/>
-          <p:cNvSpPr/>
-          <p:nvPr/>
-        </p:nvSpPr>
-        <p:spPr>
-          <a:xfrm>
-            <a:off x="548640" y="2286000"/>
-            <a:ext cx="5486400" cy="1463040"/>
-          </a:xfrm>
-          <a:prstGeom prst="rect">
-            <a:avLst/>
-          </a:prstGeom>
-          <a:noFill/>
-          <a:ln/>
-        </p:spPr>
-        <p:txBody>
-          <a:bodyPr wrap="square" lIns="0" tIns="0" rIns="0" bIns="0" rtlCol="0" anchor="t"/>
-          <a:lstStyle/>
-          <a:p>
-            <a:pPr algn="l" indent="0" marL="0">
-              <a:lnSpc>
-                <a:spcPct val="120000"/>
-              </a:lnSpc>
-              <a:buNone/>
-            </a:pPr>
-            <a:r>
-              <a:rPr lang="en-US" sz="1600" dirty="0">
-                <a:solidFill>
-                  <a:srgbClr val="2B211A"/>
-                </a:solidFill>
-                <a:latin typeface="Calibri" pitchFamily="34" charset="0"/>
-                <a:ea typeface="Calibri" pitchFamily="34" charset="-122"/>
-                <a:cs typeface="Calibri" pitchFamily="34" charset="-120"/>
-              </a:rPr>
-              <a:t>COSMIC-dFBA takes </a:t>
-            </a:r>
-            <a:pPr algn="l" indent="0" marL="0">
-              <a:lnSpc>
-                <a:spcPct val="120000"/>
-              </a:lnSpc>
-              <a:buNone/>
-            </a:pPr>
-            <a:r>
-              <a:rPr lang="en-US" sz="1600" b="1" dirty="0">
-                <a:solidFill>
-                  <a:srgbClr val="6B2333"/>
-                </a:solidFill>
-                <a:latin typeface="Calibri" pitchFamily="34" charset="0"/>
-                <a:ea typeface="Calibri" pitchFamily="34" charset="-122"/>
-                <a:cs typeface="Calibri" pitchFamily="34" charset="-120"/>
-              </a:rPr>
-              <a:t>~15 minutes per reactor</a:t>
-            </a:r>
-            <a:pPr algn="l" indent="0" marL="0">
-              <a:lnSpc>
-                <a:spcPct val="120000"/>
-              </a:lnSpc>
-              <a:buNone/>
-            </a:pPr>
-            <a:r>
-              <a:rPr lang="en-US" sz="1600" dirty="0">
-                <a:solidFill>
-                  <a:srgbClr val="2B211A"/>
-                </a:solidFill>
-                <a:latin typeface="Calibri" pitchFamily="34" charset="0"/>
-                <a:ea typeface="Calibri" pitchFamily="34" charset="-122"/>
-                <a:cs typeface="Calibri" pitchFamily="34" charset="-120"/>
-              </a:rPr>
-              <a:t> (Sarat: 3.7 GHz CPU, no parallelization, 1-day resolution). The NN predicts the same run in 0.0013 ms, hundreds of millions of times faster.</a:t>
-            </a:r>
-            <a:endParaRPr lang="en-US" sz="1600" dirty="0"/>
-          </a:p>
-        </p:txBody>
-      </p:sp>
-      <p:sp>
-        <p:nvSpPr>
-          <p:cNvPr id="5" name="Text 3"/>
-          <p:cNvSpPr/>
-          <p:nvPr/>
-        </p:nvSpPr>
-        <p:spPr>
-          <a:xfrm>
-            <a:off x="548640" y="3794760"/>
-            <a:ext cx="5486400" cy="1554480"/>
-          </a:xfrm>
-          <a:prstGeom prst="rect">
-            <a:avLst/>
-          </a:prstGeom>
-          <a:noFill/>
-          <a:ln/>
-        </p:spPr>
-        <p:txBody>
-          <a:bodyPr wrap="square" lIns="0" tIns="0" rIns="0" bIns="0" rtlCol="0" anchor="t"/>
-          <a:lstStyle/>
-          <a:p>
-            <a:pPr algn="l" indent="0" marL="0">
-              <a:lnSpc>
-                <a:spcPct val="115000"/>
-              </a:lnSpc>
-              <a:buNone/>
-            </a:pPr>
-            <a:r>
-              <a:rPr lang="en-US" sz="1500" b="1" dirty="0">
-                <a:solidFill>
-                  <a:srgbClr val="3A4A2E"/>
-                </a:solidFill>
-                <a:latin typeface="Calibri" pitchFamily="34" charset="0"/>
-                <a:ea typeface="Calibri" pitchFamily="34" charset="-122"/>
-                <a:cs typeface="Calibri" pitchFamily="34" charset="-120"/>
-              </a:rPr>
-              <a:t>Honest caveat (Sarat).  </a:t>
-            </a:r>
-            <a:pPr algn="l" indent="0" marL="0">
-              <a:lnSpc>
-                <a:spcPct val="115000"/>
-              </a:lnSpc>
-              <a:buNone/>
-            </a:pPr>
-            <a:r>
-              <a:rPr lang="en-US" sz="1500" dirty="0">
-                <a:solidFill>
-                  <a:srgbClr val="2B211A"/>
-                </a:solidFill>
-                <a:latin typeface="Calibri" pitchFamily="34" charset="0"/>
-                <a:ea typeface="Calibri" pitchFamily="34" charset="-122"/>
-                <a:cs typeface="Calibri" pitchFamily="34" charset="-120"/>
-              </a:rPr>
-              <a:t>Any empirical model beats a mechanistic flux-balance simulation, so this is expected. COSMIC-dFBA's niche is mechanistic insight; the speed enables real-time use, it is not the contribution.</a:t>
-            </a:r>
-            <a:endParaRPr lang="en-US" sz="1500" dirty="0"/>
-          </a:p>
-        </p:txBody>
-      </p:sp>
-      <p:sp>
-        <p:nvSpPr>
-          <p:cNvPr id="6" name="Text 4"/>
-          <p:cNvSpPr/>
-          <p:nvPr/>
-        </p:nvSpPr>
-        <p:spPr>
-          <a:xfrm>
-            <a:off x="6400800" y="1645920"/>
-            <a:ext cx="5212080" cy="640080"/>
-          </a:xfrm>
-          <a:prstGeom prst="rect">
-            <a:avLst/>
-          </a:prstGeom>
-          <a:noFill/>
-          <a:ln/>
-        </p:spPr>
-        <p:txBody>
-          <a:bodyPr wrap="square" lIns="0" tIns="0" rIns="0" bIns="0" rtlCol="0" anchor="t"/>
-          <a:lstStyle/>
-          <a:p>
-            <a:pPr algn="l" indent="0" marL="0">
-              <a:buNone/>
-            </a:pPr>
-            <a:r>
-              <a:rPr lang="en-US" sz="1200" i="1" dirty="0">
-                <a:solidFill>
-                  <a:srgbClr val="7A6E5A"/>
-                </a:solidFill>
-                <a:latin typeface="Calibri" pitchFamily="34" charset="0"/>
-                <a:ea typeface="Calibri" pitchFamily="34" charset="-122"/>
-                <a:cs typeface="Calibri" pitchFamily="34" charset="-120"/>
-              </a:rPr>
-              <a:t>A separate comparison: our fast synthetic generator (a simplified ODE, what we train on), not COSMIC-dFBA:</a:t>
-            </a:r>
-            <a:endParaRPr lang="en-US" sz="1200" dirty="0"/>
-          </a:p>
-        </p:txBody>
-      </p:sp>
-      <p:graphicFrame>
-        <p:nvGraphicFramePr>
-          <p:cNvPr id="10" name="Table 0"/>
-          <p:cNvGraphicFramePr>
-            <a:graphicFrameLocks noGrp="1"/>
-          </p:cNvGraphicFramePr>
-          <p:nvPr>
-            <p:extLst>
-              <p:ext uri="{D42A27DB-BD31-4B8C-83A1-F6EECF244321}">
-                <p14:modId xmlns:p14="http://schemas.microsoft.com/office/powerpoint/2010/main" val="1579011935"/>
-              </p:ext>
-            </p:extLst>
-          </p:nvPr>
-        </p:nvGraphicFramePr>
-        <p:xfrm>
-          <a:off x="6400800" y="2468880"/>
-          <a:ext cx="5212080" cy="914400"/>
-        </p:xfrm>
-        <a:graphic>
-          <a:graphicData uri="http://schemas.openxmlformats.org/drawingml/2006/table">
-            <a:tbl>
-              <a:tblPr/>
-              <a:tblGrid>
-                <a:gridCol w="3017520"/>
-                <a:gridCol w="1097280"/>
-                <a:gridCol w="1097280"/>
-              </a:tblGrid>
-              <a:tr h="603504">
-                <a:tc>
-                  <a:txBody>
-                    <a:bodyPr/>
-                    <a:lstStyle/>
-                    <a:p>
-                      <a:pPr algn="l" indent="0" marL="0">
-                        <a:buNone/>
-                      </a:pPr>
-                      <a:r>
-                        <a:rPr lang="en-US" sz="1250" b="1" dirty="0">
-                          <a:solidFill>
-                            <a:srgbClr val="F3ECD8"/>
-                          </a:solidFill>
-                          <a:latin typeface="Calibri" pitchFamily="34" charset="0"/>
-                          <a:ea typeface="Calibri" pitchFamily="34" charset="-122"/>
-                          <a:cs typeface="Calibri" pitchFamily="34" charset="-120"/>
-                        </a:rPr>
-                        <a:t>method</a:t>
-                      </a:r>
-                      <a:endParaRPr lang="en-US" sz="1250" dirty="0">
-                        <a:latin typeface="Calibri" charset="0"/>
-                        <a:ea typeface="Calibri" charset="0"/>
-                        <a:cs typeface="Calibri" charset="0"/>
-                      </a:endParaRPr>
-                    </a:p>
-                  </a:txBody>
-                  <a:tcPr marL="91440" marR="91440" marT="45720" marB="45720" anchor="ctr">
-                    <a:lnL w="12700" cap="flat" cmpd="sng" algn="ctr">
-                      <a:solidFill>
-                        <a:srgbClr val="E6DEC9"/>
-                      </a:solidFill>
-                      <a:prstDash val="solid"/>
-                      <a:round/>
-                      <a:headEnd type="none" w="med" len="med"/>
-                      <a:tailEnd type="none" w="med" len="med"/>
-                    </a:lnL>
-                    <a:lnR w="12700" cap="flat" cmpd="sng" algn="ctr">
-                      <a:solidFill>
-                        <a:srgbClr val="E6DEC9"/>
-                      </a:solidFill>
-                      <a:prstDash val="solid"/>
-                      <a:round/>
-                      <a:headEnd type="none" w="med" len="med"/>
-                      <a:tailEnd type="none" w="med" len="med"/>
-                    </a:lnR>
-                    <a:lnT w="12700" cap="flat" cmpd="sng" algn="ctr">
-                      <a:solidFill>
-                        <a:srgbClr val="E6DEC9"/>
-                      </a:solidFill>
-                      <a:prstDash val="solid"/>
-                      <a:round/>
-                      <a:headEnd type="none" w="med" len="med"/>
-                      <a:tailEnd type="none" w="med" len="med"/>
-                    </a:lnT>
-                    <a:lnB w="12700" cap="flat" cmpd="sng" algn="ctr">
-                      <a:solidFill>
-                        <a:srgbClr val="E6DEC9"/>
-                      </a:solidFill>
-                      <a:prstDash val="solid"/>
-                      <a:round/>
-                      <a:headEnd type="none" w="med" len="med"/>
-                      <a:tailEnd type="none" w="med" len="med"/>
-                    </a:lnB>
-                    <a:solidFill>
-                      <a:srgbClr val="6B2333"/>
-                    </a:solidFill>
-                  </a:tcPr>
-                </a:tc>
-                <a:tc>
-                  <a:txBody>
-                    <a:bodyPr/>
-                    <a:lstStyle/>
-                    <a:p>
-                      <a:pPr algn="ctr" indent="0" marL="0">
-                        <a:buNone/>
-                      </a:pPr>
-                      <a:r>
-                        <a:rPr lang="en-US" sz="1250" b="1" dirty="0">
-                          <a:solidFill>
-                            <a:srgbClr val="F3ECD8"/>
-                          </a:solidFill>
-                          <a:latin typeface="Calibri" pitchFamily="34" charset="0"/>
-                          <a:ea typeface="Calibri" pitchFamily="34" charset="-122"/>
-                          <a:cs typeface="Calibri" pitchFamily="34" charset="-120"/>
-                        </a:rPr>
-                        <a:t>ms/reactor</a:t>
-                      </a:r>
-                      <a:endParaRPr lang="en-US" sz="1250" dirty="0">
-                        <a:latin typeface="Calibri" charset="0"/>
-                        <a:ea typeface="Calibri" charset="0"/>
-                        <a:cs typeface="Calibri" charset="0"/>
-                      </a:endParaRPr>
-                    </a:p>
-                  </a:txBody>
-                  <a:tcPr marL="91440" marR="91440" marT="45720" marB="45720" anchor="ctr">
-                    <a:lnL w="12700" cap="flat" cmpd="sng" algn="ctr">
-                      <a:solidFill>
-                        <a:srgbClr val="E6DEC9"/>
-                      </a:solidFill>
-                      <a:prstDash val="solid"/>
-                      <a:round/>
-                      <a:headEnd type="none" w="med" len="med"/>
-                      <a:tailEnd type="none" w="med" len="med"/>
-                    </a:lnL>
-                    <a:lnR w="12700" cap="flat" cmpd="sng" algn="ctr">
-                      <a:solidFill>
-                        <a:srgbClr val="E6DEC9"/>
-                      </a:solidFill>
-                      <a:prstDash val="solid"/>
-                      <a:round/>
-                      <a:headEnd type="none" w="med" len="med"/>
-                      <a:tailEnd type="none" w="med" len="med"/>
-                    </a:lnR>
-                    <a:lnT w="12700" cap="flat" cmpd="sng" algn="ctr">
-                      <a:solidFill>
-                        <a:srgbClr val="E6DEC9"/>
-                      </a:solidFill>
-                      <a:prstDash val="solid"/>
-                      <a:round/>
-                      <a:headEnd type="none" w="med" len="med"/>
-                      <a:tailEnd type="none" w="med" len="med"/>
-                    </a:lnT>
-                    <a:lnB w="12700" cap="flat" cmpd="sng" algn="ctr">
-                      <a:solidFill>
-                        <a:srgbClr val="E6DEC9"/>
-                      </a:solidFill>
-                      <a:prstDash val="solid"/>
-                      <a:round/>
-                      <a:headEnd type="none" w="med" len="med"/>
-                      <a:tailEnd type="none" w="med" len="med"/>
-                    </a:lnB>
-                    <a:solidFill>
-                      <a:srgbClr val="6B2333"/>
-                    </a:solidFill>
-                  </a:tcPr>
-                </a:tc>
-                <a:tc>
-                  <a:txBody>
-                    <a:bodyPr/>
-                    <a:lstStyle/>
-                    <a:p>
-                      <a:pPr algn="ctr" indent="0" marL="0">
-                        <a:buNone/>
-                      </a:pPr>
-                      <a:r>
-                        <a:rPr lang="en-US" sz="1250" b="1" dirty="0">
-                          <a:solidFill>
-                            <a:srgbClr val="F3ECD8"/>
-                          </a:solidFill>
-                          <a:latin typeface="Calibri" pitchFamily="34" charset="0"/>
-                          <a:ea typeface="Calibri" pitchFamily="34" charset="-122"/>
-                          <a:cs typeface="Calibri" pitchFamily="34" charset="-120"/>
-                        </a:rPr>
-                        <a:t>vs scipy</a:t>
-                      </a:r>
-                      <a:endParaRPr lang="en-US" sz="1250" dirty="0">
-                        <a:latin typeface="Calibri" charset="0"/>
-                        <a:ea typeface="Calibri" charset="0"/>
-                        <a:cs typeface="Calibri" charset="0"/>
-                      </a:endParaRPr>
-                    </a:p>
-                  </a:txBody>
-                  <a:tcPr marL="91440" marR="91440" marT="45720" marB="45720" anchor="ctr">
-                    <a:lnL w="12700" cap="flat" cmpd="sng" algn="ctr">
-                      <a:solidFill>
-                        <a:srgbClr val="E6DEC9"/>
-                      </a:solidFill>
-                      <a:prstDash val="solid"/>
-                      <a:round/>
-                      <a:headEnd type="none" w="med" len="med"/>
-                      <a:tailEnd type="none" w="med" len="med"/>
-                    </a:lnL>
-                    <a:lnR w="12700" cap="flat" cmpd="sng" algn="ctr">
-                      <a:solidFill>
-                        <a:srgbClr val="E6DEC9"/>
-                      </a:solidFill>
-                      <a:prstDash val="solid"/>
-                      <a:round/>
-                      <a:headEnd type="none" w="med" len="med"/>
-                      <a:tailEnd type="none" w="med" len="med"/>
-                    </a:lnR>
-                    <a:lnT w="12700" cap="flat" cmpd="sng" algn="ctr">
-                      <a:solidFill>
-                        <a:srgbClr val="E6DEC9"/>
-                      </a:solidFill>
-                      <a:prstDash val="solid"/>
-                      <a:round/>
-                      <a:headEnd type="none" w="med" len="med"/>
-                      <a:tailEnd type="none" w="med" len="med"/>
-                    </a:lnT>
-                    <a:lnB w="12700" cap="flat" cmpd="sng" algn="ctr">
-                      <a:solidFill>
-                        <a:srgbClr val="E6DEC9"/>
-                      </a:solidFill>
-                      <a:prstDash val="solid"/>
-                      <a:round/>
-                      <a:headEnd type="none" w="med" len="med"/>
-                      <a:tailEnd type="none" w="med" len="med"/>
-                    </a:lnB>
-                    <a:solidFill>
-                      <a:srgbClr val="6B2333"/>
-                    </a:solidFill>
-                  </a:tcPr>
-                </a:tc>
-              </a:tr>
-              <a:tr h="603504">
-                <a:tc>
-                  <a:txBody>
-                    <a:bodyPr/>
-                    <a:lstStyle/>
-                    <a:p>
-                      <a:pPr algn="l" indent="0" marL="0">
-                        <a:buNone/>
-                      </a:pPr>
-                      <a:r>
-                        <a:rPr lang="en-US" sz="1250" dirty="0">
-                          <a:solidFill>
-                            <a:srgbClr val="2B211A"/>
-                          </a:solidFill>
-                          <a:latin typeface="Calibri" pitchFamily="34" charset="0"/>
-                          <a:ea typeface="Calibri" pitchFamily="34" charset="-122"/>
-                          <a:cs typeface="Calibri" pitchFamily="34" charset="-120"/>
-                        </a:rPr>
-                        <a:t>numerical ODE (scipy, CPU)</a:t>
-                      </a:r>
-                      <a:endParaRPr lang="en-US" sz="1250" dirty="0">
-                        <a:latin typeface="Calibri" charset="0"/>
-                        <a:ea typeface="Calibri" charset="0"/>
-                        <a:cs typeface="Calibri" charset="0"/>
-                      </a:endParaRPr>
-                    </a:p>
-                  </a:txBody>
-                  <a:tcPr marL="91440" marR="91440" marT="45720" marB="45720" anchor="ctr">
-                    <a:lnL w="12700" cap="flat" cmpd="sng" algn="ctr">
-                      <a:solidFill>
-                        <a:srgbClr val="E6DEC9"/>
-                      </a:solidFill>
-                      <a:prstDash val="solid"/>
-                      <a:round/>
-                      <a:headEnd type="none" w="med" len="med"/>
-                      <a:tailEnd type="none" w="med" len="med"/>
-                    </a:lnL>
-                    <a:lnR w="12700" cap="flat" cmpd="sng" algn="ctr">
-                      <a:solidFill>
-                        <a:srgbClr val="E6DEC9"/>
-                      </a:solidFill>
-                      <a:prstDash val="solid"/>
-                      <a:round/>
-                      <a:headEnd type="none" w="med" len="med"/>
-                      <a:tailEnd type="none" w="med" len="med"/>
-                    </a:lnR>
-                    <a:lnT w="12700" cap="flat" cmpd="sng" algn="ctr">
-                      <a:solidFill>
-                        <a:srgbClr val="E6DEC9"/>
-                      </a:solidFill>
-                      <a:prstDash val="solid"/>
-                      <a:round/>
-                      <a:headEnd type="none" w="med" len="med"/>
-                      <a:tailEnd type="none" w="med" len="med"/>
-                    </a:lnT>
-                    <a:lnB w="12700" cap="flat" cmpd="sng" algn="ctr">
-                      <a:solidFill>
-                        <a:srgbClr val="E6DEC9"/>
-                      </a:solidFill>
-                      <a:prstDash val="solid"/>
-                      <a:round/>
-                      <a:headEnd type="none" w="med" len="med"/>
-                      <a:tailEnd type="none" w="med" len="med"/>
-                    </a:lnB>
-                    <a:solidFill>
-                      <a:srgbClr val="FAF8F2"/>
-                    </a:solidFill>
-                  </a:tcPr>
-                </a:tc>
-                <a:tc>
-                  <a:txBody>
-                    <a:bodyPr/>
-                    <a:lstStyle/>
-                    <a:p>
-                      <a:pPr algn="ctr" indent="0" marL="0">
-                        <a:buNone/>
-                      </a:pPr>
-                      <a:r>
-                        <a:rPr lang="en-US" sz="1250" dirty="0">
-                          <a:solidFill>
-                            <a:srgbClr val="2B211A"/>
-                          </a:solidFill>
-                          <a:latin typeface="Calibri" pitchFamily="34" charset="0"/>
-                          <a:ea typeface="Calibri" pitchFamily="34" charset="-122"/>
-                          <a:cs typeface="Calibri" pitchFamily="34" charset="-120"/>
-                        </a:rPr>
-                        <a:t>25.25</a:t>
-                      </a:r>
-                      <a:endParaRPr lang="en-US" sz="1250" dirty="0">
-                        <a:latin typeface="Calibri" charset="0"/>
-                        <a:ea typeface="Calibri" charset="0"/>
-                        <a:cs typeface="Calibri" charset="0"/>
-                      </a:endParaRPr>
-                    </a:p>
-                  </a:txBody>
-                  <a:tcPr marL="91440" marR="91440" marT="45720" marB="45720" anchor="ctr">
-                    <a:lnL w="12700" cap="flat" cmpd="sng" algn="ctr">
-                      <a:solidFill>
-                        <a:srgbClr val="E6DEC9"/>
-                      </a:solidFill>
-                      <a:prstDash val="solid"/>
-                      <a:round/>
-                      <a:headEnd type="none" w="med" len="med"/>
-                      <a:tailEnd type="none" w="med" len="med"/>
-                    </a:lnL>
-                    <a:lnR w="12700" cap="flat" cmpd="sng" algn="ctr">
-                      <a:solidFill>
-                        <a:srgbClr val="E6DEC9"/>
-                      </a:solidFill>
-                      <a:prstDash val="solid"/>
-                      <a:round/>
-                      <a:headEnd type="none" w="med" len="med"/>
-                      <a:tailEnd type="none" w="med" len="med"/>
-                    </a:lnR>
-                    <a:lnT w="12700" cap="flat" cmpd="sng" algn="ctr">
-                      <a:solidFill>
-                        <a:srgbClr val="E6DEC9"/>
-                      </a:solidFill>
-                      <a:prstDash val="solid"/>
-                      <a:round/>
-                      <a:headEnd type="none" w="med" len="med"/>
-                      <a:tailEnd type="none" w="med" len="med"/>
-                    </a:lnT>
-                    <a:lnB w="12700" cap="flat" cmpd="sng" algn="ctr">
-                      <a:solidFill>
-                        <a:srgbClr val="E6DEC9"/>
-                      </a:solidFill>
-                      <a:prstDash val="solid"/>
-                      <a:round/>
-                      <a:headEnd type="none" w="med" len="med"/>
-                      <a:tailEnd type="none" w="med" len="med"/>
-                    </a:lnB>
-                    <a:solidFill>
-                      <a:srgbClr val="FAF8F2"/>
-                    </a:solidFill>
-                  </a:tcPr>
-                </a:tc>
-                <a:tc>
-                  <a:txBody>
-                    <a:bodyPr/>
-                    <a:lstStyle/>
-                    <a:p>
-                      <a:pPr algn="ctr" indent="0" marL="0">
-                        <a:buNone/>
-                      </a:pPr>
-                      <a:r>
-                        <a:rPr lang="en-US" sz="1250" dirty="0">
-                          <a:solidFill>
-                            <a:srgbClr val="2B211A"/>
-                          </a:solidFill>
-                          <a:latin typeface="Calibri" pitchFamily="34" charset="0"/>
-                          <a:ea typeface="Calibri" pitchFamily="34" charset="-122"/>
-                          <a:cs typeface="Calibri" pitchFamily="34" charset="-120"/>
-                        </a:rPr>
-                        <a:t>1×</a:t>
-                      </a:r>
-                      <a:endParaRPr lang="en-US" sz="1250" dirty="0">
-                        <a:latin typeface="Calibri" charset="0"/>
-                        <a:ea typeface="Calibri" charset="0"/>
-                        <a:cs typeface="Calibri" charset="0"/>
-                      </a:endParaRPr>
-                    </a:p>
-                  </a:txBody>
-                  <a:tcPr marL="91440" marR="91440" marT="45720" marB="45720" anchor="ctr">
-                    <a:lnL w="12700" cap="flat" cmpd="sng" algn="ctr">
-                      <a:solidFill>
-                        <a:srgbClr val="E6DEC9"/>
-                      </a:solidFill>
-                      <a:prstDash val="solid"/>
-                      <a:round/>
-                      <a:headEnd type="none" w="med" len="med"/>
-                      <a:tailEnd type="none" w="med" len="med"/>
-                    </a:lnL>
-                    <a:lnR w="12700" cap="flat" cmpd="sng" algn="ctr">
-                      <a:solidFill>
-                        <a:srgbClr val="E6DEC9"/>
-                      </a:solidFill>
-                      <a:prstDash val="solid"/>
-                      <a:round/>
-                      <a:headEnd type="none" w="med" len="med"/>
-                      <a:tailEnd type="none" w="med" len="med"/>
-                    </a:lnR>
-                    <a:lnT w="12700" cap="flat" cmpd="sng" algn="ctr">
-                      <a:solidFill>
-                        <a:srgbClr val="E6DEC9"/>
-                      </a:solidFill>
-                      <a:prstDash val="solid"/>
-                      <a:round/>
-                      <a:headEnd type="none" w="med" len="med"/>
-                      <a:tailEnd type="none" w="med" len="med"/>
-                    </a:lnT>
-                    <a:lnB w="12700" cap="flat" cmpd="sng" algn="ctr">
-                      <a:solidFill>
-                        <a:srgbClr val="E6DEC9"/>
-                      </a:solidFill>
-                      <a:prstDash val="solid"/>
-                      <a:round/>
-                      <a:headEnd type="none" w="med" len="med"/>
-                      <a:tailEnd type="none" w="med" len="med"/>
-                    </a:lnB>
-                    <a:solidFill>
-                      <a:srgbClr val="FAF8F2"/>
-                    </a:solidFill>
-                  </a:tcPr>
-                </a:tc>
-              </a:tr>
-              <a:tr h="603504">
-                <a:tc>
-                  <a:txBody>
-                    <a:bodyPr/>
-                    <a:lstStyle/>
-                    <a:p>
-                      <a:pPr algn="l" indent="0" marL="0">
-                        <a:buNone/>
-                      </a:pPr>
-                      <a:r>
-                        <a:rPr lang="en-US" sz="1250" b="1" dirty="0">
-                          <a:solidFill>
-                            <a:srgbClr val="3A4A2E"/>
-                          </a:solidFill>
-                          <a:latin typeface="Calibri" pitchFamily="34" charset="0"/>
-                          <a:ea typeface="Calibri" pitchFamily="34" charset="-122"/>
-                          <a:cs typeface="Calibri" pitchFamily="34" charset="-120"/>
-                        </a:rPr>
-                        <a:t>closed-form ODE (GPU)</a:t>
-                      </a:r>
-                      <a:endParaRPr lang="en-US" sz="1250" dirty="0">
-                        <a:latin typeface="Calibri" charset="0"/>
-                        <a:ea typeface="Calibri" charset="0"/>
-                        <a:cs typeface="Calibri" charset="0"/>
-                      </a:endParaRPr>
-                    </a:p>
-                  </a:txBody>
-                  <a:tcPr marL="91440" marR="91440" marT="45720" marB="45720" anchor="ctr">
-                    <a:lnL w="12700" cap="flat" cmpd="sng" algn="ctr">
-                      <a:solidFill>
-                        <a:srgbClr val="E6DEC9"/>
-                      </a:solidFill>
-                      <a:prstDash val="solid"/>
-                      <a:round/>
-                      <a:headEnd type="none" w="med" len="med"/>
-                      <a:tailEnd type="none" w="med" len="med"/>
-                    </a:lnL>
-                    <a:lnR w="12700" cap="flat" cmpd="sng" algn="ctr">
-                      <a:solidFill>
-                        <a:srgbClr val="E6DEC9"/>
-                      </a:solidFill>
-                      <a:prstDash val="solid"/>
-                      <a:round/>
-                      <a:headEnd type="none" w="med" len="med"/>
-                      <a:tailEnd type="none" w="med" len="med"/>
-                    </a:lnR>
-                    <a:lnT w="12700" cap="flat" cmpd="sng" algn="ctr">
-                      <a:solidFill>
-                        <a:srgbClr val="E6DEC9"/>
-                      </a:solidFill>
-                      <a:prstDash val="solid"/>
-                      <a:round/>
-                      <a:headEnd type="none" w="med" len="med"/>
-                      <a:tailEnd type="none" w="med" len="med"/>
-                    </a:lnT>
-                    <a:lnB w="12700" cap="flat" cmpd="sng" algn="ctr">
-                      <a:solidFill>
-                        <a:srgbClr val="E6DEC9"/>
-                      </a:solidFill>
-                      <a:prstDash val="solid"/>
-                      <a:round/>
-                      <a:headEnd type="none" w="med" len="med"/>
-                      <a:tailEnd type="none" w="med" len="med"/>
-                    </a:lnB>
-                    <a:solidFill>
-                      <a:srgbClr val="FAF8F2"/>
-                    </a:solidFill>
-                  </a:tcPr>
-                </a:tc>
-                <a:tc>
-                  <a:txBody>
-                    <a:bodyPr/>
-                    <a:lstStyle/>
-                    <a:p>
-                      <a:pPr algn="ctr" indent="0" marL="0">
-                        <a:buNone/>
-                      </a:pPr>
-                      <a:r>
-                        <a:rPr lang="en-US" sz="1250" b="1" dirty="0">
-                          <a:solidFill>
-                            <a:srgbClr val="3A4A2E"/>
-                          </a:solidFill>
-                          <a:latin typeface="Calibri" pitchFamily="34" charset="0"/>
-                          <a:ea typeface="Calibri" pitchFamily="34" charset="-122"/>
-                          <a:cs typeface="Calibri" pitchFamily="34" charset="-120"/>
-                        </a:rPr>
-                        <a:t>0.0005</a:t>
-                      </a:r>
-                      <a:endParaRPr lang="en-US" sz="1250" dirty="0">
-                        <a:latin typeface="Calibri" charset="0"/>
-                        <a:ea typeface="Calibri" charset="0"/>
-                        <a:cs typeface="Calibri" charset="0"/>
-                      </a:endParaRPr>
-                    </a:p>
-                  </a:txBody>
-                  <a:tcPr marL="91440" marR="91440" marT="45720" marB="45720" anchor="ctr">
-                    <a:lnL w="12700" cap="flat" cmpd="sng" algn="ctr">
-                      <a:solidFill>
-                        <a:srgbClr val="E6DEC9"/>
-                      </a:solidFill>
-                      <a:prstDash val="solid"/>
-                      <a:round/>
-                      <a:headEnd type="none" w="med" len="med"/>
-                      <a:tailEnd type="none" w="med" len="med"/>
-                    </a:lnL>
-                    <a:lnR w="12700" cap="flat" cmpd="sng" algn="ctr">
-                      <a:solidFill>
-                        <a:srgbClr val="E6DEC9"/>
-                      </a:solidFill>
-                      <a:prstDash val="solid"/>
-                      <a:round/>
-                      <a:headEnd type="none" w="med" len="med"/>
-                      <a:tailEnd type="none" w="med" len="med"/>
-                    </a:lnR>
-                    <a:lnT w="12700" cap="flat" cmpd="sng" algn="ctr">
-                      <a:solidFill>
-                        <a:srgbClr val="E6DEC9"/>
-                      </a:solidFill>
-                      <a:prstDash val="solid"/>
-                      <a:round/>
-                      <a:headEnd type="none" w="med" len="med"/>
-                      <a:tailEnd type="none" w="med" len="med"/>
-                    </a:lnT>
-                    <a:lnB w="12700" cap="flat" cmpd="sng" algn="ctr">
-                      <a:solidFill>
-                        <a:srgbClr val="E6DEC9"/>
-                      </a:solidFill>
-                      <a:prstDash val="solid"/>
-                      <a:round/>
-                      <a:headEnd type="none" w="med" len="med"/>
-                      <a:tailEnd type="none" w="med" len="med"/>
-                    </a:lnB>
-                    <a:solidFill>
-                      <a:srgbClr val="FAF8F2"/>
-                    </a:solidFill>
-                  </a:tcPr>
-                </a:tc>
-                <a:tc>
-                  <a:txBody>
-                    <a:bodyPr/>
-                    <a:lstStyle/>
-                    <a:p>
-                      <a:pPr algn="ctr" indent="0" marL="0">
-                        <a:buNone/>
-                      </a:pPr>
-                      <a:r>
-                        <a:rPr lang="en-US" sz="1250" b="1" dirty="0">
-                          <a:solidFill>
-                            <a:srgbClr val="3A4A2E"/>
-                          </a:solidFill>
-                          <a:latin typeface="Calibri" pitchFamily="34" charset="0"/>
-                          <a:ea typeface="Calibri" pitchFamily="34" charset="-122"/>
-                          <a:cs typeface="Calibri" pitchFamily="34" charset="-120"/>
-                        </a:rPr>
-                        <a:t>47,000×</a:t>
-                      </a:r>
-                      <a:endParaRPr lang="en-US" sz="1250" dirty="0">
-                        <a:latin typeface="Calibri" charset="0"/>
-                        <a:ea typeface="Calibri" charset="0"/>
-                        <a:cs typeface="Calibri" charset="0"/>
-                      </a:endParaRPr>
-                    </a:p>
-                  </a:txBody>
-                  <a:tcPr marL="91440" marR="91440" marT="45720" marB="45720" anchor="ctr">
-                    <a:lnL w="12700" cap="flat" cmpd="sng" algn="ctr">
-                      <a:solidFill>
-                        <a:srgbClr val="E6DEC9"/>
-                      </a:solidFill>
-                      <a:prstDash val="solid"/>
-                      <a:round/>
-                      <a:headEnd type="none" w="med" len="med"/>
-                      <a:tailEnd type="none" w="med" len="med"/>
-                    </a:lnL>
-                    <a:lnR w="12700" cap="flat" cmpd="sng" algn="ctr">
-                      <a:solidFill>
-                        <a:srgbClr val="E6DEC9"/>
-                      </a:solidFill>
-                      <a:prstDash val="solid"/>
-                      <a:round/>
-                      <a:headEnd type="none" w="med" len="med"/>
-                      <a:tailEnd type="none" w="med" len="med"/>
-                    </a:lnR>
-                    <a:lnT w="12700" cap="flat" cmpd="sng" algn="ctr">
-                      <a:solidFill>
-                        <a:srgbClr val="E6DEC9"/>
-                      </a:solidFill>
-                      <a:prstDash val="solid"/>
-                      <a:round/>
-                      <a:headEnd type="none" w="med" len="med"/>
-                      <a:tailEnd type="none" w="med" len="med"/>
-                    </a:lnT>
-                    <a:lnB w="12700" cap="flat" cmpd="sng" algn="ctr">
-                      <a:solidFill>
-                        <a:srgbClr val="E6DEC9"/>
-                      </a:solidFill>
-                      <a:prstDash val="solid"/>
-                      <a:round/>
-                      <a:headEnd type="none" w="med" len="med"/>
-                      <a:tailEnd type="none" w="med" len="med"/>
-                    </a:lnB>
-                    <a:solidFill>
-                      <a:srgbClr val="FAF8F2"/>
-                    </a:solidFill>
-                  </a:tcPr>
-                </a:tc>
-              </a:tr>
-              <a:tr h="603504">
-                <a:tc>
-                  <a:txBody>
-                    <a:bodyPr/>
-                    <a:lstStyle/>
-                    <a:p>
-                      <a:pPr algn="l" indent="0" marL="0">
-                        <a:buNone/>
-                      </a:pPr>
-                      <a:r>
-                        <a:rPr lang="en-US" sz="1250" b="1" dirty="0">
-                          <a:solidFill>
-                            <a:srgbClr val="6B2333"/>
-                          </a:solidFill>
-                          <a:latin typeface="Calibri" pitchFamily="34" charset="0"/>
-                          <a:ea typeface="Calibri" pitchFamily="34" charset="-122"/>
-                          <a:cs typeface="Calibri" pitchFamily="34" charset="-120"/>
-                        </a:rPr>
-                        <a:t>pure NN (GPU, small)</a:t>
-                      </a:r>
-                      <a:endParaRPr lang="en-US" sz="1250" dirty="0">
-                        <a:latin typeface="Calibri" charset="0"/>
-                        <a:ea typeface="Calibri" charset="0"/>
-                        <a:cs typeface="Calibri" charset="0"/>
-                      </a:endParaRPr>
-                    </a:p>
-                  </a:txBody>
-                  <a:tcPr marL="91440" marR="91440" marT="45720" marB="45720" anchor="ctr">
-                    <a:lnL w="12700" cap="flat" cmpd="sng" algn="ctr">
-                      <a:solidFill>
-                        <a:srgbClr val="E6DEC9"/>
-                      </a:solidFill>
-                      <a:prstDash val="solid"/>
-                      <a:round/>
-                      <a:headEnd type="none" w="med" len="med"/>
-                      <a:tailEnd type="none" w="med" len="med"/>
-                    </a:lnL>
-                    <a:lnR w="12700" cap="flat" cmpd="sng" algn="ctr">
-                      <a:solidFill>
-                        <a:srgbClr val="E6DEC9"/>
-                      </a:solidFill>
-                      <a:prstDash val="solid"/>
-                      <a:round/>
-                      <a:headEnd type="none" w="med" len="med"/>
-                      <a:tailEnd type="none" w="med" len="med"/>
-                    </a:lnR>
-                    <a:lnT w="12700" cap="flat" cmpd="sng" algn="ctr">
-                      <a:solidFill>
-                        <a:srgbClr val="E6DEC9"/>
-                      </a:solidFill>
-                      <a:prstDash val="solid"/>
-                      <a:round/>
-                      <a:headEnd type="none" w="med" len="med"/>
-                      <a:tailEnd type="none" w="med" len="med"/>
-                    </a:lnT>
-                    <a:lnB w="12700" cap="flat" cmpd="sng" algn="ctr">
-                      <a:solidFill>
-                        <a:srgbClr val="E6DEC9"/>
-                      </a:solidFill>
-                      <a:prstDash val="solid"/>
-                      <a:round/>
-                      <a:headEnd type="none" w="med" len="med"/>
-                      <a:tailEnd type="none" w="med" len="med"/>
-                    </a:lnB>
-                    <a:solidFill>
-                      <a:srgbClr val="FAF8F2"/>
-                    </a:solidFill>
-                  </a:tcPr>
-                </a:tc>
-                <a:tc>
-                  <a:txBody>
-                    <a:bodyPr/>
-                    <a:lstStyle/>
-                    <a:p>
-                      <a:pPr algn="ctr" indent="0" marL="0">
-                        <a:buNone/>
-                      </a:pPr>
-                      <a:r>
-                        <a:rPr lang="en-US" sz="1250" b="1" dirty="0">
-                          <a:solidFill>
-                            <a:srgbClr val="6B2333"/>
-                          </a:solidFill>
-                          <a:latin typeface="Calibri" pitchFamily="34" charset="0"/>
-                          <a:ea typeface="Calibri" pitchFamily="34" charset="-122"/>
-                          <a:cs typeface="Calibri" pitchFamily="34" charset="-120"/>
-                        </a:rPr>
-                        <a:t>0.0005</a:t>
-                      </a:r>
-                      <a:endParaRPr lang="en-US" sz="1250" dirty="0">
-                        <a:latin typeface="Calibri" charset="0"/>
-                        <a:ea typeface="Calibri" charset="0"/>
-                        <a:cs typeface="Calibri" charset="0"/>
-                      </a:endParaRPr>
-                    </a:p>
-                  </a:txBody>
-                  <a:tcPr marL="91440" marR="91440" marT="45720" marB="45720" anchor="ctr">
-                    <a:lnL w="12700" cap="flat" cmpd="sng" algn="ctr">
-                      <a:solidFill>
-                        <a:srgbClr val="E6DEC9"/>
-                      </a:solidFill>
-                      <a:prstDash val="solid"/>
-                      <a:round/>
-                      <a:headEnd type="none" w="med" len="med"/>
-                      <a:tailEnd type="none" w="med" len="med"/>
-                    </a:lnL>
-                    <a:lnR w="12700" cap="flat" cmpd="sng" algn="ctr">
-                      <a:solidFill>
-                        <a:srgbClr val="E6DEC9"/>
-                      </a:solidFill>
-                      <a:prstDash val="solid"/>
-                      <a:round/>
-                      <a:headEnd type="none" w="med" len="med"/>
-                      <a:tailEnd type="none" w="med" len="med"/>
-                    </a:lnR>
-                    <a:lnT w="12700" cap="flat" cmpd="sng" algn="ctr">
-                      <a:solidFill>
-                        <a:srgbClr val="E6DEC9"/>
-                      </a:solidFill>
-                      <a:prstDash val="solid"/>
-                      <a:round/>
-                      <a:headEnd type="none" w="med" len="med"/>
-                      <a:tailEnd type="none" w="med" len="med"/>
-                    </a:lnT>
-                    <a:lnB w="12700" cap="flat" cmpd="sng" algn="ctr">
-                      <a:solidFill>
-                        <a:srgbClr val="E6DEC9"/>
-                      </a:solidFill>
-                      <a:prstDash val="solid"/>
-                      <a:round/>
-                      <a:headEnd type="none" w="med" len="med"/>
-                      <a:tailEnd type="none" w="med" len="med"/>
-                    </a:lnB>
-                    <a:solidFill>
-                      <a:srgbClr val="FAF8F2"/>
-                    </a:solidFill>
-                  </a:tcPr>
-                </a:tc>
-                <a:tc>
-                  <a:txBody>
-                    <a:bodyPr/>
-                    <a:lstStyle/>
-                    <a:p>
-                      <a:pPr algn="ctr" indent="0" marL="0">
-                        <a:buNone/>
-                      </a:pPr>
-                      <a:r>
-                        <a:rPr lang="en-US" sz="1250" b="1" dirty="0">
-                          <a:solidFill>
-                            <a:srgbClr val="6B2333"/>
-                          </a:solidFill>
-                          <a:latin typeface="Calibri" pitchFamily="34" charset="0"/>
-                          <a:ea typeface="Calibri" pitchFamily="34" charset="-122"/>
-                          <a:cs typeface="Calibri" pitchFamily="34" charset="-120"/>
-                        </a:rPr>
-                        <a:t>47,000×</a:t>
-                      </a:r>
-                      <a:endParaRPr lang="en-US" sz="1250" dirty="0">
-                        <a:latin typeface="Calibri" charset="0"/>
-                        <a:ea typeface="Calibri" charset="0"/>
-                        <a:cs typeface="Calibri" charset="0"/>
-                      </a:endParaRPr>
-                    </a:p>
-                  </a:txBody>
-                  <a:tcPr marL="91440" marR="91440" marT="45720" marB="45720" anchor="ctr">
-                    <a:lnL w="12700" cap="flat" cmpd="sng" algn="ctr">
-                      <a:solidFill>
-                        <a:srgbClr val="E6DEC9"/>
-                      </a:solidFill>
-                      <a:prstDash val="solid"/>
-                      <a:round/>
-                      <a:headEnd type="none" w="med" len="med"/>
-                      <a:tailEnd type="none" w="med" len="med"/>
-                    </a:lnL>
-                    <a:lnR w="12700" cap="flat" cmpd="sng" algn="ctr">
-                      <a:solidFill>
-                        <a:srgbClr val="E6DEC9"/>
-                      </a:solidFill>
-                      <a:prstDash val="solid"/>
-                      <a:round/>
-                      <a:headEnd type="none" w="med" len="med"/>
-                      <a:tailEnd type="none" w="med" len="med"/>
-                    </a:lnR>
-                    <a:lnT w="12700" cap="flat" cmpd="sng" algn="ctr">
-                      <a:solidFill>
-                        <a:srgbClr val="E6DEC9"/>
-                      </a:solidFill>
-                      <a:prstDash val="solid"/>
-                      <a:round/>
-                      <a:headEnd type="none" w="med" len="med"/>
-                      <a:tailEnd type="none" w="med" len="med"/>
-                    </a:lnT>
-                    <a:lnB w="12700" cap="flat" cmpd="sng" algn="ctr">
-                      <a:solidFill>
-                        <a:srgbClr val="E6DEC9"/>
-                      </a:solidFill>
-                      <a:prstDash val="solid"/>
-                      <a:round/>
-                      <a:headEnd type="none" w="med" len="med"/>
-                      <a:tailEnd type="none" w="med" len="med"/>
-                    </a:lnB>
-                    <a:solidFill>
-                      <a:srgbClr val="FAF8F2"/>
-                    </a:solidFill>
-                  </a:tcPr>
-                </a:tc>
-              </a:tr>
-            </a:tbl>
-          </a:graphicData>
-        </a:graphic>
-      </p:graphicFrame>
-      <p:sp>
-        <p:nvSpPr>
-          <p:cNvPr id="8" name="Text 5"/>
-          <p:cNvSpPr/>
-          <p:nvPr/>
-        </p:nvSpPr>
-        <p:spPr>
-          <a:xfrm>
-            <a:off x="6400800" y="5074920"/>
-            <a:ext cx="5212080" cy="822960"/>
-          </a:xfrm>
-          <a:prstGeom prst="rect">
-            <a:avLst/>
-          </a:prstGeom>
-          <a:noFill/>
-          <a:ln/>
-        </p:spPr>
-        <p:txBody>
-          <a:bodyPr wrap="square" lIns="0" tIns="0" rIns="0" bIns="0" rtlCol="0" anchor="t"/>
-          <a:lstStyle/>
-          <a:p>
-            <a:pPr algn="l" indent="0" marL="0">
-              <a:buNone/>
-            </a:pPr>
-            <a:r>
-              <a:rPr lang="en-US" sz="1100" i="1" dirty="0">
-                <a:solidFill>
-                  <a:srgbClr val="7A6E5A"/>
-                </a:solidFill>
-                <a:latin typeface="Calibri" pitchFamily="34" charset="0"/>
-                <a:ea typeface="Calibri" pitchFamily="34" charset="-122"/>
-                <a:cs typeface="Calibri" pitchFamily="34" charset="-120"/>
-              </a:rPr>
-              <a:t>A100, n = 20,000, small net (1 conv, hidden 32). The NN ties the exact closed-form ODE; this is our simplified generator, COSMIC-dFBA (~15 min) is off this chart entirely.</a:t>
-            </a:r>
-            <a:endParaRPr lang="en-US" sz="1100" dirty="0"/>
-          </a:p>
-        </p:txBody>
-      </p:sp>
     </p:spTree>
   </p:cSld>
   <p:clrMapOvr>

--- a/en_primeur_lab_meeting.pptx
+++ b/en_primeur_lab_meeting.pptx
@@ -14139,7 +14139,7 @@
                 <a:ea typeface="Calibri" pitchFamily="34" charset="-122"/>
                 <a:cs typeface="Calibri" pitchFamily="34" charset="-120"/>
               </a:rPr>
-              <a:t>Black = the true run.  Red dashed = the NN's forecast.  </a:t>
+              <a:t>Black = the synthetic ODE run (our ground truth).  Red dashed = the NN's forecast.  </a:t>
             </a:r>
             <a:pPr algn="l" indent="0" marL="0">
               <a:lnSpc>
@@ -14156,7 +14156,7 @@
                 <a:ea typeface="Calibri" pitchFamily="34" charset="-122"/>
                 <a:cs typeface="Calibri" pitchFamily="34" charset="-120"/>
               </a:rPr>
-              <a:t>The model sees only days 0–6 (left of the line), then predicts the peak and decline of days 6–12 on its own. R² 0.97.</a:t>
+              <a:t>The model sees only days 0–6 (left of the line), then predicts the peak and decline of days 6–12 on its own. R² 0.95. No real data is used, we test whether the NN reproduces the simulator.</a:t>
             </a:r>
             <a:endParaRPr lang="en-US" sz="1450" dirty="0"/>
           </a:p>
